--- a/캠핑_17기이정우.pptx
+++ b/캠핑_17기이정우.pptx
@@ -316,7 +316,7 @@
           <a:p>
             <a:fld id="{5BCAD085-E8A6-8845-BD4E-CB4CCA059FC4}" type="datetimeFigureOut">
               <a:rPr lang="en-US" smtClean="0"/>
-              <a:t>7/18/2026</a:t>
+              <a:t>7/19/2026</a:t>
             </a:fld>
             <a:endParaRPr lang="en-US"/>
           </a:p>
@@ -484,7 +484,7 @@
           <a:p>
             <a:fld id="{5BCAD085-E8A6-8845-BD4E-CB4CCA059FC4}" type="datetimeFigureOut">
               <a:rPr lang="en-US" smtClean="0"/>
-              <a:t>7/18/2026</a:t>
+              <a:t>7/19/2026</a:t>
             </a:fld>
             <a:endParaRPr lang="en-US"/>
           </a:p>
@@ -662,7 +662,7 @@
           <a:p>
             <a:fld id="{5BCAD085-E8A6-8845-BD4E-CB4CCA059FC4}" type="datetimeFigureOut">
               <a:rPr lang="en-US" smtClean="0"/>
-              <a:t>7/18/2026</a:t>
+              <a:t>7/19/2026</a:t>
             </a:fld>
             <a:endParaRPr lang="en-US"/>
           </a:p>
@@ -830,7 +830,7 @@
           <a:p>
             <a:fld id="{5BCAD085-E8A6-8845-BD4E-CB4CCA059FC4}" type="datetimeFigureOut">
               <a:rPr lang="en-US" smtClean="0"/>
-              <a:t>7/18/2026</a:t>
+              <a:t>7/19/2026</a:t>
             </a:fld>
             <a:endParaRPr lang="en-US"/>
           </a:p>
@@ -1075,7 +1075,7 @@
           <a:p>
             <a:fld id="{5BCAD085-E8A6-8845-BD4E-CB4CCA059FC4}" type="datetimeFigureOut">
               <a:rPr lang="en-US" smtClean="0"/>
-              <a:t>7/18/2026</a:t>
+              <a:t>7/19/2026</a:t>
             </a:fld>
             <a:endParaRPr lang="en-US"/>
           </a:p>
@@ -1360,7 +1360,7 @@
           <a:p>
             <a:fld id="{5BCAD085-E8A6-8845-BD4E-CB4CCA059FC4}" type="datetimeFigureOut">
               <a:rPr lang="en-US" smtClean="0"/>
-              <a:t>7/18/2026</a:t>
+              <a:t>7/19/2026</a:t>
             </a:fld>
             <a:endParaRPr lang="en-US"/>
           </a:p>
@@ -1779,7 +1779,7 @@
           <a:p>
             <a:fld id="{5BCAD085-E8A6-8845-BD4E-CB4CCA059FC4}" type="datetimeFigureOut">
               <a:rPr lang="en-US" smtClean="0"/>
-              <a:t>7/18/2026</a:t>
+              <a:t>7/19/2026</a:t>
             </a:fld>
             <a:endParaRPr lang="en-US"/>
           </a:p>
@@ -1896,7 +1896,7 @@
           <a:p>
             <a:fld id="{5BCAD085-E8A6-8845-BD4E-CB4CCA059FC4}" type="datetimeFigureOut">
               <a:rPr lang="en-US" smtClean="0"/>
-              <a:t>7/18/2026</a:t>
+              <a:t>7/19/2026</a:t>
             </a:fld>
             <a:endParaRPr lang="en-US"/>
           </a:p>
@@ -1991,7 +1991,7 @@
           <a:p>
             <a:fld id="{5BCAD085-E8A6-8845-BD4E-CB4CCA059FC4}" type="datetimeFigureOut">
               <a:rPr lang="en-US" smtClean="0"/>
-              <a:t>7/18/2026</a:t>
+              <a:t>7/19/2026</a:t>
             </a:fld>
             <a:endParaRPr lang="en-US"/>
           </a:p>
@@ -2266,7 +2266,7 @@
           <a:p>
             <a:fld id="{5BCAD085-E8A6-8845-BD4E-CB4CCA059FC4}" type="datetimeFigureOut">
               <a:rPr lang="en-US" smtClean="0"/>
-              <a:t>7/18/2026</a:t>
+              <a:t>7/19/2026</a:t>
             </a:fld>
             <a:endParaRPr lang="en-US"/>
           </a:p>
@@ -2518,7 +2518,7 @@
           <a:p>
             <a:fld id="{5BCAD085-E8A6-8845-BD4E-CB4CCA059FC4}" type="datetimeFigureOut">
               <a:rPr lang="en-US" smtClean="0"/>
-              <a:t>7/18/2026</a:t>
+              <a:t>7/19/2026</a:t>
             </a:fld>
             <a:endParaRPr lang="en-US"/>
           </a:p>
@@ -2729,7 +2729,7 @@
           <a:p>
             <a:fld id="{5BCAD085-E8A6-8845-BD4E-CB4CCA059FC4}" type="datetimeFigureOut">
               <a:rPr lang="en-US" smtClean="0"/>
-              <a:t>7/18/2026</a:t>
+              <a:t>7/19/2026</a:t>
             </a:fld>
             <a:endParaRPr lang="en-US"/>
           </a:p>
@@ -3553,7 +3553,7 @@
         <p:spPr>
           <a:xfrm>
             <a:off x="6215062" y="2174527"/>
-            <a:ext cx="5405437" cy="1060102"/>
+            <a:ext cx="5405437" cy="1856884"/>
           </a:xfrm>
           <a:prstGeom prst="rect">
             <a:avLst/>
@@ -3692,7 +3692,7 @@
         <p:spPr>
           <a:xfrm>
             <a:off x="6415087" y="1436340"/>
-            <a:ext cx="5005387" cy="395287"/>
+            <a:ext cx="5005387" cy="559961"/>
           </a:xfrm>
           <a:prstGeom prst="rect">
             <a:avLst/>
@@ -3711,14 +3711,375 @@
               </a:lnSpc>
             </a:pPr>
             <a:r>
-              <a:rPr sz="1012" b="0" i="0" u="none">
+              <a:rPr sz="1012" b="0" i="0" u="none" dirty="0">
                 <a:solidFill>
                   <a:srgbClr val="55665A"/>
                 </a:solidFill>
                 <a:latin typeface="Noto Sans KR"/>
               </a:rPr>
-              <a:t>@app.route 구문은 사용자가 주소창에 도메인을 치고 웹 브라우저로 접근했을 때, 서버 내부의 어떤 기능 함수가 마중 나가 응대할지 연결 지어 주는 관문입니다.</a:t>
-            </a:r>
+              <a:t>@app.route </a:t>
+            </a:r>
+            <a:r>
+              <a:rPr sz="1012" b="0" i="0" u="none" dirty="0" err="1">
+                <a:solidFill>
+                  <a:srgbClr val="55665A"/>
+                </a:solidFill>
+                <a:latin typeface="Noto Sans KR"/>
+              </a:rPr>
+              <a:t>구문은</a:t>
+            </a:r>
+            <a:r>
+              <a:rPr sz="1012" b="0" i="0" u="none" dirty="0">
+                <a:solidFill>
+                  <a:srgbClr val="55665A"/>
+                </a:solidFill>
+                <a:latin typeface="Noto Sans KR"/>
+              </a:rPr>
+              <a:t> </a:t>
+            </a:r>
+            <a:r>
+              <a:rPr sz="1012" b="0" i="0" u="none" dirty="0" err="1">
+                <a:solidFill>
+                  <a:srgbClr val="55665A"/>
+                </a:solidFill>
+                <a:latin typeface="Noto Sans KR"/>
+              </a:rPr>
+              <a:t>사용자가</a:t>
+            </a:r>
+            <a:r>
+              <a:rPr sz="1012" b="0" i="0" u="none" dirty="0">
+                <a:solidFill>
+                  <a:srgbClr val="55665A"/>
+                </a:solidFill>
+                <a:latin typeface="Noto Sans KR"/>
+              </a:rPr>
+              <a:t> </a:t>
+            </a:r>
+            <a:r>
+              <a:rPr sz="1012" b="0" i="0" u="none" dirty="0" err="1">
+                <a:solidFill>
+                  <a:srgbClr val="55665A"/>
+                </a:solidFill>
+                <a:latin typeface="Noto Sans KR"/>
+              </a:rPr>
+              <a:t>주소창에</a:t>
+            </a:r>
+            <a:r>
+              <a:rPr sz="1012" b="0" i="0" u="none" dirty="0">
+                <a:solidFill>
+                  <a:srgbClr val="55665A"/>
+                </a:solidFill>
+                <a:latin typeface="Noto Sans KR"/>
+              </a:rPr>
+              <a:t> </a:t>
+            </a:r>
+            <a:r>
+              <a:rPr sz="1012" b="0" i="0" u="none" dirty="0" err="1">
+                <a:solidFill>
+                  <a:srgbClr val="55665A"/>
+                </a:solidFill>
+                <a:latin typeface="Noto Sans KR"/>
+              </a:rPr>
+              <a:t>도메인을</a:t>
+            </a:r>
+            <a:r>
+              <a:rPr sz="1012" b="0" i="0" u="none" dirty="0">
+                <a:solidFill>
+                  <a:srgbClr val="55665A"/>
+                </a:solidFill>
+                <a:latin typeface="Noto Sans KR"/>
+              </a:rPr>
+              <a:t> </a:t>
+            </a:r>
+            <a:r>
+              <a:rPr sz="1012" b="0" i="0" u="none" dirty="0" err="1">
+                <a:solidFill>
+                  <a:srgbClr val="55665A"/>
+                </a:solidFill>
+                <a:latin typeface="Noto Sans KR"/>
+              </a:rPr>
+              <a:t>치고</a:t>
+            </a:r>
+            <a:r>
+              <a:rPr sz="1012" b="0" i="0" u="none" dirty="0">
+                <a:solidFill>
+                  <a:srgbClr val="55665A"/>
+                </a:solidFill>
+                <a:latin typeface="Noto Sans KR"/>
+              </a:rPr>
+              <a:t> 웹 </a:t>
+            </a:r>
+            <a:r>
+              <a:rPr sz="1012" b="0" i="0" u="none" dirty="0" err="1">
+                <a:solidFill>
+                  <a:srgbClr val="55665A"/>
+                </a:solidFill>
+                <a:latin typeface="Noto Sans KR"/>
+              </a:rPr>
+              <a:t>브라우저로</a:t>
+            </a:r>
+            <a:r>
+              <a:rPr sz="1012" b="0" i="0" u="none" dirty="0">
+                <a:solidFill>
+                  <a:srgbClr val="55665A"/>
+                </a:solidFill>
+                <a:latin typeface="Noto Sans KR"/>
+              </a:rPr>
+              <a:t> </a:t>
+            </a:r>
+            <a:r>
+              <a:rPr sz="1012" b="0" i="0" u="none" dirty="0" err="1">
+                <a:solidFill>
+                  <a:srgbClr val="55665A"/>
+                </a:solidFill>
+                <a:latin typeface="Noto Sans KR"/>
+              </a:rPr>
+              <a:t>접근했을</a:t>
+            </a:r>
+            <a:r>
+              <a:rPr sz="1012" b="0" i="0" u="none" dirty="0">
+                <a:solidFill>
+                  <a:srgbClr val="55665A"/>
+                </a:solidFill>
+                <a:latin typeface="Noto Sans KR"/>
+              </a:rPr>
+              <a:t> 때, </a:t>
+            </a:r>
+            <a:r>
+              <a:rPr sz="1012" b="0" i="0" u="none" dirty="0" err="1">
+                <a:solidFill>
+                  <a:srgbClr val="55665A"/>
+                </a:solidFill>
+                <a:latin typeface="Noto Sans KR"/>
+              </a:rPr>
+              <a:t>서버</a:t>
+            </a:r>
+            <a:r>
+              <a:rPr sz="1012" b="0" i="0" u="none" dirty="0">
+                <a:solidFill>
+                  <a:srgbClr val="55665A"/>
+                </a:solidFill>
+                <a:latin typeface="Noto Sans KR"/>
+              </a:rPr>
+              <a:t> </a:t>
+            </a:r>
+            <a:r>
+              <a:rPr sz="1012" b="0" i="0" u="none" dirty="0" err="1">
+                <a:solidFill>
+                  <a:srgbClr val="55665A"/>
+                </a:solidFill>
+                <a:latin typeface="Noto Sans KR"/>
+              </a:rPr>
+              <a:t>내부의</a:t>
+            </a:r>
+            <a:r>
+              <a:rPr sz="1012" b="0" i="0" u="none" dirty="0">
+                <a:solidFill>
+                  <a:srgbClr val="55665A"/>
+                </a:solidFill>
+                <a:latin typeface="Noto Sans KR"/>
+              </a:rPr>
+              <a:t> </a:t>
+            </a:r>
+            <a:r>
+              <a:rPr sz="1012" b="0" i="0" u="none" dirty="0" err="1">
+                <a:solidFill>
+                  <a:srgbClr val="55665A"/>
+                </a:solidFill>
+                <a:latin typeface="Noto Sans KR"/>
+              </a:rPr>
+              <a:t>어떤</a:t>
+            </a:r>
+            <a:r>
+              <a:rPr sz="1012" b="0" i="0" u="none" dirty="0">
+                <a:solidFill>
+                  <a:srgbClr val="55665A"/>
+                </a:solidFill>
+                <a:latin typeface="Noto Sans KR"/>
+              </a:rPr>
+              <a:t> </a:t>
+            </a:r>
+            <a:r>
+              <a:rPr sz="1012" b="0" i="0" u="none" dirty="0" err="1">
+                <a:solidFill>
+                  <a:srgbClr val="55665A"/>
+                </a:solidFill>
+                <a:latin typeface="Noto Sans KR"/>
+              </a:rPr>
+              <a:t>기능</a:t>
+            </a:r>
+            <a:r>
+              <a:rPr sz="1012" b="0" i="0" u="none" dirty="0">
+                <a:solidFill>
+                  <a:srgbClr val="55665A"/>
+                </a:solidFill>
+                <a:latin typeface="Noto Sans KR"/>
+              </a:rPr>
+              <a:t> </a:t>
+            </a:r>
+            <a:r>
+              <a:rPr sz="1012" b="0" i="0" u="none" dirty="0" err="1">
+                <a:solidFill>
+                  <a:srgbClr val="55665A"/>
+                </a:solidFill>
+                <a:latin typeface="Noto Sans KR"/>
+              </a:rPr>
+              <a:t>함수가</a:t>
+            </a:r>
+            <a:r>
+              <a:rPr sz="1012" b="0" i="0" u="none" dirty="0">
+                <a:solidFill>
+                  <a:srgbClr val="55665A"/>
+                </a:solidFill>
+                <a:latin typeface="Noto Sans KR"/>
+              </a:rPr>
+              <a:t> </a:t>
+            </a:r>
+            <a:r>
+              <a:rPr sz="1012" b="0" i="0" u="none" dirty="0" err="1">
+                <a:solidFill>
+                  <a:srgbClr val="55665A"/>
+                </a:solidFill>
+                <a:latin typeface="Noto Sans KR"/>
+              </a:rPr>
+              <a:t>마중</a:t>
+            </a:r>
+            <a:r>
+              <a:rPr sz="1012" b="0" i="0" u="none" dirty="0">
+                <a:solidFill>
+                  <a:srgbClr val="55665A"/>
+                </a:solidFill>
+                <a:latin typeface="Noto Sans KR"/>
+              </a:rPr>
+              <a:t> </a:t>
+            </a:r>
+            <a:r>
+              <a:rPr sz="1012" b="0" i="0" u="none" dirty="0" err="1">
+                <a:solidFill>
+                  <a:srgbClr val="55665A"/>
+                </a:solidFill>
+                <a:latin typeface="Noto Sans KR"/>
+              </a:rPr>
+              <a:t>나가</a:t>
+            </a:r>
+            <a:r>
+              <a:rPr sz="1012" b="0" i="0" u="none" dirty="0">
+                <a:solidFill>
+                  <a:srgbClr val="55665A"/>
+                </a:solidFill>
+                <a:latin typeface="Noto Sans KR"/>
+              </a:rPr>
+              <a:t> </a:t>
+            </a:r>
+            <a:r>
+              <a:rPr sz="1012" b="0" i="0" u="none" dirty="0" err="1">
+                <a:solidFill>
+                  <a:srgbClr val="55665A"/>
+                </a:solidFill>
+                <a:latin typeface="Noto Sans KR"/>
+              </a:rPr>
+              <a:t>응대할지</a:t>
+            </a:r>
+            <a:r>
+              <a:rPr sz="1012" b="0" i="0" u="none" dirty="0">
+                <a:solidFill>
+                  <a:srgbClr val="55665A"/>
+                </a:solidFill>
+                <a:latin typeface="Noto Sans KR"/>
+              </a:rPr>
+              <a:t> </a:t>
+            </a:r>
+            <a:r>
+              <a:rPr sz="1012" b="0" i="0" u="none" dirty="0" err="1">
+                <a:solidFill>
+                  <a:srgbClr val="55665A"/>
+                </a:solidFill>
+                <a:latin typeface="Noto Sans KR"/>
+              </a:rPr>
+              <a:t>연결</a:t>
+            </a:r>
+            <a:r>
+              <a:rPr sz="1012" b="0" i="0" u="none" dirty="0">
+                <a:solidFill>
+                  <a:srgbClr val="55665A"/>
+                </a:solidFill>
+                <a:latin typeface="Noto Sans KR"/>
+              </a:rPr>
+              <a:t> </a:t>
+            </a:r>
+            <a:r>
+              <a:rPr sz="1012" b="0" i="0" u="none" dirty="0" err="1">
+                <a:solidFill>
+                  <a:srgbClr val="55665A"/>
+                </a:solidFill>
+                <a:latin typeface="Noto Sans KR"/>
+              </a:rPr>
+              <a:t>지어</a:t>
+            </a:r>
+            <a:r>
+              <a:rPr sz="1012" b="0" i="0" u="none" dirty="0">
+                <a:solidFill>
+                  <a:srgbClr val="55665A"/>
+                </a:solidFill>
+                <a:latin typeface="Noto Sans KR"/>
+              </a:rPr>
+              <a:t> </a:t>
+            </a:r>
+            <a:r>
+              <a:rPr sz="1012" b="0" i="0" u="none" dirty="0" err="1">
+                <a:solidFill>
+                  <a:srgbClr val="55665A"/>
+                </a:solidFill>
+                <a:latin typeface="Noto Sans KR"/>
+              </a:rPr>
+              <a:t>주는</a:t>
+            </a:r>
+            <a:r>
+              <a:rPr sz="1012" b="0" i="0" u="none" dirty="0">
+                <a:solidFill>
+                  <a:srgbClr val="55665A"/>
+                </a:solidFill>
+                <a:latin typeface="Noto Sans KR"/>
+              </a:rPr>
+              <a:t> </a:t>
+            </a:r>
+            <a:r>
+              <a:rPr sz="1012" b="0" i="0" u="none" dirty="0" err="1">
+                <a:solidFill>
+                  <a:srgbClr val="55665A"/>
+                </a:solidFill>
+                <a:latin typeface="Noto Sans KR"/>
+              </a:rPr>
+              <a:t>관문입니다</a:t>
+            </a:r>
+            <a:r>
+              <a:rPr sz="1012" b="0" i="0" u="none" dirty="0">
+                <a:solidFill>
+                  <a:srgbClr val="55665A"/>
+                </a:solidFill>
+                <a:latin typeface="Noto Sans KR"/>
+              </a:rPr>
+              <a:t>.</a:t>
+            </a:r>
+            <a:endParaRPr lang="en-US" sz="1012" b="0" i="0" u="none" dirty="0">
+              <a:solidFill>
+                <a:srgbClr val="55665A"/>
+              </a:solidFill>
+              <a:latin typeface="Noto Sans KR"/>
+            </a:endParaRPr>
+          </a:p>
+          <a:p>
+            <a:pPr algn="l">
+              <a:lnSpc>
+                <a:spcPts val="1518"/>
+              </a:lnSpc>
+            </a:pPr>
+            <a:endParaRPr sz="1012" b="0" i="0" u="none" dirty="0">
+              <a:solidFill>
+                <a:srgbClr val="55665A"/>
+              </a:solidFill>
+              <a:latin typeface="Noto Sans KR"/>
+            </a:endParaRPr>
           </a:p>
         </p:txBody>
       </p:sp>
@@ -3770,7 +4131,7 @@
         <p:spPr>
           <a:xfrm>
             <a:off x="6415087" y="2648842"/>
-            <a:ext cx="5005387" cy="385762"/>
+            <a:ext cx="5005387" cy="1137043"/>
           </a:xfrm>
           <a:prstGeom prst="rect">
             <a:avLst/>
@@ -3789,14 +4150,516 @@
               </a:lnSpc>
             </a:pPr>
             <a:r>
-              <a:rPr sz="1012" b="1" i="0" u="none">
+              <a:rPr sz="1012" b="1" i="0" u="none" dirty="0">
                 <a:solidFill>
                   <a:srgbClr val="4A4230"/>
                 </a:solidFill>
                 <a:latin typeface="Noto Sans KR"/>
               </a:rPr>
-              <a:t>'사용자의 접근 요청 수수 ➔ 맞춤 데이터 추출 및 가공 ➔ 디자인 HTML 화면 반환'의 견고한 웹 프로덕션 표준 패턴을 정직하게 수수하여 뛰어난 호환성을 보장합니다.</a:t>
-            </a:r>
+              <a:t>'</a:t>
+            </a:r>
+            <a:r>
+              <a:rPr sz="1012" b="1" i="0" u="none" dirty="0" err="1">
+                <a:solidFill>
+                  <a:srgbClr val="4A4230"/>
+                </a:solidFill>
+                <a:latin typeface="Noto Sans KR"/>
+              </a:rPr>
+              <a:t>사용자의</a:t>
+            </a:r>
+            <a:r>
+              <a:rPr sz="1012" b="1" i="0" u="none" dirty="0">
+                <a:solidFill>
+                  <a:srgbClr val="4A4230"/>
+                </a:solidFill>
+                <a:latin typeface="Noto Sans KR"/>
+              </a:rPr>
+              <a:t> </a:t>
+            </a:r>
+            <a:r>
+              <a:rPr sz="1012" b="1" i="0" u="none" dirty="0" err="1">
+                <a:solidFill>
+                  <a:srgbClr val="4A4230"/>
+                </a:solidFill>
+                <a:latin typeface="Noto Sans KR"/>
+              </a:rPr>
+              <a:t>접근</a:t>
+            </a:r>
+            <a:r>
+              <a:rPr sz="1012" b="1" i="0" u="none" dirty="0">
+                <a:solidFill>
+                  <a:srgbClr val="4A4230"/>
+                </a:solidFill>
+                <a:latin typeface="Noto Sans KR"/>
+              </a:rPr>
+              <a:t> </a:t>
+            </a:r>
+            <a:r>
+              <a:rPr sz="1012" b="1" i="0" u="none" dirty="0" err="1">
+                <a:solidFill>
+                  <a:srgbClr val="4A4230"/>
+                </a:solidFill>
+                <a:latin typeface="Noto Sans KR"/>
+              </a:rPr>
+              <a:t>요청</a:t>
+            </a:r>
+            <a:r>
+              <a:rPr sz="1012" b="1" i="0" u="none" dirty="0">
+                <a:solidFill>
+                  <a:srgbClr val="4A4230"/>
+                </a:solidFill>
+                <a:latin typeface="Noto Sans KR"/>
+              </a:rPr>
+              <a:t> </a:t>
+            </a:r>
+            <a:r>
+              <a:rPr sz="1012" b="1" i="0" u="none" dirty="0" err="1">
+                <a:solidFill>
+                  <a:srgbClr val="4A4230"/>
+                </a:solidFill>
+                <a:latin typeface="Noto Sans KR"/>
+              </a:rPr>
+              <a:t>수수</a:t>
+            </a:r>
+            <a:r>
+              <a:rPr sz="1012" b="1" i="0" u="none" dirty="0">
+                <a:solidFill>
+                  <a:srgbClr val="4A4230"/>
+                </a:solidFill>
+                <a:latin typeface="Noto Sans KR"/>
+              </a:rPr>
+              <a:t> ➔ </a:t>
+            </a:r>
+            <a:r>
+              <a:rPr sz="1012" b="1" i="0" u="none" dirty="0" err="1">
+                <a:solidFill>
+                  <a:srgbClr val="4A4230"/>
+                </a:solidFill>
+                <a:latin typeface="Noto Sans KR"/>
+              </a:rPr>
+              <a:t>맞춤</a:t>
+            </a:r>
+            <a:r>
+              <a:rPr sz="1012" b="1" i="0" u="none" dirty="0">
+                <a:solidFill>
+                  <a:srgbClr val="4A4230"/>
+                </a:solidFill>
+                <a:latin typeface="Noto Sans KR"/>
+              </a:rPr>
+              <a:t> </a:t>
+            </a:r>
+            <a:r>
+              <a:rPr sz="1012" b="1" i="0" u="none" dirty="0" err="1">
+                <a:solidFill>
+                  <a:srgbClr val="4A4230"/>
+                </a:solidFill>
+                <a:latin typeface="Noto Sans KR"/>
+              </a:rPr>
+              <a:t>데이터</a:t>
+            </a:r>
+            <a:r>
+              <a:rPr sz="1012" b="1" i="0" u="none" dirty="0">
+                <a:solidFill>
+                  <a:srgbClr val="4A4230"/>
+                </a:solidFill>
+                <a:latin typeface="Noto Sans KR"/>
+              </a:rPr>
+              <a:t> </a:t>
+            </a:r>
+            <a:r>
+              <a:rPr sz="1012" b="1" i="0" u="none" dirty="0" err="1">
+                <a:solidFill>
+                  <a:srgbClr val="4A4230"/>
+                </a:solidFill>
+                <a:latin typeface="Noto Sans KR"/>
+              </a:rPr>
+              <a:t>추출</a:t>
+            </a:r>
+            <a:r>
+              <a:rPr sz="1012" b="1" i="0" u="none" dirty="0">
+                <a:solidFill>
+                  <a:srgbClr val="4A4230"/>
+                </a:solidFill>
+                <a:latin typeface="Noto Sans KR"/>
+              </a:rPr>
+              <a:t> 및 </a:t>
+            </a:r>
+            <a:r>
+              <a:rPr sz="1012" b="1" i="0" u="none" dirty="0" err="1">
+                <a:solidFill>
+                  <a:srgbClr val="4A4230"/>
+                </a:solidFill>
+                <a:latin typeface="Noto Sans KR"/>
+              </a:rPr>
+              <a:t>가공</a:t>
+            </a:r>
+            <a:r>
+              <a:rPr sz="1012" b="1" i="0" u="none" dirty="0">
+                <a:solidFill>
+                  <a:srgbClr val="4A4230"/>
+                </a:solidFill>
+                <a:latin typeface="Noto Sans KR"/>
+              </a:rPr>
+              <a:t> ➔ </a:t>
+            </a:r>
+            <a:r>
+              <a:rPr sz="1012" b="1" i="0" u="none" dirty="0" err="1">
+                <a:solidFill>
+                  <a:srgbClr val="4A4230"/>
+                </a:solidFill>
+                <a:latin typeface="Noto Sans KR"/>
+              </a:rPr>
+              <a:t>디자인</a:t>
+            </a:r>
+            <a:r>
+              <a:rPr sz="1012" b="1" i="0" u="none" dirty="0">
+                <a:solidFill>
+                  <a:srgbClr val="4A4230"/>
+                </a:solidFill>
+                <a:latin typeface="Noto Sans KR"/>
+              </a:rPr>
+              <a:t> HTML </a:t>
+            </a:r>
+            <a:r>
+              <a:rPr sz="1012" b="1" i="0" u="none" dirty="0" err="1">
+                <a:solidFill>
+                  <a:srgbClr val="4A4230"/>
+                </a:solidFill>
+                <a:latin typeface="Noto Sans KR"/>
+              </a:rPr>
+              <a:t>화면</a:t>
+            </a:r>
+            <a:r>
+              <a:rPr sz="1012" b="1" i="0" u="none" dirty="0">
+                <a:solidFill>
+                  <a:srgbClr val="4A4230"/>
+                </a:solidFill>
+                <a:latin typeface="Noto Sans KR"/>
+              </a:rPr>
+              <a:t> </a:t>
+            </a:r>
+            <a:r>
+              <a:rPr sz="1012" b="1" i="0" u="none" dirty="0" err="1">
+                <a:solidFill>
+                  <a:srgbClr val="4A4230"/>
+                </a:solidFill>
+                <a:latin typeface="Noto Sans KR"/>
+              </a:rPr>
+              <a:t>반환'의</a:t>
+            </a:r>
+            <a:r>
+              <a:rPr sz="1012" b="1" i="0" u="none" dirty="0">
+                <a:solidFill>
+                  <a:srgbClr val="4A4230"/>
+                </a:solidFill>
+                <a:latin typeface="Noto Sans KR"/>
+              </a:rPr>
+              <a:t> </a:t>
+            </a:r>
+            <a:r>
+              <a:rPr sz="1012" b="1" i="0" u="none" dirty="0" err="1">
+                <a:solidFill>
+                  <a:srgbClr val="4A4230"/>
+                </a:solidFill>
+                <a:latin typeface="Noto Sans KR"/>
+              </a:rPr>
+              <a:t>견고한</a:t>
+            </a:r>
+            <a:r>
+              <a:rPr sz="1012" b="1" i="0" u="none" dirty="0">
+                <a:solidFill>
+                  <a:srgbClr val="4A4230"/>
+                </a:solidFill>
+                <a:latin typeface="Noto Sans KR"/>
+              </a:rPr>
+              <a:t> 웹 </a:t>
+            </a:r>
+            <a:r>
+              <a:rPr sz="1012" b="1" i="0" u="none" dirty="0" err="1">
+                <a:solidFill>
+                  <a:srgbClr val="4A4230"/>
+                </a:solidFill>
+                <a:latin typeface="Noto Sans KR"/>
+              </a:rPr>
+              <a:t>프로덕션</a:t>
+            </a:r>
+            <a:r>
+              <a:rPr sz="1012" b="1" i="0" u="none" dirty="0">
+                <a:solidFill>
+                  <a:srgbClr val="4A4230"/>
+                </a:solidFill>
+                <a:latin typeface="Noto Sans KR"/>
+              </a:rPr>
+              <a:t> </a:t>
+            </a:r>
+            <a:r>
+              <a:rPr sz="1012" b="1" i="0" u="none" dirty="0" err="1">
+                <a:solidFill>
+                  <a:srgbClr val="4A4230"/>
+                </a:solidFill>
+                <a:latin typeface="Noto Sans KR"/>
+              </a:rPr>
+              <a:t>표준</a:t>
+            </a:r>
+            <a:r>
+              <a:rPr sz="1012" b="1" i="0" u="none" dirty="0">
+                <a:solidFill>
+                  <a:srgbClr val="4A4230"/>
+                </a:solidFill>
+                <a:latin typeface="Noto Sans KR"/>
+              </a:rPr>
+              <a:t> </a:t>
+            </a:r>
+            <a:r>
+              <a:rPr sz="1012" b="1" i="0" u="none" dirty="0" err="1">
+                <a:solidFill>
+                  <a:srgbClr val="4A4230"/>
+                </a:solidFill>
+                <a:latin typeface="Noto Sans KR"/>
+              </a:rPr>
+              <a:t>패턴을</a:t>
+            </a:r>
+            <a:r>
+              <a:rPr sz="1012" b="1" i="0" u="none" dirty="0">
+                <a:solidFill>
+                  <a:srgbClr val="4A4230"/>
+                </a:solidFill>
+                <a:latin typeface="Noto Sans KR"/>
+              </a:rPr>
+              <a:t> </a:t>
+            </a:r>
+            <a:r>
+              <a:rPr sz="1012" b="1" i="0" u="none" dirty="0" err="1">
+                <a:solidFill>
+                  <a:srgbClr val="4A4230"/>
+                </a:solidFill>
+                <a:latin typeface="Noto Sans KR"/>
+              </a:rPr>
+              <a:t>정직하게</a:t>
+            </a:r>
+            <a:r>
+              <a:rPr sz="1012" b="1" i="0" u="none" dirty="0">
+                <a:solidFill>
+                  <a:srgbClr val="4A4230"/>
+                </a:solidFill>
+                <a:latin typeface="Noto Sans KR"/>
+              </a:rPr>
+              <a:t> </a:t>
+            </a:r>
+            <a:r>
+              <a:rPr sz="1012" b="1" i="0" u="none" dirty="0" err="1">
+                <a:solidFill>
+                  <a:srgbClr val="4A4230"/>
+                </a:solidFill>
+                <a:latin typeface="Noto Sans KR"/>
+              </a:rPr>
+              <a:t>수수하여</a:t>
+            </a:r>
+            <a:r>
+              <a:rPr sz="1012" b="1" i="0" u="none" dirty="0">
+                <a:solidFill>
+                  <a:srgbClr val="4A4230"/>
+                </a:solidFill>
+                <a:latin typeface="Noto Sans KR"/>
+              </a:rPr>
+              <a:t> </a:t>
+            </a:r>
+            <a:r>
+              <a:rPr sz="1012" b="1" i="0" u="none" dirty="0" err="1">
+                <a:solidFill>
+                  <a:srgbClr val="4A4230"/>
+                </a:solidFill>
+                <a:latin typeface="Noto Sans KR"/>
+              </a:rPr>
+              <a:t>뛰어난</a:t>
+            </a:r>
+            <a:r>
+              <a:rPr sz="1012" b="1" i="0" u="none" dirty="0">
+                <a:solidFill>
+                  <a:srgbClr val="4A4230"/>
+                </a:solidFill>
+                <a:latin typeface="Noto Sans KR"/>
+              </a:rPr>
+              <a:t> </a:t>
+            </a:r>
+            <a:r>
+              <a:rPr sz="1012" b="1" i="0" u="none" dirty="0" err="1">
+                <a:solidFill>
+                  <a:srgbClr val="4A4230"/>
+                </a:solidFill>
+                <a:latin typeface="Noto Sans KR"/>
+              </a:rPr>
+              <a:t>호환성을</a:t>
+            </a:r>
+            <a:r>
+              <a:rPr sz="1012" b="1" i="0" u="none" dirty="0">
+                <a:solidFill>
+                  <a:srgbClr val="4A4230"/>
+                </a:solidFill>
+                <a:latin typeface="Noto Sans KR"/>
+              </a:rPr>
+              <a:t> </a:t>
+            </a:r>
+            <a:r>
+              <a:rPr sz="1012" b="1" i="0" u="none" dirty="0" err="1">
+                <a:solidFill>
+                  <a:srgbClr val="4A4230"/>
+                </a:solidFill>
+                <a:latin typeface="Noto Sans KR"/>
+              </a:rPr>
+              <a:t>보장합니다</a:t>
+            </a:r>
+            <a:r>
+              <a:rPr sz="1012" b="1" i="0" u="none" dirty="0">
+                <a:solidFill>
+                  <a:srgbClr val="4A4230"/>
+                </a:solidFill>
+                <a:latin typeface="Noto Sans KR"/>
+              </a:rPr>
+              <a:t>.</a:t>
+            </a:r>
+            <a:endParaRPr lang="en-US" sz="1012" b="1" i="0" u="none" dirty="0">
+              <a:solidFill>
+                <a:srgbClr val="4A4230"/>
+              </a:solidFill>
+              <a:latin typeface="Noto Sans KR"/>
+            </a:endParaRPr>
+          </a:p>
+          <a:p>
+            <a:pPr algn="l">
+              <a:lnSpc>
+                <a:spcPts val="1518"/>
+              </a:lnSpc>
+            </a:pPr>
+            <a:endParaRPr lang="en-US" sz="1012" b="1" dirty="0">
+              <a:solidFill>
+                <a:srgbClr val="4A4230"/>
+              </a:solidFill>
+              <a:latin typeface="Noto Sans KR"/>
+            </a:endParaRPr>
+          </a:p>
+          <a:p>
+            <a:pPr algn="l">
+              <a:lnSpc>
+                <a:spcPts val="1518"/>
+              </a:lnSpc>
+            </a:pPr>
+            <a:r>
+              <a:rPr lang="en-US" sz="1012" b="1" dirty="0">
+                <a:solidFill>
+                  <a:srgbClr val="4A4230"/>
+                </a:solidFill>
+                <a:latin typeface="Noto Sans KR"/>
+              </a:rPr>
+              <a:t>Ex) 1. </a:t>
+            </a:r>
+            <a:r>
+              <a:rPr lang="ko-KR" altLang="en-US" sz="1012" b="1" dirty="0">
+                <a:solidFill>
+                  <a:srgbClr val="4A4230"/>
+                </a:solidFill>
+                <a:latin typeface="Noto Sans KR"/>
+              </a:rPr>
+              <a:t>사용자가 입력한 검색조건을 주소에서 꺼냄</a:t>
+            </a:r>
+            <a:endParaRPr lang="en-US" altLang="ko-KR" sz="1012" b="1" dirty="0">
+              <a:solidFill>
+                <a:srgbClr val="4A4230"/>
+              </a:solidFill>
+              <a:latin typeface="Noto Sans KR"/>
+            </a:endParaRPr>
+          </a:p>
+          <a:p>
+            <a:pPr algn="l">
+              <a:lnSpc>
+                <a:spcPts val="1518"/>
+              </a:lnSpc>
+            </a:pPr>
+            <a:r>
+              <a:rPr lang="en-US" sz="1012" b="1" i="0" u="none" dirty="0">
+                <a:solidFill>
+                  <a:srgbClr val="4A4230"/>
+                </a:solidFill>
+                <a:latin typeface="Noto Sans KR"/>
+              </a:rPr>
+              <a:t>        2. </a:t>
+            </a:r>
+            <a:r>
+              <a:rPr lang="ko-KR" altLang="en-US" sz="1012" b="1" i="0" u="none" dirty="0">
+                <a:solidFill>
+                  <a:srgbClr val="4A4230"/>
+                </a:solidFill>
+                <a:latin typeface="Noto Sans KR"/>
+              </a:rPr>
+              <a:t>그 조건으로 데이터를 가져옴</a:t>
+            </a:r>
+            <a:r>
+              <a:rPr lang="en-US" altLang="ko-KR" sz="1012" b="1" i="0" u="none" dirty="0">
+                <a:solidFill>
+                  <a:srgbClr val="4A4230"/>
+                </a:solidFill>
+                <a:latin typeface="Noto Sans KR"/>
+              </a:rPr>
+              <a:t>.</a:t>
+            </a:r>
+          </a:p>
+          <a:p>
+            <a:pPr algn="l">
+              <a:lnSpc>
+                <a:spcPts val="1518"/>
+              </a:lnSpc>
+            </a:pPr>
+            <a:r>
+              <a:rPr lang="en-US" sz="1012" b="1" dirty="0">
+                <a:solidFill>
+                  <a:srgbClr val="4A4230"/>
+                </a:solidFill>
+                <a:latin typeface="Noto Sans KR"/>
+              </a:rPr>
+              <a:t>        3. </a:t>
+            </a:r>
+            <a:r>
+              <a:rPr lang="ko-KR" altLang="en-US" sz="1012" b="1" dirty="0" err="1">
+                <a:solidFill>
+                  <a:srgbClr val="4A4230"/>
+                </a:solidFill>
+                <a:latin typeface="Noto Sans KR"/>
+              </a:rPr>
+              <a:t>만든데이터를</a:t>
+            </a:r>
+            <a:r>
+              <a:rPr lang="ko-KR" altLang="en-US" sz="1012" b="1" dirty="0">
+                <a:solidFill>
+                  <a:srgbClr val="4A4230"/>
+                </a:solidFill>
+                <a:latin typeface="Noto Sans KR"/>
+              </a:rPr>
+              <a:t> </a:t>
+            </a:r>
+            <a:r>
+              <a:rPr lang="en-US" altLang="ko-KR" sz="1012" b="1" dirty="0">
+                <a:solidFill>
+                  <a:srgbClr val="4A4230"/>
+                </a:solidFill>
+                <a:latin typeface="Noto Sans KR"/>
+              </a:rPr>
+              <a:t>HTML</a:t>
+            </a:r>
+            <a:r>
+              <a:rPr lang="ko-KR" altLang="en-US" sz="1012" b="1" dirty="0">
+                <a:solidFill>
+                  <a:srgbClr val="4A4230"/>
+                </a:solidFill>
+                <a:latin typeface="Noto Sans KR"/>
+              </a:rPr>
+              <a:t>로 넘겨줌 </a:t>
+            </a:r>
+            <a:endParaRPr sz="1012" b="1" i="0" u="none" dirty="0">
+              <a:solidFill>
+                <a:srgbClr val="4A4230"/>
+              </a:solidFill>
+              <a:latin typeface="Noto Sans KR"/>
+            </a:endParaRPr>
           </a:p>
         </p:txBody>
       </p:sp>
@@ -4422,13 +5285,94 @@
               </a:lnSpc>
             </a:pPr>
             <a:r>
-              <a:rPr sz="2250" b="0" i="0" u="none">
+              <a:rPr sz="2250" b="0" i="0" u="none" dirty="0" err="1">
                 <a:solidFill>
                   <a:srgbClr val="0C3C20"/>
                 </a:solidFill>
                 <a:latin typeface="Noto Sans KR ExtraBold"/>
               </a:rPr>
-              <a:t>핵심 코드 ⑤ &amp; ⑥: 웹 서버 실 배포 및 완전 반응형 CSS</a:t>
+              <a:t>핵심</a:t>
+            </a:r>
+            <a:r>
+              <a:rPr sz="2250" b="0" i="0" u="none" dirty="0">
+                <a:solidFill>
+                  <a:srgbClr val="0C3C20"/>
+                </a:solidFill>
+                <a:latin typeface="Noto Sans KR ExtraBold"/>
+              </a:rPr>
+              <a:t> </a:t>
+            </a:r>
+            <a:r>
+              <a:rPr sz="2250" b="0" i="0" u="none" dirty="0" err="1">
+                <a:solidFill>
+                  <a:srgbClr val="0C3C20"/>
+                </a:solidFill>
+                <a:latin typeface="Noto Sans KR ExtraBold"/>
+              </a:rPr>
+              <a:t>코드</a:t>
+            </a:r>
+            <a:r>
+              <a:rPr sz="2250" b="0" i="0" u="none" dirty="0">
+                <a:solidFill>
+                  <a:srgbClr val="0C3C20"/>
+                </a:solidFill>
+                <a:latin typeface="Noto Sans KR ExtraBold"/>
+              </a:rPr>
+              <a:t> ⑤ &amp; ⑥: 웹 </a:t>
+            </a:r>
+            <a:r>
+              <a:rPr sz="2250" b="0" i="0" u="none" dirty="0" err="1">
+                <a:solidFill>
+                  <a:srgbClr val="0C3C20"/>
+                </a:solidFill>
+                <a:latin typeface="Noto Sans KR ExtraBold"/>
+              </a:rPr>
+              <a:t>서버</a:t>
+            </a:r>
+            <a:r>
+              <a:rPr sz="2250" b="0" i="0" u="none" dirty="0">
+                <a:solidFill>
+                  <a:srgbClr val="0C3C20"/>
+                </a:solidFill>
+                <a:latin typeface="Noto Sans KR ExtraBold"/>
+              </a:rPr>
+              <a:t> 실 </a:t>
+            </a:r>
+            <a:r>
+              <a:rPr sz="2250" b="0" i="0" u="none" dirty="0" err="1">
+                <a:solidFill>
+                  <a:srgbClr val="0C3C20"/>
+                </a:solidFill>
+                <a:latin typeface="Noto Sans KR ExtraBold"/>
+              </a:rPr>
+              <a:t>배포</a:t>
+            </a:r>
+            <a:r>
+              <a:rPr sz="2250" b="0" i="0" u="none" dirty="0">
+                <a:solidFill>
+                  <a:srgbClr val="0C3C20"/>
+                </a:solidFill>
+                <a:latin typeface="Noto Sans KR ExtraBold"/>
+              </a:rPr>
+              <a:t> 및 </a:t>
+            </a:r>
+            <a:r>
+              <a:rPr sz="2250" b="0" i="0" u="none" dirty="0" err="1">
+                <a:solidFill>
+                  <a:srgbClr val="0C3C20"/>
+                </a:solidFill>
+                <a:latin typeface="Noto Sans KR ExtraBold"/>
+              </a:rPr>
+              <a:t>반응형</a:t>
+            </a:r>
+            <a:r>
+              <a:rPr sz="2250" b="0" i="0" u="none" dirty="0">
+                <a:solidFill>
+                  <a:srgbClr val="0C3C20"/>
+                </a:solidFill>
+                <a:latin typeface="Noto Sans KR ExtraBold"/>
+              </a:rPr>
+              <a:t> CSS</a:t>
             </a:r>
           </a:p>
         </p:txBody>
@@ -8929,23 +9873,209 @@
               </a:lnSpc>
             </a:pPr>
             <a:r>
-              <a:rPr sz="1050" b="1" i="0" u="none">
-                <a:solidFill>
-                  <a:srgbClr val="2E3B32"/>
-                </a:solidFill>
-                <a:latin typeface="Noto Sans KR"/>
-              </a:rPr>
-              <a:t>시설 형태 분석:</a:t>
-            </a:r>
-            <a:r>
-              <a:rPr sz="1050" b="0" i="0" u="none">
-                <a:solidFill>
-                  <a:srgbClr val="2E3B32"/>
-                </a:solidFill>
-                <a:latin typeface="Noto Sans KR"/>
-              </a:rPr>
-              <a:t> 일반야영장, 글램핑, 카라반, 자동차 야영장 등 세부 업종 구분</a:t>
-            </a:r>
+              <a:rPr sz="1050" b="1" i="0" u="none" dirty="0" err="1">
+                <a:solidFill>
+                  <a:srgbClr val="2E3B32"/>
+                </a:solidFill>
+                <a:latin typeface="Noto Sans KR"/>
+              </a:rPr>
+              <a:t>시설</a:t>
+            </a:r>
+            <a:r>
+              <a:rPr sz="1050" b="1" i="0" u="none" dirty="0">
+                <a:solidFill>
+                  <a:srgbClr val="2E3B32"/>
+                </a:solidFill>
+                <a:latin typeface="Noto Sans KR"/>
+              </a:rPr>
+              <a:t> </a:t>
+            </a:r>
+            <a:r>
+              <a:rPr sz="1050" b="1" i="0" u="none" dirty="0" err="1">
+                <a:solidFill>
+                  <a:srgbClr val="2E3B32"/>
+                </a:solidFill>
+                <a:latin typeface="Noto Sans KR"/>
+              </a:rPr>
+              <a:t>형태</a:t>
+            </a:r>
+            <a:r>
+              <a:rPr sz="1050" b="1" i="0" u="none" dirty="0">
+                <a:solidFill>
+                  <a:srgbClr val="2E3B32"/>
+                </a:solidFill>
+                <a:latin typeface="Noto Sans KR"/>
+              </a:rPr>
+              <a:t> </a:t>
+            </a:r>
+            <a:r>
+              <a:rPr sz="1050" b="1" i="0" u="none" dirty="0" err="1">
+                <a:solidFill>
+                  <a:srgbClr val="2E3B32"/>
+                </a:solidFill>
+                <a:latin typeface="Noto Sans KR"/>
+              </a:rPr>
+              <a:t>분석</a:t>
+            </a:r>
+            <a:r>
+              <a:rPr sz="1050" b="1" i="0" u="none" dirty="0">
+                <a:solidFill>
+                  <a:srgbClr val="2E3B32"/>
+                </a:solidFill>
+                <a:latin typeface="Noto Sans KR"/>
+              </a:rPr>
+              <a:t>:</a:t>
+            </a:r>
+            <a:r>
+              <a:rPr sz="1050" b="0" i="0" u="none" dirty="0">
+                <a:solidFill>
+                  <a:srgbClr val="2E3B32"/>
+                </a:solidFill>
+                <a:latin typeface="Noto Sans KR"/>
+              </a:rPr>
+              <a:t> </a:t>
+            </a:r>
+            <a:r>
+              <a:rPr sz="1050" b="0" i="0" u="none" dirty="0" err="1">
+                <a:solidFill>
+                  <a:srgbClr val="2E3B32"/>
+                </a:solidFill>
+                <a:latin typeface="Noto Sans KR"/>
+              </a:rPr>
+              <a:t>일반야영장</a:t>
+            </a:r>
+            <a:r>
+              <a:rPr sz="1050" b="0" i="0" u="none" dirty="0">
+                <a:solidFill>
+                  <a:srgbClr val="2E3B32"/>
+                </a:solidFill>
+                <a:latin typeface="Noto Sans KR"/>
+              </a:rPr>
+              <a:t>, </a:t>
+            </a:r>
+            <a:r>
+              <a:rPr sz="1050" b="0" i="0" u="none" dirty="0" err="1">
+                <a:solidFill>
+                  <a:srgbClr val="2E3B32"/>
+                </a:solidFill>
+                <a:latin typeface="Noto Sans KR"/>
+              </a:rPr>
+              <a:t>글램핑</a:t>
+            </a:r>
+            <a:r>
+              <a:rPr sz="1050" b="0" i="0" u="none" dirty="0">
+                <a:solidFill>
+                  <a:srgbClr val="2E3B32"/>
+                </a:solidFill>
+                <a:latin typeface="Noto Sans KR"/>
+              </a:rPr>
+              <a:t>, </a:t>
+            </a:r>
+            <a:r>
+              <a:rPr sz="1050" b="0" i="0" u="none" dirty="0" err="1">
+                <a:solidFill>
+                  <a:srgbClr val="2E3B32"/>
+                </a:solidFill>
+                <a:latin typeface="Noto Sans KR"/>
+              </a:rPr>
+              <a:t>카라반</a:t>
+            </a:r>
+            <a:r>
+              <a:rPr sz="1050" b="0" i="0" u="none" dirty="0">
+                <a:solidFill>
+                  <a:srgbClr val="2E3B32"/>
+                </a:solidFill>
+                <a:latin typeface="Noto Sans KR"/>
+              </a:rPr>
+              <a:t>, </a:t>
+            </a:r>
+            <a:r>
+              <a:rPr sz="1050" b="0" i="0" u="none" dirty="0" err="1">
+                <a:solidFill>
+                  <a:srgbClr val="2E3B32"/>
+                </a:solidFill>
+                <a:latin typeface="Noto Sans KR"/>
+              </a:rPr>
+              <a:t>자동차</a:t>
+            </a:r>
+            <a:r>
+              <a:rPr sz="1050" b="0" i="0" u="none" dirty="0">
+                <a:solidFill>
+                  <a:srgbClr val="2E3B32"/>
+                </a:solidFill>
+                <a:latin typeface="Noto Sans KR"/>
+              </a:rPr>
+              <a:t> </a:t>
+            </a:r>
+            <a:r>
+              <a:rPr sz="1050" b="0" i="0" u="none" dirty="0" err="1">
+                <a:solidFill>
+                  <a:srgbClr val="2E3B32"/>
+                </a:solidFill>
+                <a:latin typeface="Noto Sans KR"/>
+              </a:rPr>
+              <a:t>야영장</a:t>
+            </a:r>
+            <a:r>
+              <a:rPr sz="1050" b="0" i="0" u="none" dirty="0">
+                <a:solidFill>
+                  <a:srgbClr val="2E3B32"/>
+                </a:solidFill>
+                <a:latin typeface="Noto Sans KR"/>
+              </a:rPr>
+              <a:t> 등 </a:t>
+            </a:r>
+            <a:r>
+              <a:rPr sz="1050" b="0" i="0" u="none" dirty="0" err="1">
+                <a:solidFill>
+                  <a:srgbClr val="2E3B32"/>
+                </a:solidFill>
+                <a:latin typeface="Noto Sans KR"/>
+              </a:rPr>
+              <a:t>세부</a:t>
+            </a:r>
+            <a:r>
+              <a:rPr sz="1050" b="0" i="0" u="none" dirty="0">
+                <a:solidFill>
+                  <a:srgbClr val="2E3B32"/>
+                </a:solidFill>
+                <a:latin typeface="Noto Sans KR"/>
+              </a:rPr>
+              <a:t> </a:t>
+            </a:r>
+            <a:r>
+              <a:rPr sz="1050" b="0" i="0" u="none" dirty="0" err="1">
+                <a:solidFill>
+                  <a:srgbClr val="2E3B32"/>
+                </a:solidFill>
+                <a:latin typeface="Noto Sans KR"/>
+              </a:rPr>
+              <a:t>업종</a:t>
+            </a:r>
+            <a:r>
+              <a:rPr sz="1050" b="0" i="0" u="none" dirty="0">
+                <a:solidFill>
+                  <a:srgbClr val="2E3B32"/>
+                </a:solidFill>
+                <a:latin typeface="Noto Sans KR"/>
+              </a:rPr>
+              <a:t> </a:t>
+            </a:r>
+            <a:r>
+              <a:rPr sz="1050" b="0" i="0" u="none" dirty="0" err="1">
+                <a:solidFill>
+                  <a:srgbClr val="2E3B32"/>
+                </a:solidFill>
+                <a:latin typeface="Noto Sans KR"/>
+              </a:rPr>
+              <a:t>구분</a:t>
+            </a:r>
+            <a:endParaRPr sz="1050" b="0" i="0" u="none" dirty="0">
+              <a:solidFill>
+                <a:srgbClr val="2E3B32"/>
+              </a:solidFill>
+              <a:latin typeface="Noto Sans KR"/>
+            </a:endParaRPr>
           </a:p>
         </p:txBody>
       </p:sp>
@@ -8958,7 +10088,7 @@
         <p:spPr>
           <a:xfrm>
             <a:off x="6624637" y="3626941"/>
-            <a:ext cx="4776787" cy="200025"/>
+            <a:ext cx="4776787" cy="186013"/>
           </a:xfrm>
           <a:prstGeom prst="rect">
             <a:avLst/>
@@ -8977,22 +10107,193 @@
               </a:lnSpc>
             </a:pPr>
             <a:r>
-              <a:rPr sz="1050" b="1" i="0" u="none">
-                <a:solidFill>
-                  <a:srgbClr val="2E3B32"/>
-                </a:solidFill>
-                <a:latin typeface="Noto Sans KR"/>
-              </a:rPr>
-              <a:t>보유 인프라 정보:</a:t>
-            </a:r>
-            <a:r>
-              <a:rPr sz="1050" b="0" i="0" u="none">
-                <a:solidFill>
-                  <a:srgbClr val="2E3B32"/>
-                </a:solidFill>
-                <a:latin typeface="Noto Sans KR"/>
-              </a:rPr>
-              <a:t> 전기, 온수, 샤워실, 화장실 완비 여부 및 바비큐 가능 환경 여부</a:t>
+              <a:rPr sz="1050" b="1" i="0" u="none" dirty="0" err="1">
+                <a:solidFill>
+                  <a:srgbClr val="2E3B32"/>
+                </a:solidFill>
+                <a:latin typeface="Noto Sans KR"/>
+              </a:rPr>
+              <a:t>보유</a:t>
+            </a:r>
+            <a:r>
+              <a:rPr sz="1050" b="1" i="0" u="none" dirty="0">
+                <a:solidFill>
+                  <a:srgbClr val="2E3B32"/>
+                </a:solidFill>
+                <a:latin typeface="Noto Sans KR"/>
+              </a:rPr>
+              <a:t> </a:t>
+            </a:r>
+            <a:r>
+              <a:rPr sz="1050" b="1" i="0" u="none" dirty="0" err="1">
+                <a:solidFill>
+                  <a:srgbClr val="2E3B32"/>
+                </a:solidFill>
+                <a:latin typeface="Noto Sans KR"/>
+              </a:rPr>
+              <a:t>인프라</a:t>
+            </a:r>
+            <a:r>
+              <a:rPr sz="1050" b="1" i="0" u="none" dirty="0">
+                <a:solidFill>
+                  <a:srgbClr val="2E3B32"/>
+                </a:solidFill>
+                <a:latin typeface="Noto Sans KR"/>
+              </a:rPr>
+              <a:t> </a:t>
+            </a:r>
+            <a:r>
+              <a:rPr sz="1050" b="1" i="0" u="none" dirty="0" err="1">
+                <a:solidFill>
+                  <a:srgbClr val="2E3B32"/>
+                </a:solidFill>
+                <a:latin typeface="Noto Sans KR"/>
+              </a:rPr>
+              <a:t>정보</a:t>
+            </a:r>
+            <a:r>
+              <a:rPr sz="1050" b="1" i="0" u="none" dirty="0">
+                <a:solidFill>
+                  <a:srgbClr val="2E3B32"/>
+                </a:solidFill>
+                <a:latin typeface="Noto Sans KR"/>
+              </a:rPr>
+              <a:t>:</a:t>
+            </a:r>
+            <a:r>
+              <a:rPr sz="1050" b="0" i="0" u="none" dirty="0">
+                <a:solidFill>
+                  <a:srgbClr val="2E3B32"/>
+                </a:solidFill>
+                <a:latin typeface="Noto Sans KR"/>
+              </a:rPr>
+              <a:t> </a:t>
+            </a:r>
+            <a:r>
+              <a:rPr sz="1050" b="0" i="0" u="none" dirty="0" err="1">
+                <a:solidFill>
+                  <a:srgbClr val="2E3B32"/>
+                </a:solidFill>
+                <a:latin typeface="Noto Sans KR"/>
+              </a:rPr>
+              <a:t>전기</a:t>
+            </a:r>
+            <a:r>
+              <a:rPr sz="1050" b="0" i="0" u="none" dirty="0">
+                <a:solidFill>
+                  <a:srgbClr val="2E3B32"/>
+                </a:solidFill>
+                <a:latin typeface="Noto Sans KR"/>
+              </a:rPr>
+              <a:t>, </a:t>
+            </a:r>
+            <a:r>
+              <a:rPr sz="1050" b="0" i="0" u="none" dirty="0" err="1">
+                <a:solidFill>
+                  <a:srgbClr val="2E3B32"/>
+                </a:solidFill>
+                <a:latin typeface="Noto Sans KR"/>
+              </a:rPr>
+              <a:t>온수</a:t>
+            </a:r>
+            <a:r>
+              <a:rPr sz="1050" b="0" i="0" u="none" dirty="0">
+                <a:solidFill>
+                  <a:srgbClr val="2E3B32"/>
+                </a:solidFill>
+                <a:latin typeface="Noto Sans KR"/>
+              </a:rPr>
+              <a:t>, </a:t>
+            </a:r>
+            <a:r>
+              <a:rPr sz="1050" b="0" i="0" u="none" dirty="0" err="1">
+                <a:solidFill>
+                  <a:srgbClr val="2E3B32"/>
+                </a:solidFill>
+                <a:latin typeface="Noto Sans KR"/>
+              </a:rPr>
+              <a:t>샤워실</a:t>
+            </a:r>
+            <a:r>
+              <a:rPr sz="1050" b="0" i="0" u="none" dirty="0">
+                <a:solidFill>
+                  <a:srgbClr val="2E3B32"/>
+                </a:solidFill>
+                <a:latin typeface="Noto Sans KR"/>
+              </a:rPr>
+              <a:t>, </a:t>
+            </a:r>
+            <a:r>
+              <a:rPr sz="1050" b="0" i="0" u="none" dirty="0" err="1">
+                <a:solidFill>
+                  <a:srgbClr val="2E3B32"/>
+                </a:solidFill>
+                <a:latin typeface="Noto Sans KR"/>
+              </a:rPr>
+              <a:t>화장실</a:t>
+            </a:r>
+            <a:r>
+              <a:rPr sz="1050" b="0" i="0" u="none" dirty="0">
+                <a:solidFill>
+                  <a:srgbClr val="2E3B32"/>
+                </a:solidFill>
+                <a:latin typeface="Noto Sans KR"/>
+              </a:rPr>
+              <a:t> </a:t>
+            </a:r>
+            <a:r>
+              <a:rPr sz="1050" b="0" i="0" u="none" dirty="0" err="1">
+                <a:solidFill>
+                  <a:srgbClr val="2E3B32"/>
+                </a:solidFill>
+                <a:latin typeface="Noto Sans KR"/>
+              </a:rPr>
+              <a:t>완비</a:t>
+            </a:r>
+            <a:r>
+              <a:rPr sz="1050" b="0" i="0" u="none" dirty="0">
+                <a:solidFill>
+                  <a:srgbClr val="2E3B32"/>
+                </a:solidFill>
+                <a:latin typeface="Noto Sans KR"/>
+              </a:rPr>
+              <a:t> </a:t>
+            </a:r>
+            <a:r>
+              <a:rPr sz="1050" b="0" i="0" u="none" dirty="0" err="1">
+                <a:solidFill>
+                  <a:srgbClr val="2E3B32"/>
+                </a:solidFill>
+                <a:latin typeface="Noto Sans KR"/>
+              </a:rPr>
+              <a:t>여부</a:t>
+            </a:r>
+            <a:r>
+              <a:rPr sz="1050" b="0" i="0" u="none" dirty="0">
+                <a:solidFill>
+                  <a:srgbClr val="2E3B32"/>
+                </a:solidFill>
+                <a:latin typeface="Noto Sans KR"/>
+              </a:rPr>
+              <a:t> </a:t>
+            </a:r>
+            <a:r>
+              <a:rPr sz="1050" b="0" i="0" u="none" dirty="0" err="1">
+                <a:solidFill>
+                  <a:srgbClr val="2E3B32"/>
+                </a:solidFill>
+                <a:latin typeface="Noto Sans KR"/>
+              </a:rPr>
+              <a:t>환경</a:t>
+            </a:r>
+            <a:r>
+              <a:rPr sz="1050" b="0" i="0" u="none" dirty="0">
+                <a:solidFill>
+                  <a:srgbClr val="2E3B32"/>
+                </a:solidFill>
+                <a:latin typeface="Noto Sans KR"/>
+              </a:rPr>
+              <a:t> </a:t>
             </a:r>
           </a:p>
         </p:txBody>
@@ -9006,7 +10307,7 @@
         <p:spPr>
           <a:xfrm>
             <a:off x="6624637" y="3922216"/>
-            <a:ext cx="4776787" cy="200025"/>
+            <a:ext cx="4776787" cy="186013"/>
           </a:xfrm>
           <a:prstGeom prst="rect">
             <a:avLst/>
@@ -9025,23 +10326,173 @@
               </a:lnSpc>
             </a:pPr>
             <a:r>
-              <a:rPr sz="1050" b="1" i="0" u="none">
-                <a:solidFill>
-                  <a:srgbClr val="2E3B32"/>
-                </a:solidFill>
-                <a:latin typeface="Noto Sans KR"/>
-              </a:rPr>
-              <a:t>영업 시설 규모:</a:t>
-            </a:r>
-            <a:r>
-              <a:rPr sz="1050" b="0" i="0" u="none">
-                <a:solidFill>
-                  <a:srgbClr val="2E3B32"/>
-                </a:solidFill>
-                <a:latin typeface="Noto Sans KR"/>
-              </a:rPr>
-              <a:t> 데크 개수, 파쇄석 면적, 카라반 사이트 총 공급 수량</a:t>
-            </a:r>
+              <a:rPr sz="1050" b="1" i="0" u="none" dirty="0" err="1">
+                <a:solidFill>
+                  <a:srgbClr val="2E3B32"/>
+                </a:solidFill>
+                <a:latin typeface="Noto Sans KR"/>
+              </a:rPr>
+              <a:t>영업</a:t>
+            </a:r>
+            <a:r>
+              <a:rPr sz="1050" b="1" i="0" u="none" dirty="0">
+                <a:solidFill>
+                  <a:srgbClr val="2E3B32"/>
+                </a:solidFill>
+                <a:latin typeface="Noto Sans KR"/>
+              </a:rPr>
+              <a:t> </a:t>
+            </a:r>
+            <a:r>
+              <a:rPr sz="1050" b="1" i="0" u="none" dirty="0" err="1">
+                <a:solidFill>
+                  <a:srgbClr val="2E3B32"/>
+                </a:solidFill>
+                <a:latin typeface="Noto Sans KR"/>
+              </a:rPr>
+              <a:t>시설</a:t>
+            </a:r>
+            <a:r>
+              <a:rPr sz="1050" b="1" i="0" u="none" dirty="0">
+                <a:solidFill>
+                  <a:srgbClr val="2E3B32"/>
+                </a:solidFill>
+                <a:latin typeface="Noto Sans KR"/>
+              </a:rPr>
+              <a:t> </a:t>
+            </a:r>
+            <a:r>
+              <a:rPr sz="1050" b="1" i="0" u="none" dirty="0" err="1">
+                <a:solidFill>
+                  <a:srgbClr val="2E3B32"/>
+                </a:solidFill>
+                <a:latin typeface="Noto Sans KR"/>
+              </a:rPr>
+              <a:t>규모</a:t>
+            </a:r>
+            <a:r>
+              <a:rPr sz="1050" b="1" i="0" u="none" dirty="0">
+                <a:solidFill>
+                  <a:srgbClr val="2E3B32"/>
+                </a:solidFill>
+                <a:latin typeface="Noto Sans KR"/>
+              </a:rPr>
+              <a:t>:</a:t>
+            </a:r>
+            <a:r>
+              <a:rPr sz="1050" b="0" i="0" u="none" dirty="0">
+                <a:solidFill>
+                  <a:srgbClr val="2E3B32"/>
+                </a:solidFill>
+                <a:latin typeface="Noto Sans KR"/>
+              </a:rPr>
+              <a:t> </a:t>
+            </a:r>
+            <a:r>
+              <a:rPr sz="1050" b="0" i="0" u="none" dirty="0" err="1">
+                <a:solidFill>
+                  <a:srgbClr val="2E3B32"/>
+                </a:solidFill>
+                <a:latin typeface="Noto Sans KR"/>
+              </a:rPr>
+              <a:t>데크</a:t>
+            </a:r>
+            <a:r>
+              <a:rPr sz="1050" b="0" i="0" u="none" dirty="0">
+                <a:solidFill>
+                  <a:srgbClr val="2E3B32"/>
+                </a:solidFill>
+                <a:latin typeface="Noto Sans KR"/>
+              </a:rPr>
+              <a:t> , </a:t>
+            </a:r>
+            <a:r>
+              <a:rPr sz="1050" b="0" i="0" u="none" dirty="0" err="1">
+                <a:solidFill>
+                  <a:srgbClr val="2E3B32"/>
+                </a:solidFill>
+                <a:latin typeface="Noto Sans KR"/>
+              </a:rPr>
+              <a:t>파쇄석</a:t>
+            </a:r>
+            <a:r>
+              <a:rPr sz="1050" b="0" i="0" u="none" dirty="0">
+                <a:solidFill>
+                  <a:srgbClr val="2E3B32"/>
+                </a:solidFill>
+                <a:latin typeface="Noto Sans KR"/>
+              </a:rPr>
+              <a:t> , </a:t>
+            </a:r>
+            <a:r>
+              <a:rPr sz="1050" b="0" i="0" u="none" dirty="0" err="1">
+                <a:solidFill>
+                  <a:srgbClr val="2E3B32"/>
+                </a:solidFill>
+                <a:latin typeface="Noto Sans KR"/>
+              </a:rPr>
+              <a:t>카라반</a:t>
+            </a:r>
+            <a:r>
+              <a:rPr sz="1050" b="0" i="0" u="none" dirty="0">
+                <a:solidFill>
+                  <a:srgbClr val="2E3B32"/>
+                </a:solidFill>
+                <a:latin typeface="Noto Sans KR"/>
+              </a:rPr>
+              <a:t> </a:t>
+            </a:r>
+            <a:r>
+              <a:rPr sz="1050" b="0" i="0" u="none" dirty="0" err="1">
+                <a:solidFill>
+                  <a:srgbClr val="2E3B32"/>
+                </a:solidFill>
+                <a:latin typeface="Noto Sans KR"/>
+              </a:rPr>
+              <a:t>사이트</a:t>
+            </a:r>
+            <a:r>
+              <a:rPr sz="1050" b="0" i="0" u="none" dirty="0">
+                <a:solidFill>
+                  <a:srgbClr val="2E3B32"/>
+                </a:solidFill>
+                <a:latin typeface="Noto Sans KR"/>
+              </a:rPr>
+              <a:t> 총 </a:t>
+            </a:r>
+            <a:r>
+              <a:rPr sz="1050" b="0" i="0" u="none" dirty="0" err="1">
+                <a:solidFill>
+                  <a:srgbClr val="2E3B32"/>
+                </a:solidFill>
+                <a:latin typeface="Noto Sans KR"/>
+              </a:rPr>
+              <a:t>공급</a:t>
+            </a:r>
+            <a:r>
+              <a:rPr sz="1050" b="0" i="0" u="none" dirty="0">
+                <a:solidFill>
+                  <a:srgbClr val="2E3B32"/>
+                </a:solidFill>
+                <a:latin typeface="Noto Sans KR"/>
+              </a:rPr>
+              <a:t> </a:t>
+            </a:r>
+            <a:r>
+              <a:rPr sz="1050" b="0" i="0" u="none" dirty="0" err="1">
+                <a:solidFill>
+                  <a:srgbClr val="2E3B32"/>
+                </a:solidFill>
+                <a:latin typeface="Noto Sans KR"/>
+              </a:rPr>
+              <a:t>수량</a:t>
+            </a:r>
+            <a:endParaRPr sz="1050" b="0" i="0" u="none" dirty="0">
+              <a:solidFill>
+                <a:srgbClr val="2E3B32"/>
+              </a:solidFill>
+              <a:latin typeface="Noto Sans KR"/>
+            </a:endParaRPr>
           </a:p>
         </p:txBody>
       </p:sp>
@@ -11473,7 +12924,7 @@
         <p:spPr>
           <a:xfrm>
             <a:off x="6215062" y="4902398"/>
-            <a:ext cx="5214937" cy="358973"/>
+            <a:ext cx="5214937" cy="344005"/>
           </a:xfrm>
           <a:prstGeom prst="rect">
             <a:avLst/>
@@ -11492,32 +12943,245 @@
               </a:lnSpc>
             </a:pPr>
             <a:r>
-              <a:rPr sz="975" b="0" i="0" u="none">
+              <a:rPr sz="975" b="0" i="0" u="none" dirty="0" err="1">
                 <a:solidFill>
                   <a:srgbClr val="4A4230"/>
                 </a:solidFill>
                 <a:latin typeface="Noto Sans KR"/>
               </a:rPr>
-              <a:t>제시된 모든 데이터 파이프라인은 </a:t>
-            </a:r>
-            <a:r>
-              <a:rPr sz="975" b="1" i="0" u="none">
+              <a:t>제시된</a:t>
+            </a:r>
+            <a:r>
+              <a:rPr sz="975" b="0" i="0" u="none" dirty="0">
                 <a:solidFill>
                   <a:srgbClr val="4A4230"/>
                 </a:solidFill>
                 <a:latin typeface="Noto Sans KR"/>
               </a:rPr>
-              <a:t>100% 무료 등급</a:t>
-            </a:r>
-            <a:r>
-              <a:rPr sz="975" b="0" i="0" u="none">
+              <a:t> </a:t>
+            </a:r>
+            <a:r>
+              <a:rPr sz="975" b="0" i="0" u="none" dirty="0" err="1">
                 <a:solidFill>
                   <a:srgbClr val="4A4230"/>
                 </a:solidFill>
                 <a:latin typeface="Noto Sans KR"/>
               </a:rPr>
-              <a:t> 범위 내에서 완벽하게 구동할 수 있도록 설계되었으며, 불필요한 과금 한도 초과 리스크를 원천 배제했습니다.</a:t>
-            </a:r>
+              <a:t>모든</a:t>
+            </a:r>
+            <a:r>
+              <a:rPr sz="975" b="0" i="0" u="none" dirty="0">
+                <a:solidFill>
+                  <a:srgbClr val="4A4230"/>
+                </a:solidFill>
+                <a:latin typeface="Noto Sans KR"/>
+              </a:rPr>
+              <a:t> </a:t>
+            </a:r>
+            <a:r>
+              <a:rPr sz="975" b="0" i="0" u="none" dirty="0" err="1">
+                <a:solidFill>
+                  <a:srgbClr val="4A4230"/>
+                </a:solidFill>
+                <a:latin typeface="Noto Sans KR"/>
+              </a:rPr>
+              <a:t>데이터</a:t>
+            </a:r>
+            <a:r>
+              <a:rPr sz="975" b="0" i="0" u="none" dirty="0">
+                <a:solidFill>
+                  <a:srgbClr val="4A4230"/>
+                </a:solidFill>
+                <a:latin typeface="Noto Sans KR"/>
+              </a:rPr>
+              <a:t> </a:t>
+            </a:r>
+            <a:r>
+              <a:rPr sz="975" b="0" i="0" u="none" dirty="0" err="1">
+                <a:solidFill>
+                  <a:srgbClr val="4A4230"/>
+                </a:solidFill>
+                <a:latin typeface="Noto Sans KR"/>
+              </a:rPr>
+              <a:t>파이프라인은</a:t>
+            </a:r>
+            <a:r>
+              <a:rPr sz="975" b="0" i="0" u="none" dirty="0">
+                <a:solidFill>
+                  <a:srgbClr val="4A4230"/>
+                </a:solidFill>
+                <a:latin typeface="Noto Sans KR"/>
+              </a:rPr>
+              <a:t> </a:t>
+            </a:r>
+            <a:r>
+              <a:rPr sz="975" b="1" i="0" u="none" dirty="0">
+                <a:solidFill>
+                  <a:srgbClr val="4A4230"/>
+                </a:solidFill>
+                <a:latin typeface="Noto Sans KR"/>
+              </a:rPr>
+              <a:t>100% </a:t>
+            </a:r>
+            <a:r>
+              <a:rPr sz="975" b="1" i="0" u="none" dirty="0" err="1">
+                <a:solidFill>
+                  <a:srgbClr val="4A4230"/>
+                </a:solidFill>
+                <a:latin typeface="Noto Sans KR"/>
+              </a:rPr>
+              <a:t>무료</a:t>
+            </a:r>
+            <a:r>
+              <a:rPr sz="975" b="1" i="0" u="none" dirty="0">
+                <a:solidFill>
+                  <a:srgbClr val="4A4230"/>
+                </a:solidFill>
+                <a:latin typeface="Noto Sans KR"/>
+              </a:rPr>
+              <a:t> </a:t>
+            </a:r>
+            <a:r>
+              <a:rPr lang="ko-KR" altLang="en-US" sz="975" b="1" dirty="0">
+                <a:solidFill>
+                  <a:srgbClr val="4A4230"/>
+                </a:solidFill>
+                <a:latin typeface="Noto Sans KR"/>
+              </a:rPr>
+              <a:t>한도</a:t>
+            </a:r>
+            <a:r>
+              <a:rPr sz="975" b="0" i="0" u="none" dirty="0">
+                <a:solidFill>
+                  <a:srgbClr val="4A4230"/>
+                </a:solidFill>
+                <a:latin typeface="Noto Sans KR"/>
+              </a:rPr>
+              <a:t> </a:t>
+            </a:r>
+            <a:r>
+              <a:rPr sz="975" b="0" i="0" u="none" dirty="0" err="1">
+                <a:solidFill>
+                  <a:srgbClr val="4A4230"/>
+                </a:solidFill>
+                <a:latin typeface="Noto Sans KR"/>
+              </a:rPr>
+              <a:t>범위</a:t>
+            </a:r>
+            <a:r>
+              <a:rPr sz="975" b="0" i="0" u="none" dirty="0">
+                <a:solidFill>
+                  <a:srgbClr val="4A4230"/>
+                </a:solidFill>
+                <a:latin typeface="Noto Sans KR"/>
+              </a:rPr>
+              <a:t> </a:t>
+            </a:r>
+            <a:r>
+              <a:rPr sz="975" b="0" i="0" u="none" dirty="0" err="1">
+                <a:solidFill>
+                  <a:srgbClr val="4A4230"/>
+                </a:solidFill>
+                <a:latin typeface="Noto Sans KR"/>
+              </a:rPr>
+              <a:t>내에서</a:t>
+            </a:r>
+            <a:r>
+              <a:rPr sz="975" b="0" i="0" u="none" dirty="0">
+                <a:solidFill>
+                  <a:srgbClr val="4A4230"/>
+                </a:solidFill>
+                <a:latin typeface="Noto Sans KR"/>
+              </a:rPr>
+              <a:t> </a:t>
+            </a:r>
+            <a:r>
+              <a:rPr sz="975" b="0" i="0" u="none" dirty="0" err="1">
+                <a:solidFill>
+                  <a:srgbClr val="4A4230"/>
+                </a:solidFill>
+                <a:latin typeface="Noto Sans KR"/>
+              </a:rPr>
+              <a:t>완벽하게</a:t>
+            </a:r>
+            <a:r>
+              <a:rPr sz="975" b="0" i="0" u="none" dirty="0">
+                <a:solidFill>
+                  <a:srgbClr val="4A4230"/>
+                </a:solidFill>
+                <a:latin typeface="Noto Sans KR"/>
+              </a:rPr>
+              <a:t> </a:t>
+            </a:r>
+            <a:r>
+              <a:rPr sz="975" b="0" i="0" u="none" dirty="0" err="1">
+                <a:solidFill>
+                  <a:srgbClr val="4A4230"/>
+                </a:solidFill>
+                <a:latin typeface="Noto Sans KR"/>
+              </a:rPr>
+              <a:t>구동할</a:t>
+            </a:r>
+            <a:r>
+              <a:rPr sz="975" b="0" i="0" u="none" dirty="0">
+                <a:solidFill>
+                  <a:srgbClr val="4A4230"/>
+                </a:solidFill>
+                <a:latin typeface="Noto Sans KR"/>
+              </a:rPr>
+              <a:t> 수 </a:t>
+            </a:r>
+            <a:r>
+              <a:rPr sz="975" b="0" i="0" u="none" dirty="0" err="1">
+                <a:solidFill>
+                  <a:srgbClr val="4A4230"/>
+                </a:solidFill>
+                <a:latin typeface="Noto Sans KR"/>
+              </a:rPr>
+              <a:t>있도록</a:t>
+            </a:r>
+            <a:r>
+              <a:rPr lang="ko-KR" altLang="en-US" sz="975" b="0" i="0" u="none" dirty="0">
+                <a:solidFill>
+                  <a:srgbClr val="4A4230"/>
+                </a:solidFill>
+                <a:latin typeface="Noto Sans KR"/>
+              </a:rPr>
+              <a:t> 설</a:t>
+            </a:r>
+            <a:r>
+              <a:rPr sz="975" b="0" i="0" u="none" dirty="0" err="1">
+                <a:solidFill>
+                  <a:srgbClr val="4A4230"/>
+                </a:solidFill>
+                <a:latin typeface="Noto Sans KR"/>
+              </a:rPr>
+              <a:t>계되었</a:t>
+            </a:r>
+            <a:r>
+              <a:rPr lang="ko-KR" altLang="en-US" sz="975" b="0" i="0" u="none" dirty="0">
+                <a:solidFill>
+                  <a:srgbClr val="4A4230"/>
+                </a:solidFill>
+                <a:latin typeface="Noto Sans KR"/>
+              </a:rPr>
+              <a:t>습니다</a:t>
+            </a:r>
+            <a:r>
+              <a:rPr lang="en-US" altLang="ko-KR" sz="975" b="0" i="0" u="none" dirty="0">
+                <a:solidFill>
+                  <a:srgbClr val="4A4230"/>
+                </a:solidFill>
+                <a:latin typeface="Noto Sans KR"/>
+              </a:rPr>
+              <a:t>.</a:t>
+            </a:r>
+            <a:endParaRPr sz="975" b="0" i="0" u="none" dirty="0">
+              <a:solidFill>
+                <a:srgbClr val="4A4230"/>
+              </a:solidFill>
+              <a:latin typeface="Noto Sans KR"/>
+            </a:endParaRPr>
           </a:p>
         </p:txBody>
       </p:sp>
@@ -12336,23 +14000,299 @@
               </a:lnSpc>
             </a:pPr>
             <a:r>
-              <a:rPr sz="1050" b="1" i="0" u="none">
+              <a:rPr sz="1050" b="1" i="0" u="none" dirty="0" err="1">
                 <a:solidFill>
                   <a:srgbClr val="E65F2C"/>
                 </a:solidFill>
                 <a:latin typeface="Noto Sans KR"/>
               </a:rPr>
-              <a:t>법적/운영 위험:</a:t>
-            </a:r>
-            <a:r>
-              <a:rPr sz="1050" b="0" i="0" u="none">
-                <a:solidFill>
-                  <a:srgbClr val="2E3B32"/>
-                </a:solidFill>
-                <a:latin typeface="Noto Sans KR"/>
-              </a:rPr>
-              <a:t> 일시적으로 수많은 트래픽을 단숨에 끌어올려 차단을 당하거나 사이트 소유자로부터 차단(IP Block) 등 법적 제재 우려</a:t>
-            </a:r>
+              <a:t>법적</a:t>
+            </a:r>
+            <a:r>
+              <a:rPr sz="1050" b="1" i="0" u="none" dirty="0">
+                <a:solidFill>
+                  <a:srgbClr val="E65F2C"/>
+                </a:solidFill>
+                <a:latin typeface="Noto Sans KR"/>
+              </a:rPr>
+              <a:t>/</a:t>
+            </a:r>
+            <a:r>
+              <a:rPr sz="1050" b="1" i="0" u="none" dirty="0" err="1">
+                <a:solidFill>
+                  <a:srgbClr val="E65F2C"/>
+                </a:solidFill>
+                <a:latin typeface="Noto Sans KR"/>
+              </a:rPr>
+              <a:t>운영</a:t>
+            </a:r>
+            <a:r>
+              <a:rPr sz="1050" b="1" i="0" u="none" dirty="0">
+                <a:solidFill>
+                  <a:srgbClr val="E65F2C"/>
+                </a:solidFill>
+                <a:latin typeface="Noto Sans KR"/>
+              </a:rPr>
+              <a:t> </a:t>
+            </a:r>
+            <a:r>
+              <a:rPr sz="1050" b="1" i="0" u="none" dirty="0" err="1">
+                <a:solidFill>
+                  <a:srgbClr val="E65F2C"/>
+                </a:solidFill>
+                <a:latin typeface="Noto Sans KR"/>
+              </a:rPr>
+              <a:t>위험</a:t>
+            </a:r>
+            <a:r>
+              <a:rPr sz="1050" b="1" i="0" u="none" dirty="0">
+                <a:solidFill>
+                  <a:srgbClr val="E65F2C"/>
+                </a:solidFill>
+                <a:latin typeface="Noto Sans KR"/>
+              </a:rPr>
+              <a:t>:</a:t>
+            </a:r>
+            <a:r>
+              <a:rPr sz="1050" b="0" i="0" u="none" dirty="0">
+                <a:solidFill>
+                  <a:srgbClr val="2E3B32"/>
+                </a:solidFill>
+                <a:latin typeface="Noto Sans KR"/>
+              </a:rPr>
+              <a:t> </a:t>
+            </a:r>
+            <a:r>
+              <a:rPr sz="1050" b="0" i="0" u="none" dirty="0" err="1">
+                <a:solidFill>
+                  <a:srgbClr val="2E3B32"/>
+                </a:solidFill>
+                <a:latin typeface="Noto Sans KR"/>
+              </a:rPr>
+              <a:t>일시적으로</a:t>
+            </a:r>
+            <a:r>
+              <a:rPr sz="1050" b="0" i="0" u="none" dirty="0">
+                <a:solidFill>
+                  <a:srgbClr val="2E3B32"/>
+                </a:solidFill>
+                <a:latin typeface="Noto Sans KR"/>
+              </a:rPr>
+              <a:t> </a:t>
+            </a:r>
+            <a:r>
+              <a:rPr sz="1050" b="0" i="0" u="none" dirty="0" err="1">
+                <a:solidFill>
+                  <a:srgbClr val="2E3B32"/>
+                </a:solidFill>
+                <a:latin typeface="Noto Sans KR"/>
+              </a:rPr>
+              <a:t>수많은</a:t>
+            </a:r>
+            <a:r>
+              <a:rPr sz="1050" b="0" i="0" u="none" dirty="0">
+                <a:solidFill>
+                  <a:srgbClr val="2E3B32"/>
+                </a:solidFill>
+                <a:latin typeface="Noto Sans KR"/>
+              </a:rPr>
+              <a:t> </a:t>
+            </a:r>
+            <a:r>
+              <a:rPr sz="1050" b="0" i="0" u="none" dirty="0" err="1">
+                <a:solidFill>
+                  <a:srgbClr val="2E3B32"/>
+                </a:solidFill>
+                <a:latin typeface="Noto Sans KR"/>
+              </a:rPr>
+              <a:t>트래픽을</a:t>
+            </a:r>
+            <a:r>
+              <a:rPr sz="1050" b="0" i="0" u="none" dirty="0">
+                <a:solidFill>
+                  <a:srgbClr val="2E3B32"/>
+                </a:solidFill>
+                <a:latin typeface="Noto Sans KR"/>
+              </a:rPr>
+              <a:t> </a:t>
+            </a:r>
+            <a:r>
+              <a:rPr sz="1050" b="0" i="0" u="none" dirty="0" err="1">
+                <a:solidFill>
+                  <a:srgbClr val="2E3B32"/>
+                </a:solidFill>
+                <a:latin typeface="Noto Sans KR"/>
+              </a:rPr>
+              <a:t>단숨에</a:t>
+            </a:r>
+            <a:r>
+              <a:rPr sz="1050" b="0" i="0" u="none" dirty="0">
+                <a:solidFill>
+                  <a:srgbClr val="2E3B32"/>
+                </a:solidFill>
+                <a:latin typeface="Noto Sans KR"/>
+              </a:rPr>
+              <a:t> </a:t>
+            </a:r>
+            <a:r>
+              <a:rPr sz="1050" b="0" i="0" u="none" dirty="0" err="1">
+                <a:solidFill>
+                  <a:srgbClr val="2E3B32"/>
+                </a:solidFill>
+                <a:latin typeface="Noto Sans KR"/>
+              </a:rPr>
+              <a:t>끌어올려</a:t>
+            </a:r>
+            <a:r>
+              <a:rPr sz="1050" b="0" i="0" u="none" dirty="0">
+                <a:solidFill>
+                  <a:srgbClr val="2E3B32"/>
+                </a:solidFill>
+                <a:latin typeface="Noto Sans KR"/>
+              </a:rPr>
+              <a:t> </a:t>
+            </a:r>
+            <a:r>
+              <a:rPr sz="1050" b="0" i="0" u="none" dirty="0" err="1">
+                <a:solidFill>
+                  <a:srgbClr val="2E3B32"/>
+                </a:solidFill>
+                <a:latin typeface="Noto Sans KR"/>
+              </a:rPr>
+              <a:t>차단을</a:t>
+            </a:r>
+            <a:r>
+              <a:rPr sz="1050" b="0" i="0" u="none" dirty="0">
+                <a:solidFill>
+                  <a:srgbClr val="2E3B32"/>
+                </a:solidFill>
+                <a:latin typeface="Noto Sans KR"/>
+              </a:rPr>
+              <a:t> </a:t>
+            </a:r>
+            <a:r>
+              <a:rPr sz="1050" b="0" i="0" u="none" dirty="0" err="1">
+                <a:solidFill>
+                  <a:srgbClr val="2E3B32"/>
+                </a:solidFill>
+                <a:latin typeface="Noto Sans KR"/>
+              </a:rPr>
+              <a:t>당하거나</a:t>
+            </a:r>
+            <a:r>
+              <a:rPr sz="1050" b="0" i="0" u="none" dirty="0">
+                <a:solidFill>
+                  <a:srgbClr val="2E3B32"/>
+                </a:solidFill>
+                <a:latin typeface="Noto Sans KR"/>
+              </a:rPr>
+              <a:t> </a:t>
+            </a:r>
+            <a:r>
+              <a:rPr sz="1050" b="0" i="0" u="none" dirty="0" err="1">
+                <a:solidFill>
+                  <a:srgbClr val="2E3B32"/>
+                </a:solidFill>
+                <a:latin typeface="Noto Sans KR"/>
+              </a:rPr>
+              <a:t>사이트</a:t>
+            </a:r>
+            <a:r>
+              <a:rPr sz="1050" b="0" i="0" u="none" dirty="0">
+                <a:solidFill>
+                  <a:srgbClr val="2E3B32"/>
+                </a:solidFill>
+                <a:latin typeface="Noto Sans KR"/>
+              </a:rPr>
+              <a:t> </a:t>
+            </a:r>
+            <a:r>
+              <a:rPr sz="1050" b="0" i="0" u="none" dirty="0" err="1">
+                <a:solidFill>
+                  <a:srgbClr val="2E3B32"/>
+                </a:solidFill>
+                <a:latin typeface="Noto Sans KR"/>
+              </a:rPr>
+              <a:t>소유자로부터</a:t>
+            </a:r>
+            <a:r>
+              <a:rPr sz="1050" b="0" i="0" u="none" dirty="0">
+                <a:solidFill>
+                  <a:srgbClr val="2E3B32"/>
+                </a:solidFill>
+                <a:latin typeface="Noto Sans KR"/>
+              </a:rPr>
+              <a:t> </a:t>
+            </a:r>
+            <a:r>
+              <a:rPr sz="1050" b="0" i="0" u="none" dirty="0" err="1">
+                <a:solidFill>
+                  <a:srgbClr val="2E3B32"/>
+                </a:solidFill>
+                <a:latin typeface="Noto Sans KR"/>
+              </a:rPr>
+              <a:t>차단</a:t>
+            </a:r>
+            <a:r>
+              <a:rPr sz="1050" b="0" i="0" u="none" dirty="0">
+                <a:solidFill>
+                  <a:srgbClr val="2E3B32"/>
+                </a:solidFill>
+                <a:latin typeface="Noto Sans KR"/>
+              </a:rPr>
+              <a:t>(IP Block) 등 </a:t>
+            </a:r>
+            <a:r>
+              <a:rPr sz="1050" b="0" i="0" u="none" dirty="0" err="1">
+                <a:solidFill>
+                  <a:srgbClr val="2E3B32"/>
+                </a:solidFill>
+                <a:latin typeface="Noto Sans KR"/>
+              </a:rPr>
+              <a:t>법적</a:t>
+            </a:r>
+            <a:r>
+              <a:rPr sz="1050" b="0" i="0" u="none" dirty="0">
+                <a:solidFill>
+                  <a:srgbClr val="2E3B32"/>
+                </a:solidFill>
+                <a:latin typeface="Noto Sans KR"/>
+              </a:rPr>
+              <a:t> </a:t>
+            </a:r>
+            <a:r>
+              <a:rPr sz="1050" b="0" i="0" u="none" dirty="0" err="1">
+                <a:solidFill>
+                  <a:srgbClr val="2E3B32"/>
+                </a:solidFill>
+                <a:latin typeface="Noto Sans KR"/>
+              </a:rPr>
+              <a:t>제재</a:t>
+            </a:r>
+            <a:r>
+              <a:rPr sz="1050" b="0" i="0" u="none" dirty="0">
+                <a:solidFill>
+                  <a:srgbClr val="2E3B32"/>
+                </a:solidFill>
+                <a:latin typeface="Noto Sans KR"/>
+              </a:rPr>
+              <a:t> </a:t>
+            </a:r>
+            <a:r>
+              <a:rPr sz="1050" b="0" i="0" u="none" dirty="0" err="1">
+                <a:solidFill>
+                  <a:srgbClr val="2E3B32"/>
+                </a:solidFill>
+                <a:latin typeface="Noto Sans KR"/>
+              </a:rPr>
+              <a:t>우려</a:t>
+            </a:r>
+            <a:endParaRPr sz="1050" b="0" i="0" u="none" dirty="0">
+              <a:solidFill>
+                <a:srgbClr val="2E3B32"/>
+              </a:solidFill>
+              <a:latin typeface="Noto Sans KR"/>
+            </a:endParaRPr>
           </a:p>
         </p:txBody>
       </p:sp>
@@ -12408,23 +14348,335 @@
               </a:lnSpc>
             </a:pPr>
             <a:r>
-              <a:rPr sz="1050" b="1" i="0" u="none">
+              <a:rPr sz="1050" b="1" i="0" u="none" dirty="0" err="1">
                 <a:solidFill>
                   <a:srgbClr val="0C3C20"/>
                 </a:solidFill>
                 <a:latin typeface="Noto Sans KR"/>
               </a:rPr>
-              <a:t>작동 구조:</a:t>
-            </a:r>
-            <a:r>
-              <a:rPr sz="1050" b="0" i="0" u="none">
-                <a:solidFill>
-                  <a:srgbClr val="2E3B32"/>
-                </a:solidFill>
-                <a:latin typeface="Noto Sans KR"/>
-              </a:rPr>
-              <a:t> 데이터 제공자가 외부에 정식으로 약속해 열어둔 표준 데이터 창구(API)로 전송받아 깔끔하게 검수 완료된 JSON 형태를 즉시 매핑</a:t>
-            </a:r>
+              <a:t>작동</a:t>
+            </a:r>
+            <a:r>
+              <a:rPr sz="1050" b="1" i="0" u="none" dirty="0">
+                <a:solidFill>
+                  <a:srgbClr val="0C3C20"/>
+                </a:solidFill>
+                <a:latin typeface="Noto Sans KR"/>
+              </a:rPr>
+              <a:t> </a:t>
+            </a:r>
+            <a:r>
+              <a:rPr sz="1050" b="1" i="0" u="none" dirty="0" err="1">
+                <a:solidFill>
+                  <a:srgbClr val="0C3C20"/>
+                </a:solidFill>
+                <a:latin typeface="Noto Sans KR"/>
+              </a:rPr>
+              <a:t>구조</a:t>
+            </a:r>
+            <a:r>
+              <a:rPr sz="1050" b="1" i="0" u="none" dirty="0">
+                <a:solidFill>
+                  <a:srgbClr val="0C3C20"/>
+                </a:solidFill>
+                <a:latin typeface="Noto Sans KR"/>
+              </a:rPr>
+              <a:t>:</a:t>
+            </a:r>
+            <a:r>
+              <a:rPr sz="1050" b="0" i="0" u="none" dirty="0">
+                <a:solidFill>
+                  <a:srgbClr val="2E3B32"/>
+                </a:solidFill>
+                <a:latin typeface="Noto Sans KR"/>
+              </a:rPr>
+              <a:t> </a:t>
+            </a:r>
+            <a:r>
+              <a:rPr sz="1050" b="0" i="0" u="none" dirty="0" err="1">
+                <a:solidFill>
+                  <a:srgbClr val="2E3B32"/>
+                </a:solidFill>
+                <a:latin typeface="Noto Sans KR"/>
+              </a:rPr>
+              <a:t>데이터</a:t>
+            </a:r>
+            <a:r>
+              <a:rPr sz="1050" b="0" i="0" u="none" dirty="0">
+                <a:solidFill>
+                  <a:srgbClr val="2E3B32"/>
+                </a:solidFill>
+                <a:latin typeface="Noto Sans KR"/>
+              </a:rPr>
+              <a:t> </a:t>
+            </a:r>
+            <a:r>
+              <a:rPr sz="1050" b="0" i="0" u="none" dirty="0" err="1">
+                <a:solidFill>
+                  <a:srgbClr val="2E3B32"/>
+                </a:solidFill>
+                <a:latin typeface="Noto Sans KR"/>
+              </a:rPr>
+              <a:t>제공자가</a:t>
+            </a:r>
+            <a:r>
+              <a:rPr sz="1050" b="0" i="0" u="none" dirty="0">
+                <a:solidFill>
+                  <a:srgbClr val="2E3B32"/>
+                </a:solidFill>
+                <a:latin typeface="Noto Sans KR"/>
+              </a:rPr>
+              <a:t> </a:t>
+            </a:r>
+            <a:r>
+              <a:rPr sz="1050" b="0" i="0" u="none" dirty="0" err="1">
+                <a:solidFill>
+                  <a:srgbClr val="2E3B32"/>
+                </a:solidFill>
+                <a:latin typeface="Noto Sans KR"/>
+              </a:rPr>
+              <a:t>외부에</a:t>
+            </a:r>
+            <a:r>
+              <a:rPr sz="1050" b="0" i="0" u="none" dirty="0">
+                <a:solidFill>
+                  <a:srgbClr val="2E3B32"/>
+                </a:solidFill>
+                <a:latin typeface="Noto Sans KR"/>
+              </a:rPr>
+              <a:t> </a:t>
+            </a:r>
+            <a:r>
+              <a:rPr sz="1050" b="0" i="0" u="none" dirty="0" err="1">
+                <a:solidFill>
+                  <a:srgbClr val="2E3B32"/>
+                </a:solidFill>
+                <a:latin typeface="Noto Sans KR"/>
+              </a:rPr>
+              <a:t>정식으로</a:t>
+            </a:r>
+            <a:r>
+              <a:rPr sz="1050" b="0" i="0" u="none" dirty="0">
+                <a:solidFill>
+                  <a:srgbClr val="2E3B32"/>
+                </a:solidFill>
+                <a:latin typeface="Noto Sans KR"/>
+              </a:rPr>
+              <a:t> </a:t>
+            </a:r>
+            <a:r>
+              <a:rPr sz="1050" b="0" i="0" u="none" dirty="0" err="1">
+                <a:solidFill>
+                  <a:srgbClr val="2E3B32"/>
+                </a:solidFill>
+                <a:latin typeface="Noto Sans KR"/>
+              </a:rPr>
+              <a:t>약속해</a:t>
+            </a:r>
+            <a:r>
+              <a:rPr sz="1050" b="0" i="0" u="none" dirty="0">
+                <a:solidFill>
+                  <a:srgbClr val="2E3B32"/>
+                </a:solidFill>
+                <a:latin typeface="Noto Sans KR"/>
+              </a:rPr>
+              <a:t> </a:t>
+            </a:r>
+            <a:r>
+              <a:rPr sz="1050" b="0" i="0" u="none" dirty="0" err="1">
+                <a:solidFill>
+                  <a:srgbClr val="2E3B32"/>
+                </a:solidFill>
+                <a:latin typeface="Noto Sans KR"/>
+              </a:rPr>
+              <a:t>열어둔</a:t>
+            </a:r>
+            <a:r>
+              <a:rPr sz="1050" b="0" i="0" u="none" dirty="0">
+                <a:solidFill>
+                  <a:srgbClr val="2E3B32"/>
+                </a:solidFill>
+                <a:latin typeface="Noto Sans KR"/>
+              </a:rPr>
+              <a:t> </a:t>
+            </a:r>
+            <a:r>
+              <a:rPr sz="1050" b="0" i="0" u="none" dirty="0" err="1">
+                <a:solidFill>
+                  <a:srgbClr val="2E3B32"/>
+                </a:solidFill>
+                <a:latin typeface="Noto Sans KR"/>
+              </a:rPr>
+              <a:t>표준</a:t>
+            </a:r>
+            <a:r>
+              <a:rPr sz="1050" b="0" i="0" u="none" dirty="0">
+                <a:solidFill>
+                  <a:srgbClr val="2E3B32"/>
+                </a:solidFill>
+                <a:latin typeface="Noto Sans KR"/>
+              </a:rPr>
+              <a:t> </a:t>
+            </a:r>
+            <a:r>
+              <a:rPr sz="1050" b="0" i="0" u="none" dirty="0" err="1">
+                <a:solidFill>
+                  <a:srgbClr val="2E3B32"/>
+                </a:solidFill>
+                <a:latin typeface="Noto Sans KR"/>
+              </a:rPr>
+              <a:t>데이터</a:t>
+            </a:r>
+            <a:r>
+              <a:rPr sz="1050" b="0" i="0" u="none" dirty="0">
+                <a:solidFill>
+                  <a:srgbClr val="2E3B32"/>
+                </a:solidFill>
+                <a:latin typeface="Noto Sans KR"/>
+              </a:rPr>
+              <a:t> </a:t>
+            </a:r>
+            <a:r>
+              <a:rPr sz="1050" b="0" i="0" u="none" dirty="0" err="1">
+                <a:solidFill>
+                  <a:srgbClr val="2E3B32"/>
+                </a:solidFill>
+                <a:latin typeface="Noto Sans KR"/>
+              </a:rPr>
+              <a:t>창구</a:t>
+            </a:r>
+            <a:r>
+              <a:rPr sz="1050" b="0" i="0" u="none" dirty="0">
+                <a:solidFill>
+                  <a:srgbClr val="2E3B32"/>
+                </a:solidFill>
+                <a:latin typeface="Noto Sans KR"/>
+              </a:rPr>
+              <a:t>(API)로 </a:t>
+            </a:r>
+            <a:r>
+              <a:rPr sz="1050" b="0" i="0" u="none" dirty="0" err="1">
+                <a:solidFill>
+                  <a:srgbClr val="2E3B32"/>
+                </a:solidFill>
+                <a:latin typeface="Noto Sans KR"/>
+              </a:rPr>
+              <a:t>전송받아</a:t>
+            </a:r>
+            <a:r>
+              <a:rPr sz="1050" b="0" i="0" u="none" dirty="0">
+                <a:solidFill>
+                  <a:srgbClr val="2E3B32"/>
+                </a:solidFill>
+                <a:latin typeface="Noto Sans KR"/>
+              </a:rPr>
+              <a:t> </a:t>
+            </a:r>
+            <a:r>
+              <a:rPr sz="1050" b="0" i="0" u="none" dirty="0" err="1">
+                <a:solidFill>
+                  <a:srgbClr val="2E3B32"/>
+                </a:solidFill>
+                <a:latin typeface="Noto Sans KR"/>
+              </a:rPr>
+              <a:t>깔끔하게</a:t>
+            </a:r>
+            <a:r>
+              <a:rPr sz="1050" b="0" i="0" u="none" dirty="0">
+                <a:solidFill>
+                  <a:srgbClr val="2E3B32"/>
+                </a:solidFill>
+                <a:latin typeface="Noto Sans KR"/>
+              </a:rPr>
+              <a:t> </a:t>
+            </a:r>
+            <a:r>
+              <a:rPr sz="1050" b="0" i="0" u="none" dirty="0" err="1">
+                <a:solidFill>
+                  <a:srgbClr val="2E3B32"/>
+                </a:solidFill>
+                <a:latin typeface="Noto Sans KR"/>
+              </a:rPr>
+              <a:t>검수</a:t>
+            </a:r>
+            <a:r>
+              <a:rPr sz="1050" b="0" i="0" u="none" dirty="0">
+                <a:solidFill>
+                  <a:srgbClr val="2E3B32"/>
+                </a:solidFill>
+                <a:latin typeface="Noto Sans KR"/>
+              </a:rPr>
+              <a:t> </a:t>
+            </a:r>
+            <a:r>
+              <a:rPr sz="1050" b="0" i="0" u="none" dirty="0" err="1">
+                <a:solidFill>
+                  <a:srgbClr val="2E3B32"/>
+                </a:solidFill>
+                <a:latin typeface="Noto Sans KR"/>
+              </a:rPr>
+              <a:t>완료된</a:t>
+            </a:r>
+            <a:r>
+              <a:rPr sz="1050" b="0" i="0" u="none" dirty="0">
+                <a:solidFill>
+                  <a:srgbClr val="2E3B32"/>
+                </a:solidFill>
+                <a:latin typeface="Noto Sans KR"/>
+              </a:rPr>
+              <a:t> JSON </a:t>
+            </a:r>
+            <a:r>
+              <a:rPr sz="1050" b="0" i="0" u="none" dirty="0" err="1">
+                <a:solidFill>
+                  <a:srgbClr val="2E3B32"/>
+                </a:solidFill>
+                <a:latin typeface="Noto Sans KR"/>
+              </a:rPr>
+              <a:t>형태를</a:t>
+            </a:r>
+            <a:r>
+              <a:rPr sz="1050" b="0" i="0" u="none" dirty="0">
+                <a:solidFill>
+                  <a:srgbClr val="2E3B32"/>
+                </a:solidFill>
+                <a:latin typeface="Noto Sans KR"/>
+              </a:rPr>
+              <a:t> </a:t>
+            </a:r>
+            <a:r>
+              <a:rPr sz="1050" b="0" i="0" u="none" dirty="0" err="1">
+                <a:solidFill>
+                  <a:srgbClr val="2E3B32"/>
+                </a:solidFill>
+                <a:latin typeface="Noto Sans KR"/>
+              </a:rPr>
+              <a:t>즉시</a:t>
+            </a:r>
+            <a:r>
+              <a:rPr sz="1050" b="0" i="0" u="none" dirty="0">
+                <a:solidFill>
+                  <a:srgbClr val="2E3B32"/>
+                </a:solidFill>
+                <a:latin typeface="Noto Sans KR"/>
+              </a:rPr>
+              <a:t> </a:t>
+            </a:r>
+            <a:r>
+              <a:rPr sz="1050" b="0" i="0" u="none" dirty="0" err="1">
+                <a:solidFill>
+                  <a:srgbClr val="2E3B32"/>
+                </a:solidFill>
+                <a:latin typeface="Noto Sans KR"/>
+              </a:rPr>
+              <a:t>매핑</a:t>
+            </a:r>
+            <a:endParaRPr sz="1050" b="0" i="0" u="none" dirty="0">
+              <a:solidFill>
+                <a:srgbClr val="2E3B32"/>
+              </a:solidFill>
+              <a:latin typeface="Noto Sans KR"/>
+            </a:endParaRPr>
           </a:p>
         </p:txBody>
       </p:sp>
@@ -12504,23 +14756,281 @@
               </a:lnSpc>
             </a:pPr>
             <a:r>
-              <a:rPr sz="1050" b="1" i="0" u="none">
+              <a:rPr sz="1050" b="1" i="0" u="none" dirty="0" err="1">
                 <a:solidFill>
                   <a:srgbClr val="0C3C20"/>
                 </a:solidFill>
                 <a:latin typeface="Noto Sans KR"/>
               </a:rPr>
-              <a:t>합법성과 영속성:</a:t>
-            </a:r>
-            <a:r>
-              <a:rPr sz="1050" b="0" i="0" u="none">
-                <a:solidFill>
-                  <a:srgbClr val="2E3B32"/>
-                </a:solidFill>
-                <a:latin typeface="Noto Sans KR"/>
-              </a:rPr>
-              <a:t> 국가 공인 데이터를 인가 하에 수수하므로 가이드라인 준수 시 평생 완벽하고 합법적인 배포 가능</a:t>
-            </a:r>
+              <a:t>합법성과</a:t>
+            </a:r>
+            <a:r>
+              <a:rPr sz="1050" b="1" i="0" u="none" dirty="0">
+                <a:solidFill>
+                  <a:srgbClr val="0C3C20"/>
+                </a:solidFill>
+                <a:latin typeface="Noto Sans KR"/>
+              </a:rPr>
+              <a:t> </a:t>
+            </a:r>
+            <a:r>
+              <a:rPr sz="1050" b="1" i="0" u="none" dirty="0" err="1">
+                <a:solidFill>
+                  <a:srgbClr val="0C3C20"/>
+                </a:solidFill>
+                <a:latin typeface="Noto Sans KR"/>
+              </a:rPr>
+              <a:t>영속성</a:t>
+            </a:r>
+            <a:r>
+              <a:rPr sz="1050" b="1" i="0" u="none" dirty="0">
+                <a:solidFill>
+                  <a:srgbClr val="0C3C20"/>
+                </a:solidFill>
+                <a:latin typeface="Noto Sans KR"/>
+              </a:rPr>
+              <a:t>:</a:t>
+            </a:r>
+            <a:r>
+              <a:rPr sz="1050" b="0" i="0" u="none" dirty="0">
+                <a:solidFill>
+                  <a:srgbClr val="2E3B32"/>
+                </a:solidFill>
+                <a:latin typeface="Noto Sans KR"/>
+              </a:rPr>
+              <a:t> </a:t>
+            </a:r>
+            <a:r>
+              <a:rPr sz="1050" b="0" i="0" u="none" dirty="0" err="1">
+                <a:solidFill>
+                  <a:srgbClr val="2E3B32"/>
+                </a:solidFill>
+                <a:latin typeface="Noto Sans KR"/>
+              </a:rPr>
+              <a:t>국가</a:t>
+            </a:r>
+            <a:r>
+              <a:rPr sz="1050" b="0" i="0" u="none" dirty="0">
+                <a:solidFill>
+                  <a:srgbClr val="2E3B32"/>
+                </a:solidFill>
+                <a:latin typeface="Noto Sans KR"/>
+              </a:rPr>
+              <a:t> </a:t>
+            </a:r>
+            <a:r>
+              <a:rPr sz="1050" b="0" i="0" u="none" dirty="0" err="1">
+                <a:solidFill>
+                  <a:srgbClr val="2E3B32"/>
+                </a:solidFill>
+                <a:latin typeface="Noto Sans KR"/>
+              </a:rPr>
+              <a:t>공인</a:t>
+            </a:r>
+            <a:r>
+              <a:rPr sz="1050" b="0" i="0" u="none" dirty="0">
+                <a:solidFill>
+                  <a:srgbClr val="2E3B32"/>
+                </a:solidFill>
+                <a:latin typeface="Noto Sans KR"/>
+              </a:rPr>
+              <a:t> </a:t>
+            </a:r>
+            <a:r>
+              <a:rPr sz="1050" b="0" i="0" u="none" dirty="0" err="1">
+                <a:solidFill>
+                  <a:srgbClr val="2E3B32"/>
+                </a:solidFill>
+                <a:latin typeface="Noto Sans KR"/>
+              </a:rPr>
+              <a:t>데이터를</a:t>
+            </a:r>
+            <a:r>
+              <a:rPr sz="1050" b="0" i="0" u="none" dirty="0">
+                <a:solidFill>
+                  <a:srgbClr val="2E3B32"/>
+                </a:solidFill>
+                <a:latin typeface="Noto Sans KR"/>
+              </a:rPr>
+              <a:t> </a:t>
+            </a:r>
+            <a:r>
+              <a:rPr sz="1050" b="0" i="0" u="none" dirty="0" err="1">
+                <a:solidFill>
+                  <a:srgbClr val="2E3B32"/>
+                </a:solidFill>
+                <a:latin typeface="Noto Sans KR"/>
+              </a:rPr>
+              <a:t>인가</a:t>
+            </a:r>
+            <a:r>
+              <a:rPr sz="1050" b="0" i="0" u="none" dirty="0">
+                <a:solidFill>
+                  <a:srgbClr val="2E3B32"/>
+                </a:solidFill>
+                <a:latin typeface="Noto Sans KR"/>
+              </a:rPr>
+              <a:t> </a:t>
+            </a:r>
+            <a:r>
+              <a:rPr sz="1050" b="0" i="0" u="none" dirty="0" err="1">
+                <a:solidFill>
+                  <a:srgbClr val="2E3B32"/>
+                </a:solidFill>
+                <a:latin typeface="Noto Sans KR"/>
+              </a:rPr>
+              <a:t>하에</a:t>
+            </a:r>
+            <a:r>
+              <a:rPr sz="1050" b="0" i="0" u="none" dirty="0">
+                <a:solidFill>
+                  <a:srgbClr val="2E3B32"/>
+                </a:solidFill>
+                <a:latin typeface="Noto Sans KR"/>
+              </a:rPr>
+              <a:t> </a:t>
+            </a:r>
+            <a:r>
+              <a:rPr sz="1050" b="0" i="0" u="none" dirty="0" err="1">
+                <a:solidFill>
+                  <a:srgbClr val="2E3B32"/>
+                </a:solidFill>
+                <a:latin typeface="Noto Sans KR"/>
+              </a:rPr>
+              <a:t>수수하므로</a:t>
+            </a:r>
+            <a:r>
+              <a:rPr sz="1050" b="0" i="0" u="none" dirty="0">
+                <a:solidFill>
+                  <a:srgbClr val="2E3B32"/>
+                </a:solidFill>
+                <a:latin typeface="Noto Sans KR"/>
+              </a:rPr>
+              <a:t> </a:t>
+            </a:r>
+            <a:r>
+              <a:rPr sz="1050" b="0" i="0" u="none" dirty="0" err="1">
+                <a:solidFill>
+                  <a:srgbClr val="2E3B32"/>
+                </a:solidFill>
+                <a:latin typeface="Noto Sans KR"/>
+              </a:rPr>
+              <a:t>가이드라인</a:t>
+            </a:r>
+            <a:r>
+              <a:rPr sz="1050" b="0" i="0" u="none" dirty="0">
+                <a:solidFill>
+                  <a:srgbClr val="2E3B32"/>
+                </a:solidFill>
+                <a:latin typeface="Noto Sans KR"/>
+              </a:rPr>
+              <a:t> </a:t>
+            </a:r>
+            <a:r>
+              <a:rPr sz="1050" b="0" i="0" u="none" dirty="0" err="1">
+                <a:solidFill>
+                  <a:srgbClr val="2E3B32"/>
+                </a:solidFill>
+                <a:latin typeface="Noto Sans KR"/>
+              </a:rPr>
+              <a:t>준수</a:t>
+            </a:r>
+            <a:r>
+              <a:rPr sz="1050" b="0" i="0" u="none" dirty="0">
+                <a:solidFill>
+                  <a:srgbClr val="2E3B32"/>
+                </a:solidFill>
+                <a:latin typeface="Noto Sans KR"/>
+              </a:rPr>
+              <a:t> 시 </a:t>
+            </a:r>
+            <a:r>
+              <a:rPr sz="1050" b="0" i="0" u="none" dirty="0" err="1">
+                <a:solidFill>
+                  <a:srgbClr val="2E3B32"/>
+                </a:solidFill>
+                <a:latin typeface="Noto Sans KR"/>
+              </a:rPr>
+              <a:t>평생</a:t>
+            </a:r>
+            <a:r>
+              <a:rPr sz="1050" b="0" i="0" u="none" dirty="0">
+                <a:solidFill>
+                  <a:srgbClr val="2E3B32"/>
+                </a:solidFill>
+                <a:latin typeface="Noto Sans KR"/>
+              </a:rPr>
+              <a:t> </a:t>
+            </a:r>
+            <a:r>
+              <a:rPr sz="1050" b="0" i="0" u="none" dirty="0" err="1">
+                <a:solidFill>
+                  <a:srgbClr val="2E3B32"/>
+                </a:solidFill>
+                <a:latin typeface="Noto Sans KR"/>
+              </a:rPr>
+              <a:t>완벽하고</a:t>
+            </a:r>
+            <a:r>
+              <a:rPr sz="1050" b="0" i="0" u="none" dirty="0">
+                <a:solidFill>
+                  <a:srgbClr val="2E3B32"/>
+                </a:solidFill>
+                <a:latin typeface="Noto Sans KR"/>
+              </a:rPr>
+              <a:t> </a:t>
+            </a:r>
+            <a:r>
+              <a:rPr sz="1050" b="0" i="0" u="none" dirty="0" err="1">
+                <a:solidFill>
+                  <a:srgbClr val="2E3B32"/>
+                </a:solidFill>
+                <a:latin typeface="Noto Sans KR"/>
+              </a:rPr>
+              <a:t>합법적인</a:t>
+            </a:r>
+            <a:r>
+              <a:rPr sz="1050" b="0" i="0" u="none" dirty="0">
+                <a:solidFill>
+                  <a:srgbClr val="2E3B32"/>
+                </a:solidFill>
+                <a:latin typeface="Noto Sans KR"/>
+              </a:rPr>
+              <a:t> </a:t>
+            </a:r>
+            <a:r>
+              <a:rPr sz="1050" b="0" i="0" u="none" dirty="0" err="1">
+                <a:solidFill>
+                  <a:srgbClr val="2E3B32"/>
+                </a:solidFill>
+                <a:latin typeface="Noto Sans KR"/>
+              </a:rPr>
+              <a:t>배포</a:t>
+            </a:r>
+            <a:r>
+              <a:rPr sz="1050" b="0" i="0" u="none" dirty="0">
+                <a:solidFill>
+                  <a:srgbClr val="2E3B32"/>
+                </a:solidFill>
+                <a:latin typeface="Noto Sans KR"/>
+              </a:rPr>
+              <a:t> </a:t>
+            </a:r>
+            <a:r>
+              <a:rPr sz="1050" b="0" i="0" u="none" dirty="0" err="1">
+                <a:solidFill>
+                  <a:srgbClr val="2E3B32"/>
+                </a:solidFill>
+                <a:latin typeface="Noto Sans KR"/>
+              </a:rPr>
+              <a:t>가능</a:t>
+            </a:r>
+            <a:endParaRPr sz="1050" b="0" i="0" u="none" dirty="0">
+              <a:solidFill>
+                <a:srgbClr val="2E3B32"/>
+              </a:solidFill>
+              <a:latin typeface="Noto Sans KR"/>
+            </a:endParaRPr>
           </a:p>
         </p:txBody>
       </p:sp>
@@ -14313,8 +16823,8 @@
         </p:nvSpPr>
         <p:spPr>
           <a:xfrm>
-            <a:off x="963215" y="4181474"/>
-            <a:ext cx="10466784" cy="171450"/>
+            <a:off x="963215" y="4192178"/>
+            <a:ext cx="10466784" cy="150041"/>
           </a:xfrm>
           <a:prstGeom prst="rect">
             <a:avLst/>
@@ -14329,14 +16839,173 @@
           <a:p>
             <a:pPr algn="l"/>
             <a:r>
-              <a:rPr sz="975" b="0" i="0" u="none">
+              <a:rPr sz="975" b="0" i="0" u="none" dirty="0">
                 <a:solidFill>
                   <a:srgbClr val="0C3C20"/>
                 </a:solidFill>
                 <a:latin typeface="Noto Sans KR ExtraBold"/>
               </a:rPr>
-              <a:t>[핵심 동작 비화] 전국 데이터 최초 메모리 탑재 캐시 기법</a:t>
-            </a:r>
+              <a:t>[</a:t>
+            </a:r>
+            <a:r>
+              <a:rPr sz="975" b="0" i="0" u="none" dirty="0" err="1">
+                <a:solidFill>
+                  <a:srgbClr val="0C3C20"/>
+                </a:solidFill>
+                <a:latin typeface="Noto Sans KR ExtraBold"/>
+              </a:rPr>
+              <a:t>핵심</a:t>
+            </a:r>
+            <a:r>
+              <a:rPr sz="975" b="0" i="0" u="none" dirty="0">
+                <a:solidFill>
+                  <a:srgbClr val="0C3C20"/>
+                </a:solidFill>
+                <a:latin typeface="Noto Sans KR ExtraBold"/>
+              </a:rPr>
+              <a:t> </a:t>
+            </a:r>
+            <a:r>
+              <a:rPr sz="975" b="0" i="0" u="none" dirty="0" err="1">
+                <a:solidFill>
+                  <a:srgbClr val="0C3C20"/>
+                </a:solidFill>
+                <a:latin typeface="Noto Sans KR ExtraBold"/>
+              </a:rPr>
+              <a:t>동작</a:t>
+            </a:r>
+            <a:r>
+              <a:rPr sz="975" b="0" i="0" u="none" dirty="0">
+                <a:solidFill>
+                  <a:srgbClr val="0C3C20"/>
+                </a:solidFill>
+                <a:latin typeface="Noto Sans KR ExtraBold"/>
+              </a:rPr>
+              <a:t> </a:t>
+            </a:r>
+            <a:r>
+              <a:rPr sz="975" b="0" i="0" u="none" dirty="0" err="1">
+                <a:solidFill>
+                  <a:srgbClr val="0C3C20"/>
+                </a:solidFill>
+                <a:latin typeface="Noto Sans KR ExtraBold"/>
+              </a:rPr>
+              <a:t>비화</a:t>
+            </a:r>
+            <a:r>
+              <a:rPr sz="975" b="0" i="0" u="none" dirty="0">
+                <a:solidFill>
+                  <a:srgbClr val="0C3C20"/>
+                </a:solidFill>
+                <a:latin typeface="Noto Sans KR ExtraBold"/>
+              </a:rPr>
+              <a:t>] </a:t>
+            </a:r>
+            <a:r>
+              <a:rPr sz="975" b="0" i="0" u="none" dirty="0" err="1">
+                <a:solidFill>
+                  <a:srgbClr val="0C3C20"/>
+                </a:solidFill>
+                <a:latin typeface="Noto Sans KR ExtraBold"/>
+              </a:rPr>
+              <a:t>전국</a:t>
+            </a:r>
+            <a:r>
+              <a:rPr sz="975" b="0" i="0" u="none" dirty="0">
+                <a:solidFill>
+                  <a:srgbClr val="0C3C20"/>
+                </a:solidFill>
+                <a:latin typeface="Noto Sans KR ExtraBold"/>
+              </a:rPr>
+              <a:t> </a:t>
+            </a:r>
+            <a:r>
+              <a:rPr sz="975" b="0" i="0" u="none" dirty="0" err="1">
+                <a:solidFill>
+                  <a:srgbClr val="0C3C20"/>
+                </a:solidFill>
+                <a:latin typeface="Noto Sans KR ExtraBold"/>
+              </a:rPr>
+              <a:t>데이터</a:t>
+            </a:r>
+            <a:r>
+              <a:rPr sz="975" b="0" i="0" u="none" dirty="0">
+                <a:solidFill>
+                  <a:srgbClr val="0C3C20"/>
+                </a:solidFill>
+                <a:latin typeface="Noto Sans KR ExtraBold"/>
+              </a:rPr>
+              <a:t> </a:t>
+            </a:r>
+            <a:r>
+              <a:rPr sz="975" b="0" i="0" u="none" dirty="0" err="1">
+                <a:solidFill>
+                  <a:srgbClr val="0C3C20"/>
+                </a:solidFill>
+                <a:latin typeface="Noto Sans KR ExtraBold"/>
+              </a:rPr>
+              <a:t>메모리</a:t>
+            </a:r>
+            <a:r>
+              <a:rPr sz="975" b="0" i="0" u="none" dirty="0">
+                <a:solidFill>
+                  <a:srgbClr val="0C3C20"/>
+                </a:solidFill>
+                <a:latin typeface="Noto Sans KR ExtraBold"/>
+              </a:rPr>
+              <a:t> </a:t>
+            </a:r>
+            <a:r>
+              <a:rPr sz="975" b="0" i="0" u="none" dirty="0" err="1">
+                <a:solidFill>
+                  <a:srgbClr val="0C3C20"/>
+                </a:solidFill>
+                <a:latin typeface="Noto Sans KR ExtraBold"/>
+              </a:rPr>
+              <a:t>탑재</a:t>
+            </a:r>
+            <a:r>
+              <a:rPr sz="975" b="0" i="0" u="none" dirty="0">
+                <a:solidFill>
+                  <a:srgbClr val="0C3C20"/>
+                </a:solidFill>
+                <a:latin typeface="Noto Sans KR ExtraBold"/>
+              </a:rPr>
+              <a:t> </a:t>
+            </a:r>
+            <a:r>
+              <a:rPr sz="975" b="0" i="0" u="none" dirty="0" err="1">
+                <a:solidFill>
+                  <a:srgbClr val="0C3C20"/>
+                </a:solidFill>
+                <a:latin typeface="Noto Sans KR ExtraBold"/>
+              </a:rPr>
+              <a:t>캐시</a:t>
+            </a:r>
+            <a:r>
+              <a:rPr sz="975" b="0" i="0" u="none" dirty="0">
+                <a:solidFill>
+                  <a:srgbClr val="0C3C20"/>
+                </a:solidFill>
+                <a:latin typeface="Noto Sans KR ExtraBold"/>
+              </a:rPr>
+              <a:t> </a:t>
+            </a:r>
+            <a:r>
+              <a:rPr sz="975" b="0" i="0" u="none" dirty="0" err="1">
+                <a:solidFill>
+                  <a:srgbClr val="0C3C20"/>
+                </a:solidFill>
+                <a:latin typeface="Noto Sans KR ExtraBold"/>
+              </a:rPr>
+              <a:t>기법</a:t>
+            </a:r>
+            <a:endParaRPr sz="975" b="0" i="0" u="none" dirty="0">
+              <a:solidFill>
+                <a:srgbClr val="0C3C20"/>
+              </a:solidFill>
+              <a:latin typeface="Noto Sans KR ExtraBold"/>
+            </a:endParaRPr>
           </a:p>
         </p:txBody>
       </p:sp>
@@ -15049,13 +17718,283 @@
               </a:lnSpc>
             </a:pPr>
             <a:r>
-              <a:rPr sz="1012" b="0" i="0" u="none">
+              <a:rPr sz="1012" b="0" i="0" u="none" dirty="0">
                 <a:solidFill>
                   <a:srgbClr val="55665A"/>
                 </a:solidFill>
                 <a:latin typeface="Noto Sans KR"/>
               </a:rPr>
-              <a:t>이 코드는 반복문을 통해 첫 페이지 1부터 끝까지 수집하여 서버 컴퓨터의 활성 메모리에 일괄로 차곡차곡 모아놓는 역할을 합니다.</a:t>
+              <a:t>이 </a:t>
+            </a:r>
+            <a:r>
+              <a:rPr sz="1012" b="0" i="0" u="none" dirty="0" err="1">
+                <a:solidFill>
+                  <a:srgbClr val="55665A"/>
+                </a:solidFill>
+                <a:latin typeface="Noto Sans KR"/>
+              </a:rPr>
+              <a:t>코드는</a:t>
+            </a:r>
+            <a:r>
+              <a:rPr sz="1012" b="0" i="0" u="none" dirty="0">
+                <a:solidFill>
+                  <a:srgbClr val="55665A"/>
+                </a:solidFill>
+                <a:latin typeface="Noto Sans KR"/>
+              </a:rPr>
+              <a:t> </a:t>
+            </a:r>
+            <a:r>
+              <a:rPr sz="1012" b="0" i="0" u="none" dirty="0" err="1">
+                <a:solidFill>
+                  <a:srgbClr val="55665A"/>
+                </a:solidFill>
+                <a:latin typeface="Noto Sans KR"/>
+              </a:rPr>
+              <a:t>반복문을</a:t>
+            </a:r>
+            <a:r>
+              <a:rPr sz="1012" b="0" i="0" u="none" dirty="0">
+                <a:solidFill>
+                  <a:srgbClr val="55665A"/>
+                </a:solidFill>
+                <a:latin typeface="Noto Sans KR"/>
+              </a:rPr>
+              <a:t> </a:t>
+            </a:r>
+            <a:r>
+              <a:rPr sz="1012" b="0" i="0" u="none" dirty="0" err="1">
+                <a:solidFill>
+                  <a:srgbClr val="55665A"/>
+                </a:solidFill>
+                <a:latin typeface="Noto Sans KR"/>
+              </a:rPr>
+              <a:t>통해</a:t>
+            </a:r>
+            <a:r>
+              <a:rPr sz="1012" b="0" i="0" u="none" dirty="0">
+                <a:solidFill>
+                  <a:srgbClr val="55665A"/>
+                </a:solidFill>
+                <a:latin typeface="Noto Sans KR"/>
+              </a:rPr>
+              <a:t> 첫 </a:t>
+            </a:r>
+            <a:r>
+              <a:rPr sz="1012" b="0" i="0" u="none" dirty="0" err="1">
+                <a:solidFill>
+                  <a:srgbClr val="55665A"/>
+                </a:solidFill>
+                <a:latin typeface="Noto Sans KR"/>
+              </a:rPr>
+              <a:t>페이지</a:t>
+            </a:r>
+            <a:r>
+              <a:rPr sz="1012" b="0" i="0" u="none" dirty="0">
+                <a:solidFill>
+                  <a:srgbClr val="55665A"/>
+                </a:solidFill>
+                <a:latin typeface="Noto Sans KR"/>
+              </a:rPr>
+              <a:t> 1부터 </a:t>
+            </a:r>
+            <a:r>
+              <a:rPr sz="1012" b="0" i="0" u="none" dirty="0" err="1">
+                <a:solidFill>
+                  <a:srgbClr val="55665A"/>
+                </a:solidFill>
+                <a:latin typeface="Noto Sans KR"/>
+              </a:rPr>
+              <a:t>끝까지</a:t>
+            </a:r>
+            <a:r>
+              <a:rPr sz="1012" b="0" i="0" u="none" dirty="0">
+                <a:solidFill>
+                  <a:srgbClr val="55665A"/>
+                </a:solidFill>
+                <a:latin typeface="Noto Sans KR"/>
+              </a:rPr>
+              <a:t> </a:t>
+            </a:r>
+            <a:r>
+              <a:rPr sz="1012" b="0" i="0" u="none" dirty="0" err="1">
+                <a:solidFill>
+                  <a:srgbClr val="55665A"/>
+                </a:solidFill>
+                <a:latin typeface="Noto Sans KR"/>
+              </a:rPr>
+              <a:t>수집하여</a:t>
+            </a:r>
+            <a:r>
+              <a:rPr sz="1012" b="0" i="0" u="none" dirty="0">
+                <a:solidFill>
+                  <a:srgbClr val="55665A"/>
+                </a:solidFill>
+                <a:latin typeface="Noto Sans KR"/>
+              </a:rPr>
+              <a:t> </a:t>
+            </a:r>
+            <a:r>
+              <a:rPr sz="1012" b="0" i="0" u="none" dirty="0" err="1">
+                <a:solidFill>
+                  <a:srgbClr val="55665A"/>
+                </a:solidFill>
+                <a:latin typeface="Noto Sans KR"/>
+              </a:rPr>
+              <a:t>서버</a:t>
+            </a:r>
+            <a:r>
+              <a:rPr sz="1012" b="0" i="0" u="none" dirty="0">
+                <a:solidFill>
+                  <a:srgbClr val="55665A"/>
+                </a:solidFill>
+                <a:latin typeface="Noto Sans KR"/>
+              </a:rPr>
+              <a:t> </a:t>
+            </a:r>
+            <a:r>
+              <a:rPr sz="1012" b="0" i="0" u="none" dirty="0" err="1">
+                <a:solidFill>
+                  <a:srgbClr val="55665A"/>
+                </a:solidFill>
+                <a:latin typeface="Noto Sans KR"/>
+              </a:rPr>
+              <a:t>컴퓨터의</a:t>
+            </a:r>
+            <a:r>
+              <a:rPr sz="1012" b="0" i="0" u="none" dirty="0">
+                <a:solidFill>
+                  <a:srgbClr val="55665A"/>
+                </a:solidFill>
+                <a:latin typeface="Noto Sans KR"/>
+              </a:rPr>
+              <a:t> </a:t>
+            </a:r>
+            <a:r>
+              <a:rPr sz="1012" b="0" i="0" u="none" dirty="0" err="1">
+                <a:solidFill>
+                  <a:srgbClr val="55665A"/>
+                </a:solidFill>
+                <a:latin typeface="Noto Sans KR"/>
+              </a:rPr>
+              <a:t>활성</a:t>
+            </a:r>
+            <a:r>
+              <a:rPr sz="1012" b="0" i="0" u="none" dirty="0">
+                <a:solidFill>
+                  <a:srgbClr val="55665A"/>
+                </a:solidFill>
+                <a:latin typeface="Noto Sans KR"/>
+              </a:rPr>
+              <a:t> </a:t>
+            </a:r>
+            <a:r>
+              <a:rPr sz="1012" b="0" i="0" u="none" dirty="0" err="1">
+                <a:solidFill>
+                  <a:srgbClr val="55665A"/>
+                </a:solidFill>
+                <a:latin typeface="Noto Sans KR"/>
+              </a:rPr>
+              <a:t>메모리에</a:t>
+            </a:r>
+            <a:r>
+              <a:rPr sz="1012" b="0" i="0" u="none" dirty="0">
+                <a:solidFill>
+                  <a:srgbClr val="55665A"/>
+                </a:solidFill>
+                <a:latin typeface="Noto Sans KR"/>
+              </a:rPr>
+              <a:t> </a:t>
+            </a:r>
+            <a:r>
+              <a:rPr sz="1012" b="0" i="0" u="none" dirty="0" err="1">
+                <a:solidFill>
+                  <a:srgbClr val="55665A"/>
+                </a:solidFill>
+                <a:latin typeface="Noto Sans KR"/>
+              </a:rPr>
+              <a:t>일괄로</a:t>
+            </a:r>
+            <a:r>
+              <a:rPr sz="1012" b="0" i="0" u="none" dirty="0">
+                <a:solidFill>
+                  <a:srgbClr val="55665A"/>
+                </a:solidFill>
+                <a:latin typeface="Noto Sans KR"/>
+              </a:rPr>
+              <a:t> </a:t>
+            </a:r>
+            <a:r>
+              <a:rPr sz="1012" b="0" i="0" u="none" dirty="0" err="1">
+                <a:solidFill>
+                  <a:srgbClr val="55665A"/>
+                </a:solidFill>
+                <a:latin typeface="Noto Sans KR"/>
+              </a:rPr>
+              <a:t>차곡차곡</a:t>
+            </a:r>
+            <a:r>
+              <a:rPr sz="1012" b="0" i="0" u="none" dirty="0">
+                <a:solidFill>
+                  <a:srgbClr val="55665A"/>
+                </a:solidFill>
+                <a:latin typeface="Noto Sans KR"/>
+              </a:rPr>
+              <a:t> </a:t>
+            </a:r>
+            <a:r>
+              <a:rPr sz="1012" b="0" i="0" u="none" dirty="0" err="1">
+                <a:solidFill>
+                  <a:srgbClr val="55665A"/>
+                </a:solidFill>
+                <a:latin typeface="Noto Sans KR"/>
+              </a:rPr>
+              <a:t>모아놓는</a:t>
+            </a:r>
+            <a:r>
+              <a:rPr sz="1012" b="0" i="0" u="none" dirty="0">
+                <a:solidFill>
+                  <a:srgbClr val="55665A"/>
+                </a:solidFill>
+                <a:latin typeface="Noto Sans KR"/>
+              </a:rPr>
+              <a:t> </a:t>
+            </a:r>
+            <a:r>
+              <a:rPr sz="1012" b="0" i="0" u="none" dirty="0" err="1">
+                <a:solidFill>
+                  <a:srgbClr val="55665A"/>
+                </a:solidFill>
+                <a:latin typeface="Noto Sans KR"/>
+              </a:rPr>
+              <a:t>역할을</a:t>
+            </a:r>
+            <a:r>
+              <a:rPr sz="1012" b="0" i="0" u="none" dirty="0">
+                <a:solidFill>
+                  <a:srgbClr val="55665A"/>
+                </a:solidFill>
+                <a:latin typeface="Noto Sans KR"/>
+              </a:rPr>
+              <a:t> </a:t>
+            </a:r>
+            <a:r>
+              <a:rPr sz="1012" b="0" i="0" u="none" dirty="0" err="1">
+                <a:solidFill>
+                  <a:srgbClr val="55665A"/>
+                </a:solidFill>
+                <a:latin typeface="Noto Sans KR"/>
+              </a:rPr>
+              <a:t>합니다</a:t>
+            </a:r>
+            <a:r>
+              <a:rPr sz="1012" b="0" i="0" u="none" dirty="0">
+                <a:solidFill>
+                  <a:srgbClr val="55665A"/>
+                </a:solidFill>
+                <a:latin typeface="Noto Sans KR"/>
+              </a:rPr>
+              <a:t>.</a:t>
             </a:r>
           </a:p>
         </p:txBody>

--- a/캠핑_17기이정우.pptx
+++ b/캠핑_17기이정우.pptx
@@ -3246,14 +3246,164 @@
               </a:lnSpc>
             </a:pPr>
             <a:r>
-              <a:rPr sz="1425" b="0" i="0" u="none">
+              <a:rPr sz="1425" b="0" i="0" u="none" dirty="0" err="1">
                 <a:solidFill>
                   <a:srgbClr val="A3D9B7"/>
                 </a:solidFill>
                 <a:latin typeface="Noto Sans KR"/>
               </a:rPr>
-              <a:t>전국 캠핑장을 지역 · 시설 · 날씨까지 한 번에 찾는 검색 웹사이트</a:t>
-            </a:r>
+              <a:t>전국</a:t>
+            </a:r>
+            <a:r>
+              <a:rPr sz="1425" b="0" i="0" u="none" dirty="0">
+                <a:solidFill>
+                  <a:srgbClr val="A3D9B7"/>
+                </a:solidFill>
+                <a:latin typeface="Noto Sans KR"/>
+              </a:rPr>
+              <a:t> </a:t>
+            </a:r>
+            <a:r>
+              <a:rPr sz="1425" b="0" i="0" u="none" dirty="0" err="1">
+                <a:solidFill>
+                  <a:srgbClr val="A3D9B7"/>
+                </a:solidFill>
+                <a:latin typeface="Noto Sans KR"/>
+              </a:rPr>
+              <a:t>캠핑장을</a:t>
+            </a:r>
+            <a:r>
+              <a:rPr sz="1425" b="0" i="0" u="none" dirty="0">
+                <a:solidFill>
+                  <a:srgbClr val="A3D9B7"/>
+                </a:solidFill>
+                <a:latin typeface="Noto Sans KR"/>
+              </a:rPr>
+              <a:t> </a:t>
+            </a:r>
+            <a:r>
+              <a:rPr sz="1425" b="0" i="0" u="none" dirty="0" err="1">
+                <a:solidFill>
+                  <a:srgbClr val="A3D9B7"/>
+                </a:solidFill>
+                <a:latin typeface="Noto Sans KR"/>
+              </a:rPr>
+              <a:t>지역</a:t>
+            </a:r>
+            <a:r>
+              <a:rPr sz="1425" b="0" i="0" u="none" dirty="0">
+                <a:solidFill>
+                  <a:srgbClr val="A3D9B7"/>
+                </a:solidFill>
+                <a:latin typeface="Noto Sans KR"/>
+              </a:rPr>
+              <a:t> · </a:t>
+            </a:r>
+            <a:r>
+              <a:rPr sz="1425" b="0" i="0" u="none" dirty="0" err="1">
+                <a:solidFill>
+                  <a:srgbClr val="A3D9B7"/>
+                </a:solidFill>
+                <a:latin typeface="Noto Sans KR"/>
+              </a:rPr>
+              <a:t>시설</a:t>
+            </a:r>
+            <a:r>
+              <a:rPr sz="1425" b="0" i="0" u="none" dirty="0">
+                <a:solidFill>
+                  <a:srgbClr val="A3D9B7"/>
+                </a:solidFill>
+                <a:latin typeface="Noto Sans KR"/>
+              </a:rPr>
+              <a:t> · </a:t>
+            </a:r>
+            <a:r>
+              <a:rPr sz="1425" b="0" i="0" u="none" dirty="0" err="1">
+                <a:solidFill>
+                  <a:srgbClr val="A3D9B7"/>
+                </a:solidFill>
+                <a:latin typeface="Noto Sans KR"/>
+              </a:rPr>
+              <a:t>날씨까지</a:t>
+            </a:r>
+            <a:r>
+              <a:rPr sz="1425" b="0" i="0" u="none" dirty="0">
+                <a:solidFill>
+                  <a:srgbClr val="A3D9B7"/>
+                </a:solidFill>
+                <a:latin typeface="Noto Sans KR"/>
+              </a:rPr>
+              <a:t> 한 </a:t>
+            </a:r>
+            <a:r>
+              <a:rPr sz="1425" b="0" i="0" u="none" dirty="0" err="1">
+                <a:solidFill>
+                  <a:srgbClr val="A3D9B7"/>
+                </a:solidFill>
+                <a:latin typeface="Noto Sans KR"/>
+              </a:rPr>
+              <a:t>번에</a:t>
+            </a:r>
+            <a:r>
+              <a:rPr sz="1425" b="0" i="0" u="none" dirty="0">
+                <a:solidFill>
+                  <a:srgbClr val="A3D9B7"/>
+                </a:solidFill>
+                <a:latin typeface="Noto Sans KR"/>
+              </a:rPr>
+              <a:t> </a:t>
+            </a:r>
+            <a:r>
+              <a:rPr sz="1425" b="0" i="0" u="none" dirty="0" err="1">
+                <a:solidFill>
+                  <a:srgbClr val="A3D9B7"/>
+                </a:solidFill>
+                <a:latin typeface="Noto Sans KR"/>
+              </a:rPr>
+              <a:t>찾는</a:t>
+            </a:r>
+            <a:r>
+              <a:rPr sz="1425" b="0" i="0" u="none" dirty="0">
+                <a:solidFill>
+                  <a:srgbClr val="A3D9B7"/>
+                </a:solidFill>
+                <a:latin typeface="Noto Sans KR"/>
+              </a:rPr>
+              <a:t> </a:t>
+            </a:r>
+            <a:r>
+              <a:rPr sz="1425" b="0" i="0" u="none" dirty="0" err="1">
+                <a:solidFill>
+                  <a:srgbClr val="A3D9B7"/>
+                </a:solidFill>
+                <a:latin typeface="Noto Sans KR"/>
+              </a:rPr>
+              <a:t>검색</a:t>
+            </a:r>
+            <a:r>
+              <a:rPr sz="1425" b="0" i="0" u="none" dirty="0">
+                <a:solidFill>
+                  <a:srgbClr val="A3D9B7"/>
+                </a:solidFill>
+                <a:latin typeface="Noto Sans KR"/>
+              </a:rPr>
+              <a:t> </a:t>
+            </a:r>
+            <a:r>
+              <a:rPr sz="1425" b="0" i="0" u="none" dirty="0" err="1">
+                <a:solidFill>
+                  <a:srgbClr val="A3D9B7"/>
+                </a:solidFill>
+                <a:latin typeface="Noto Sans KR"/>
+              </a:rPr>
+              <a:t>웹사이트</a:t>
+            </a:r>
+            <a:endParaRPr sz="1425" b="0" i="0" u="none" dirty="0">
+              <a:solidFill>
+                <a:srgbClr val="A3D9B7"/>
+              </a:solidFill>
+              <a:latin typeface="Noto Sans KR"/>
+            </a:endParaRPr>
           </a:p>
         </p:txBody>
       </p:sp>
@@ -3324,7 +3474,7 @@
               </a:lnSpc>
             </a:pPr>
             <a:r>
-              <a:rPr sz="1050" b="1" i="0" u="none">
+              <a:rPr sz="1050" b="1" i="0" u="none" dirty="0">
                 <a:solidFill>
                   <a:srgbClr val="FFB703"/>
                 </a:solidFill>
@@ -3351,7 +3501,7 @@
         </p:blipFill>
         <p:spPr>
           <a:xfrm>
-            <a:off x="3636466" y="1859309"/>
+            <a:off x="4291366" y="1859309"/>
             <a:ext cx="1926580" cy="285750"/>
           </a:xfrm>
           <a:prstGeom prst="rect">
@@ -3375,32 +3525,8 @@
         </p:blipFill>
         <p:spPr>
           <a:xfrm>
-            <a:off x="5658296" y="1859309"/>
+            <a:off x="6217946" y="1859309"/>
             <a:ext cx="1733996" cy="285750"/>
-          </a:xfrm>
-          <a:prstGeom prst="rect">
-            <a:avLst/>
-          </a:prstGeom>
-        </p:spPr>
-      </p:pic>
-      <p:pic>
-        <p:nvPicPr>
-          <p:cNvPr id="10" name="Picture 9" descr="image.png"/>
-          <p:cNvPicPr>
-            <a:picLocks noChangeAspect="1"/>
-          </p:cNvPicPr>
-          <p:nvPr/>
-        </p:nvPicPr>
-        <p:blipFill>
-          <a:blip r:embed="rId5"/>
-          <a:stretch>
-            <a:fillRect/>
-          </a:stretch>
-        </p:blipFill>
-        <p:spPr>
-          <a:xfrm>
-            <a:off x="7487542" y="1859309"/>
-            <a:ext cx="1067990" cy="285750"/>
           </a:xfrm>
           <a:prstGeom prst="rect">
             <a:avLst/>
@@ -3416,7 +3542,7 @@
           <p:nvPr/>
         </p:nvPicPr>
         <p:blipFill>
-          <a:blip r:embed="rId6"/>
+          <a:blip r:embed="rId5"/>
           <a:stretch>
             <a:fillRect/>
           </a:stretch>
@@ -4833,7 +4959,7 @@
         <p:spPr>
           <a:xfrm>
             <a:off x="6215062" y="2357883"/>
-            <a:ext cx="5405437" cy="1060102"/>
+            <a:ext cx="5405437" cy="2231370"/>
           </a:xfrm>
           <a:prstGeom prst="rect">
             <a:avLst/>
@@ -5050,7 +5176,7 @@
         <p:spPr>
           <a:xfrm>
             <a:off x="6415087" y="2832199"/>
-            <a:ext cx="5005387" cy="385762"/>
+            <a:ext cx="5005387" cy="944169"/>
           </a:xfrm>
           <a:prstGeom prst="rect">
             <a:avLst/>
@@ -5069,13 +5195,514 @@
               </a:lnSpc>
             </a:pPr>
             <a:r>
-              <a:rPr sz="1012" b="1" i="0" u="none">
-                <a:solidFill>
-                  <a:srgbClr val="4A4230"/>
-                </a:solidFill>
-                <a:latin typeface="Noto Sans KR"/>
-              </a:rPr>
-              <a:t>네이버(경로 시간)와 카카오(주변 검색)라는 거대 플랫폼의 이종 API를 유기적으로 조합하여, 화면 깜빡임이 없는 AJAX 통신 기반으로 실시간 최적 동선을 그려냅니다.</a:t>
+              <a:rPr sz="1012" b="1" i="0" u="none" dirty="0" err="1">
+                <a:solidFill>
+                  <a:srgbClr val="4A4230"/>
+                </a:solidFill>
+                <a:latin typeface="Noto Sans KR"/>
+              </a:rPr>
+              <a:t>네이버</a:t>
+            </a:r>
+            <a:r>
+              <a:rPr sz="1012" b="1" i="0" u="none" dirty="0">
+                <a:solidFill>
+                  <a:srgbClr val="4A4230"/>
+                </a:solidFill>
+                <a:latin typeface="Noto Sans KR"/>
+              </a:rPr>
+              <a:t>(</a:t>
+            </a:r>
+            <a:r>
+              <a:rPr sz="1012" b="1" i="0" u="none" dirty="0" err="1">
+                <a:solidFill>
+                  <a:srgbClr val="4A4230"/>
+                </a:solidFill>
+                <a:latin typeface="Noto Sans KR"/>
+              </a:rPr>
+              <a:t>경로</a:t>
+            </a:r>
+            <a:r>
+              <a:rPr sz="1012" b="1" i="0" u="none" dirty="0">
+                <a:solidFill>
+                  <a:srgbClr val="4A4230"/>
+                </a:solidFill>
+                <a:latin typeface="Noto Sans KR"/>
+              </a:rPr>
+              <a:t> </a:t>
+            </a:r>
+            <a:r>
+              <a:rPr sz="1012" b="1" i="0" u="none" dirty="0" err="1">
+                <a:solidFill>
+                  <a:srgbClr val="4A4230"/>
+                </a:solidFill>
+                <a:latin typeface="Noto Sans KR"/>
+              </a:rPr>
+              <a:t>시간</a:t>
+            </a:r>
+            <a:r>
+              <a:rPr sz="1012" b="1" i="0" u="none" dirty="0">
+                <a:solidFill>
+                  <a:srgbClr val="4A4230"/>
+                </a:solidFill>
+                <a:latin typeface="Noto Sans KR"/>
+              </a:rPr>
+              <a:t>)와 </a:t>
+            </a:r>
+            <a:r>
+              <a:rPr sz="1012" b="1" i="0" u="none" dirty="0" err="1">
+                <a:solidFill>
+                  <a:srgbClr val="4A4230"/>
+                </a:solidFill>
+                <a:latin typeface="Noto Sans KR"/>
+              </a:rPr>
+              <a:t>카카오</a:t>
+            </a:r>
+            <a:r>
+              <a:rPr sz="1012" b="1" i="0" u="none" dirty="0">
+                <a:solidFill>
+                  <a:srgbClr val="4A4230"/>
+                </a:solidFill>
+                <a:latin typeface="Noto Sans KR"/>
+              </a:rPr>
+              <a:t>(</a:t>
+            </a:r>
+            <a:r>
+              <a:rPr sz="1012" b="1" i="0" u="none" dirty="0" err="1">
+                <a:solidFill>
+                  <a:srgbClr val="4A4230"/>
+                </a:solidFill>
+                <a:latin typeface="Noto Sans KR"/>
+              </a:rPr>
+              <a:t>주변</a:t>
+            </a:r>
+            <a:r>
+              <a:rPr sz="1012" b="1" i="0" u="none" dirty="0">
+                <a:solidFill>
+                  <a:srgbClr val="4A4230"/>
+                </a:solidFill>
+                <a:latin typeface="Noto Sans KR"/>
+              </a:rPr>
+              <a:t> </a:t>
+            </a:r>
+            <a:r>
+              <a:rPr sz="1012" b="1" i="0" u="none" dirty="0" err="1">
+                <a:solidFill>
+                  <a:srgbClr val="4A4230"/>
+                </a:solidFill>
+                <a:latin typeface="Noto Sans KR"/>
+              </a:rPr>
+              <a:t>검색</a:t>
+            </a:r>
+            <a:r>
+              <a:rPr sz="1012" b="1" i="0" u="none" dirty="0">
+                <a:solidFill>
+                  <a:srgbClr val="4A4230"/>
+                </a:solidFill>
+                <a:latin typeface="Noto Sans KR"/>
+              </a:rPr>
+              <a:t>)</a:t>
+            </a:r>
+            <a:r>
+              <a:rPr sz="1012" b="1" i="0" u="none" dirty="0" err="1">
+                <a:solidFill>
+                  <a:srgbClr val="4A4230"/>
+                </a:solidFill>
+                <a:latin typeface="Noto Sans KR"/>
+              </a:rPr>
+              <a:t>라는</a:t>
+            </a:r>
+            <a:r>
+              <a:rPr sz="1012" b="1" i="0" u="none" dirty="0">
+                <a:solidFill>
+                  <a:srgbClr val="4A4230"/>
+                </a:solidFill>
+                <a:latin typeface="Noto Sans KR"/>
+              </a:rPr>
+              <a:t> </a:t>
+            </a:r>
+            <a:r>
+              <a:rPr sz="1012" b="1" i="0" u="none" dirty="0" err="1">
+                <a:solidFill>
+                  <a:srgbClr val="4A4230"/>
+                </a:solidFill>
+                <a:latin typeface="Noto Sans KR"/>
+              </a:rPr>
+              <a:t>거대</a:t>
+            </a:r>
+            <a:r>
+              <a:rPr sz="1012" b="1" i="0" u="none" dirty="0">
+                <a:solidFill>
+                  <a:srgbClr val="4A4230"/>
+                </a:solidFill>
+                <a:latin typeface="Noto Sans KR"/>
+              </a:rPr>
+              <a:t> </a:t>
+            </a:r>
+            <a:r>
+              <a:rPr sz="1012" b="1" i="0" u="none" dirty="0" err="1">
+                <a:solidFill>
+                  <a:srgbClr val="4A4230"/>
+                </a:solidFill>
+                <a:latin typeface="Noto Sans KR"/>
+              </a:rPr>
+              <a:t>플랫폼의</a:t>
+            </a:r>
+            <a:r>
+              <a:rPr sz="1012" b="1" i="0" u="none" dirty="0">
+                <a:solidFill>
+                  <a:srgbClr val="4A4230"/>
+                </a:solidFill>
+                <a:latin typeface="Noto Sans KR"/>
+              </a:rPr>
+              <a:t> </a:t>
+            </a:r>
+            <a:r>
+              <a:rPr sz="1012" b="1" i="0" u="none" dirty="0" err="1">
+                <a:solidFill>
+                  <a:srgbClr val="4A4230"/>
+                </a:solidFill>
+                <a:latin typeface="Noto Sans KR"/>
+              </a:rPr>
+              <a:t>이종</a:t>
+            </a:r>
+            <a:r>
+              <a:rPr sz="1012" b="1" i="0" u="none" dirty="0">
+                <a:solidFill>
+                  <a:srgbClr val="4A4230"/>
+                </a:solidFill>
+                <a:latin typeface="Noto Sans KR"/>
+              </a:rPr>
+              <a:t> </a:t>
+            </a:r>
+            <a:r>
+              <a:rPr sz="1012" b="1" i="0" u="none" dirty="0" err="1">
+                <a:solidFill>
+                  <a:srgbClr val="4A4230"/>
+                </a:solidFill>
+                <a:latin typeface="Noto Sans KR"/>
+              </a:rPr>
+              <a:t>API를</a:t>
+            </a:r>
+            <a:r>
+              <a:rPr sz="1012" b="1" i="0" u="none" dirty="0">
+                <a:solidFill>
+                  <a:srgbClr val="4A4230"/>
+                </a:solidFill>
+                <a:latin typeface="Noto Sans KR"/>
+              </a:rPr>
+              <a:t> </a:t>
+            </a:r>
+            <a:r>
+              <a:rPr sz="1012" b="1" i="0" u="none" dirty="0" err="1">
+                <a:solidFill>
+                  <a:srgbClr val="4A4230"/>
+                </a:solidFill>
+                <a:latin typeface="Noto Sans KR"/>
+              </a:rPr>
+              <a:t>유기적으로</a:t>
+            </a:r>
+            <a:r>
+              <a:rPr sz="1012" b="1" i="0" u="none" dirty="0">
+                <a:solidFill>
+                  <a:srgbClr val="4A4230"/>
+                </a:solidFill>
+                <a:latin typeface="Noto Sans KR"/>
+              </a:rPr>
+              <a:t> </a:t>
+            </a:r>
+            <a:r>
+              <a:rPr sz="1012" b="1" i="0" u="none" dirty="0" err="1">
+                <a:solidFill>
+                  <a:srgbClr val="4A4230"/>
+                </a:solidFill>
+                <a:latin typeface="Noto Sans KR"/>
+              </a:rPr>
+              <a:t>조합하여</a:t>
+            </a:r>
+            <a:r>
+              <a:rPr sz="1012" b="1" i="0" u="none" dirty="0">
+                <a:solidFill>
+                  <a:srgbClr val="4A4230"/>
+                </a:solidFill>
+                <a:latin typeface="Noto Sans KR"/>
+              </a:rPr>
+              <a:t>, </a:t>
+            </a:r>
+            <a:r>
+              <a:rPr sz="1012" b="1" i="0" u="none" dirty="0" err="1">
+                <a:solidFill>
+                  <a:srgbClr val="4A4230"/>
+                </a:solidFill>
+                <a:latin typeface="Noto Sans KR"/>
+              </a:rPr>
+              <a:t>화면</a:t>
+            </a:r>
+            <a:r>
+              <a:rPr sz="1012" b="1" i="0" u="none" dirty="0">
+                <a:solidFill>
+                  <a:srgbClr val="4A4230"/>
+                </a:solidFill>
+                <a:latin typeface="Noto Sans KR"/>
+              </a:rPr>
+              <a:t> </a:t>
+            </a:r>
+            <a:r>
+              <a:rPr sz="1012" b="1" i="0" u="none" dirty="0" err="1">
+                <a:solidFill>
+                  <a:srgbClr val="4A4230"/>
+                </a:solidFill>
+                <a:latin typeface="Noto Sans KR"/>
+              </a:rPr>
+              <a:t>깜빡임이</a:t>
+            </a:r>
+            <a:r>
+              <a:rPr sz="1012" b="1" i="0" u="none" dirty="0">
+                <a:solidFill>
+                  <a:srgbClr val="4A4230"/>
+                </a:solidFill>
+                <a:latin typeface="Noto Sans KR"/>
+              </a:rPr>
+              <a:t> </a:t>
+            </a:r>
+            <a:r>
+              <a:rPr sz="1012" b="1" i="0" u="none" dirty="0" err="1">
+                <a:solidFill>
+                  <a:srgbClr val="4A4230"/>
+                </a:solidFill>
+                <a:latin typeface="Noto Sans KR"/>
+              </a:rPr>
+              <a:t>없는</a:t>
+            </a:r>
+            <a:r>
+              <a:rPr sz="1012" b="1" i="0" u="none" dirty="0">
+                <a:solidFill>
+                  <a:srgbClr val="4A4230"/>
+                </a:solidFill>
+                <a:latin typeface="Noto Sans KR"/>
+              </a:rPr>
+              <a:t> AJAX </a:t>
+            </a:r>
+            <a:r>
+              <a:rPr sz="1012" b="1" i="0" u="none" dirty="0" err="1">
+                <a:solidFill>
+                  <a:srgbClr val="4A4230"/>
+                </a:solidFill>
+                <a:latin typeface="Noto Sans KR"/>
+              </a:rPr>
+              <a:t>통신</a:t>
+            </a:r>
+            <a:r>
+              <a:rPr sz="1012" b="1" i="0" u="none" dirty="0">
+                <a:solidFill>
+                  <a:srgbClr val="4A4230"/>
+                </a:solidFill>
+                <a:latin typeface="Noto Sans KR"/>
+              </a:rPr>
+              <a:t> </a:t>
+            </a:r>
+            <a:r>
+              <a:rPr sz="1012" b="1" i="0" u="none" dirty="0" err="1">
+                <a:solidFill>
+                  <a:srgbClr val="4A4230"/>
+                </a:solidFill>
+                <a:latin typeface="Noto Sans KR"/>
+              </a:rPr>
+              <a:t>기반으로</a:t>
+            </a:r>
+            <a:r>
+              <a:rPr sz="1012" b="1" i="0" u="none" dirty="0">
+                <a:solidFill>
+                  <a:srgbClr val="4A4230"/>
+                </a:solidFill>
+                <a:latin typeface="Noto Sans KR"/>
+              </a:rPr>
+              <a:t> </a:t>
+            </a:r>
+            <a:r>
+              <a:rPr sz="1012" b="1" i="0" u="none" dirty="0" err="1">
+                <a:solidFill>
+                  <a:srgbClr val="4A4230"/>
+                </a:solidFill>
+                <a:latin typeface="Noto Sans KR"/>
+              </a:rPr>
+              <a:t>실시간</a:t>
+            </a:r>
+            <a:r>
+              <a:rPr sz="1012" b="1" i="0" u="none" dirty="0">
+                <a:solidFill>
+                  <a:srgbClr val="4A4230"/>
+                </a:solidFill>
+                <a:latin typeface="Noto Sans KR"/>
+              </a:rPr>
+              <a:t> </a:t>
+            </a:r>
+            <a:r>
+              <a:rPr sz="1012" b="1" i="0" u="none" dirty="0" err="1">
+                <a:solidFill>
+                  <a:srgbClr val="4A4230"/>
+                </a:solidFill>
+                <a:latin typeface="Noto Sans KR"/>
+              </a:rPr>
+              <a:t>최적</a:t>
+            </a:r>
+            <a:r>
+              <a:rPr sz="1012" b="1" i="0" u="none" dirty="0">
+                <a:solidFill>
+                  <a:srgbClr val="4A4230"/>
+                </a:solidFill>
+                <a:latin typeface="Noto Sans KR"/>
+              </a:rPr>
+              <a:t> </a:t>
+            </a:r>
+            <a:r>
+              <a:rPr sz="1012" b="1" i="0" u="none" dirty="0" err="1">
+                <a:solidFill>
+                  <a:srgbClr val="4A4230"/>
+                </a:solidFill>
+                <a:latin typeface="Noto Sans KR"/>
+              </a:rPr>
+              <a:t>동선을</a:t>
+            </a:r>
+            <a:r>
+              <a:rPr sz="1012" b="1" i="0" u="none" dirty="0">
+                <a:solidFill>
+                  <a:srgbClr val="4A4230"/>
+                </a:solidFill>
+                <a:latin typeface="Noto Sans KR"/>
+              </a:rPr>
+              <a:t> </a:t>
+            </a:r>
+            <a:r>
+              <a:rPr sz="1012" b="1" i="0" u="none" dirty="0" err="1">
+                <a:solidFill>
+                  <a:srgbClr val="4A4230"/>
+                </a:solidFill>
+                <a:latin typeface="Noto Sans KR"/>
+              </a:rPr>
+              <a:t>그려냅니다</a:t>
+            </a:r>
+            <a:r>
+              <a:rPr sz="1012" b="1" i="0" u="none" dirty="0">
+                <a:solidFill>
+                  <a:srgbClr val="4A4230"/>
+                </a:solidFill>
+                <a:latin typeface="Noto Sans KR"/>
+              </a:rPr>
+              <a:t>.</a:t>
+            </a:r>
+            <a:endParaRPr lang="en-US" sz="1012" b="1" i="0" u="none" dirty="0">
+              <a:solidFill>
+                <a:srgbClr val="4A4230"/>
+              </a:solidFill>
+              <a:latin typeface="Noto Sans KR"/>
+            </a:endParaRPr>
+          </a:p>
+          <a:p>
+            <a:pPr algn="l">
+              <a:lnSpc>
+                <a:spcPts val="1518"/>
+              </a:lnSpc>
+            </a:pPr>
+            <a:endParaRPr lang="en-US" sz="1012" b="1" dirty="0">
+              <a:solidFill>
+                <a:srgbClr val="4A4230"/>
+              </a:solidFill>
+              <a:latin typeface="Noto Sans KR"/>
+            </a:endParaRPr>
+          </a:p>
+          <a:p>
+            <a:pPr algn="l">
+              <a:lnSpc>
+                <a:spcPts val="1518"/>
+              </a:lnSpc>
+            </a:pPr>
+            <a:r>
+              <a:rPr lang="en-US" sz="1012" b="1" i="0" u="none" dirty="0">
+                <a:solidFill>
+                  <a:srgbClr val="4A4230"/>
+                </a:solidFill>
+                <a:latin typeface="Noto Sans KR"/>
+              </a:rPr>
+              <a:t>AJAX</a:t>
+            </a:r>
+            <a:r>
+              <a:rPr lang="ko-KR" altLang="en-US" sz="1012" b="1" i="0" u="none" dirty="0">
+                <a:solidFill>
+                  <a:srgbClr val="4A4230"/>
+                </a:solidFill>
+                <a:latin typeface="Noto Sans KR"/>
+              </a:rPr>
+              <a:t>란</a:t>
+            </a:r>
+            <a:r>
+              <a:rPr lang="en-US" altLang="ko-KR" sz="1012" b="1" i="0" u="none" dirty="0">
+                <a:solidFill>
+                  <a:srgbClr val="4A4230"/>
+                </a:solidFill>
+                <a:latin typeface="Noto Sans KR"/>
+              </a:rPr>
+              <a:t>? </a:t>
+            </a:r>
+          </a:p>
+          <a:p>
+            <a:pPr algn="l">
+              <a:lnSpc>
+                <a:spcPts val="1518"/>
+              </a:lnSpc>
+            </a:pPr>
+            <a:r>
+              <a:rPr lang="ko-KR" altLang="en-US" sz="1012" b="1" dirty="0">
+                <a:solidFill>
+                  <a:srgbClr val="4A4230"/>
+                </a:solidFill>
+                <a:latin typeface="Noto Sans KR"/>
+              </a:rPr>
+              <a:t>전체페이지를 </a:t>
+            </a:r>
+            <a:r>
+              <a:rPr lang="ko-KR" altLang="en-US" sz="1012" b="1" dirty="0" err="1">
+                <a:solidFill>
+                  <a:srgbClr val="4A4230"/>
+                </a:solidFill>
+                <a:latin typeface="Noto Sans KR"/>
+              </a:rPr>
+              <a:t>새로고침</a:t>
+            </a:r>
+            <a:r>
+              <a:rPr lang="ko-KR" altLang="en-US" sz="1012" b="1" dirty="0">
+                <a:solidFill>
+                  <a:srgbClr val="4A4230"/>
+                </a:solidFill>
+                <a:latin typeface="Noto Sans KR"/>
+              </a:rPr>
+              <a:t> 하지 않고 뒤에서 몰래 </a:t>
+            </a:r>
+            <a:r>
+              <a:rPr lang="ko-KR" altLang="en-US" sz="1012" b="1" dirty="0" err="1">
+                <a:solidFill>
+                  <a:srgbClr val="4A4230"/>
+                </a:solidFill>
+                <a:latin typeface="Noto Sans KR"/>
+              </a:rPr>
+              <a:t>서버랑</a:t>
+            </a:r>
+            <a:r>
+              <a:rPr lang="ko-KR" altLang="en-US" sz="1012" b="1" dirty="0">
+                <a:solidFill>
+                  <a:srgbClr val="4A4230"/>
+                </a:solidFill>
+                <a:latin typeface="Noto Sans KR"/>
+              </a:rPr>
+              <a:t> 데이터만 주고받는다는 의미</a:t>
+            </a:r>
+            <a:r>
+              <a:rPr lang="en-US" altLang="ko-KR" sz="1012" b="1" dirty="0">
+                <a:solidFill>
+                  <a:srgbClr val="4A4230"/>
+                </a:solidFill>
+                <a:latin typeface="Noto Sans KR"/>
+              </a:rPr>
+              <a:t>.</a:t>
             </a:r>
           </a:p>
         </p:txBody>
@@ -5489,22 +6116,301 @@
               </a:lnSpc>
             </a:pPr>
             <a:r>
-              <a:rPr sz="975" b="1" i="0" u="none">
+              <a:rPr sz="975" b="1" i="0" u="none" dirty="0" err="1">
                 <a:solidFill>
                   <a:srgbClr val="55665A"/>
                 </a:solidFill>
                 <a:latin typeface="Noto Sans KR"/>
               </a:rPr>
-              <a:t>배포:</a:t>
-            </a:r>
-            <a:r>
-              <a:rPr sz="975" b="0" i="0" u="none">
+              <a:t>배포</a:t>
+            </a:r>
+            <a:r>
+              <a:rPr sz="975" b="1" i="0" u="none" dirty="0">
                 <a:solidFill>
                   <a:srgbClr val="55665A"/>
                 </a:solidFill>
                 <a:latin typeface="Noto Sans KR"/>
               </a:rPr>
-              <a:t> 개인 PC 내부가 아닌, 누구나 스마트폰 주소창으로 들어올 수 있게 클라우드 플랫폼인 Render와 가속용 엔진 Gunicorn으로 구동시켰습니다.</a:t>
+              <a:t>:</a:t>
+            </a:r>
+            <a:r>
+              <a:rPr sz="975" b="0" i="0" u="none" dirty="0">
+                <a:solidFill>
+                  <a:srgbClr val="55665A"/>
+                </a:solidFill>
+                <a:latin typeface="Noto Sans KR"/>
+              </a:rPr>
+              <a:t> </a:t>
+            </a:r>
+            <a:r>
+              <a:rPr sz="975" b="0" i="0" u="none" dirty="0" err="1">
+                <a:solidFill>
+                  <a:srgbClr val="55665A"/>
+                </a:solidFill>
+                <a:latin typeface="Noto Sans KR"/>
+              </a:rPr>
+              <a:t>개인</a:t>
+            </a:r>
+            <a:r>
+              <a:rPr sz="975" b="0" i="0" u="none" dirty="0">
+                <a:solidFill>
+                  <a:srgbClr val="55665A"/>
+                </a:solidFill>
+                <a:latin typeface="Noto Sans KR"/>
+              </a:rPr>
+              <a:t> PC </a:t>
+            </a:r>
+            <a:r>
+              <a:rPr sz="975" b="0" i="0" u="none" dirty="0" err="1">
+                <a:solidFill>
+                  <a:srgbClr val="55665A"/>
+                </a:solidFill>
+                <a:latin typeface="Noto Sans KR"/>
+              </a:rPr>
+              <a:t>내부가</a:t>
+            </a:r>
+            <a:r>
+              <a:rPr sz="975" b="0" i="0" u="none" dirty="0">
+                <a:solidFill>
+                  <a:srgbClr val="55665A"/>
+                </a:solidFill>
+                <a:latin typeface="Noto Sans KR"/>
+              </a:rPr>
+              <a:t> </a:t>
+            </a:r>
+            <a:r>
+              <a:rPr sz="975" b="0" i="0" u="none" dirty="0" err="1">
+                <a:solidFill>
+                  <a:srgbClr val="55665A"/>
+                </a:solidFill>
+                <a:latin typeface="Noto Sans KR"/>
+              </a:rPr>
+              <a:t>아닌</a:t>
+            </a:r>
+            <a:r>
+              <a:rPr sz="975" b="0" i="0" u="none" dirty="0">
+                <a:solidFill>
+                  <a:srgbClr val="55665A"/>
+                </a:solidFill>
+                <a:latin typeface="Noto Sans KR"/>
+              </a:rPr>
+              <a:t>, </a:t>
+            </a:r>
+            <a:r>
+              <a:rPr sz="975" b="0" i="0" u="none" dirty="0" err="1">
+                <a:solidFill>
+                  <a:srgbClr val="55665A"/>
+                </a:solidFill>
+                <a:latin typeface="Noto Sans KR"/>
+              </a:rPr>
+              <a:t>누구나</a:t>
+            </a:r>
+            <a:r>
+              <a:rPr sz="975" b="0" i="0" u="none" dirty="0">
+                <a:solidFill>
+                  <a:srgbClr val="55665A"/>
+                </a:solidFill>
+                <a:latin typeface="Noto Sans KR"/>
+              </a:rPr>
+              <a:t> </a:t>
+            </a:r>
+            <a:r>
+              <a:rPr sz="975" b="0" i="0" u="none" dirty="0" err="1">
+                <a:solidFill>
+                  <a:srgbClr val="55665A"/>
+                </a:solidFill>
+                <a:latin typeface="Noto Sans KR"/>
+              </a:rPr>
+              <a:t>스마트폰</a:t>
+            </a:r>
+            <a:r>
+              <a:rPr sz="975" b="0" i="0" u="none" dirty="0">
+                <a:solidFill>
+                  <a:srgbClr val="55665A"/>
+                </a:solidFill>
+                <a:latin typeface="Noto Sans KR"/>
+              </a:rPr>
+              <a:t> </a:t>
+            </a:r>
+            <a:r>
+              <a:rPr sz="975" b="0" i="0" u="none" dirty="0" err="1">
+                <a:solidFill>
+                  <a:srgbClr val="55665A"/>
+                </a:solidFill>
+                <a:latin typeface="Noto Sans KR"/>
+              </a:rPr>
+              <a:t>주소창으로</a:t>
+            </a:r>
+            <a:r>
+              <a:rPr sz="975" b="0" i="0" u="none" dirty="0">
+                <a:solidFill>
+                  <a:srgbClr val="55665A"/>
+                </a:solidFill>
+                <a:latin typeface="Noto Sans KR"/>
+              </a:rPr>
+              <a:t> </a:t>
+            </a:r>
+            <a:r>
+              <a:rPr sz="975" b="0" i="0" u="none" dirty="0" err="1">
+                <a:solidFill>
+                  <a:srgbClr val="55665A"/>
+                </a:solidFill>
+                <a:latin typeface="Noto Sans KR"/>
+              </a:rPr>
+              <a:t>들어올</a:t>
+            </a:r>
+            <a:r>
+              <a:rPr sz="975" b="0" i="0" u="none" dirty="0">
+                <a:solidFill>
+                  <a:srgbClr val="55665A"/>
+                </a:solidFill>
+                <a:latin typeface="Noto Sans KR"/>
+              </a:rPr>
+              <a:t> 수 </a:t>
+            </a:r>
+            <a:r>
+              <a:rPr sz="975" b="0" i="0" u="none" dirty="0" err="1">
+                <a:solidFill>
+                  <a:srgbClr val="55665A"/>
+                </a:solidFill>
+                <a:latin typeface="Noto Sans KR"/>
+              </a:rPr>
+              <a:t>있게</a:t>
+            </a:r>
+            <a:r>
+              <a:rPr sz="975" b="0" i="0" u="none" dirty="0">
+                <a:solidFill>
+                  <a:srgbClr val="55665A"/>
+                </a:solidFill>
+                <a:latin typeface="Noto Sans KR"/>
+              </a:rPr>
+              <a:t> </a:t>
+            </a:r>
+            <a:r>
+              <a:rPr sz="975" b="0" i="0" u="none" dirty="0" err="1">
+                <a:solidFill>
+                  <a:srgbClr val="55665A"/>
+                </a:solidFill>
+                <a:latin typeface="Noto Sans KR"/>
+              </a:rPr>
+              <a:t>클라우드</a:t>
+            </a:r>
+            <a:r>
+              <a:rPr sz="975" b="0" i="0" u="none" dirty="0">
+                <a:solidFill>
+                  <a:srgbClr val="55665A"/>
+                </a:solidFill>
+                <a:latin typeface="Noto Sans KR"/>
+              </a:rPr>
+              <a:t> </a:t>
+            </a:r>
+            <a:r>
+              <a:rPr sz="975" b="0" i="0" u="none" dirty="0" err="1">
+                <a:solidFill>
+                  <a:srgbClr val="55665A"/>
+                </a:solidFill>
+                <a:latin typeface="Noto Sans KR"/>
+              </a:rPr>
+              <a:t>플랫폼인</a:t>
+            </a:r>
+            <a:r>
+              <a:rPr sz="975" b="0" i="0" u="none" dirty="0">
+                <a:solidFill>
+                  <a:srgbClr val="55665A"/>
+                </a:solidFill>
+                <a:latin typeface="Noto Sans KR"/>
+              </a:rPr>
+              <a:t> </a:t>
+            </a:r>
+            <a:r>
+              <a:rPr sz="975" b="0" i="0" u="none" dirty="0" err="1">
+                <a:solidFill>
+                  <a:srgbClr val="55665A"/>
+                </a:solidFill>
+                <a:latin typeface="Noto Sans KR"/>
+              </a:rPr>
+              <a:t>Render와</a:t>
+            </a:r>
+            <a:r>
+              <a:rPr sz="975" b="0" i="0" u="none" dirty="0">
+                <a:solidFill>
+                  <a:srgbClr val="55665A"/>
+                </a:solidFill>
+                <a:latin typeface="Noto Sans KR"/>
+              </a:rPr>
+              <a:t> </a:t>
+            </a:r>
+            <a:r>
+              <a:rPr sz="975" b="0" i="0" u="none" dirty="0" err="1">
+                <a:solidFill>
+                  <a:srgbClr val="55665A"/>
+                </a:solidFill>
+                <a:latin typeface="Noto Sans KR"/>
+              </a:rPr>
+              <a:t>가속용</a:t>
+            </a:r>
+            <a:r>
+              <a:rPr sz="975" b="0" i="0" u="none" dirty="0">
+                <a:solidFill>
+                  <a:srgbClr val="55665A"/>
+                </a:solidFill>
+                <a:latin typeface="Noto Sans KR"/>
+              </a:rPr>
+              <a:t> </a:t>
+            </a:r>
+            <a:r>
+              <a:rPr sz="975" b="0" i="0" u="none" dirty="0" err="1">
+                <a:solidFill>
+                  <a:srgbClr val="55665A"/>
+                </a:solidFill>
+                <a:latin typeface="Noto Sans KR"/>
+              </a:rPr>
+              <a:t>엔진</a:t>
+            </a:r>
+            <a:r>
+              <a:rPr sz="975" b="0" i="0" u="none" dirty="0">
+                <a:solidFill>
+                  <a:srgbClr val="55665A"/>
+                </a:solidFill>
+                <a:latin typeface="Noto Sans KR"/>
+              </a:rPr>
+              <a:t> </a:t>
+            </a:r>
+            <a:r>
+              <a:rPr sz="975" b="0" i="0" u="none" dirty="0" err="1">
+                <a:solidFill>
+                  <a:srgbClr val="55665A"/>
+                </a:solidFill>
+                <a:latin typeface="Noto Sans KR"/>
+              </a:rPr>
+              <a:t>Gunicorn으로</a:t>
+            </a:r>
+            <a:r>
+              <a:rPr sz="975" b="0" i="0" u="none" dirty="0">
+                <a:solidFill>
+                  <a:srgbClr val="55665A"/>
+                </a:solidFill>
+                <a:latin typeface="Noto Sans KR"/>
+              </a:rPr>
+              <a:t> </a:t>
+            </a:r>
+            <a:r>
+              <a:rPr sz="975" b="0" i="0" u="none" dirty="0" err="1">
+                <a:solidFill>
+                  <a:srgbClr val="55665A"/>
+                </a:solidFill>
+                <a:latin typeface="Noto Sans KR"/>
+              </a:rPr>
+              <a:t>구동시켰습니다</a:t>
+            </a:r>
+            <a:r>
+              <a:rPr sz="975" b="0" i="0" u="none" dirty="0">
+                <a:solidFill>
+                  <a:srgbClr val="55665A"/>
+                </a:solidFill>
+                <a:latin typeface="Noto Sans KR"/>
+              </a:rPr>
+              <a:t>.</a:t>
             </a:r>
           </a:p>
         </p:txBody>
@@ -5537,22 +6443,409 @@
               </a:lnSpc>
             </a:pPr>
             <a:r>
-              <a:rPr sz="975" b="1" i="0" u="none">
+              <a:rPr sz="975" b="1" i="0" u="none" dirty="0" err="1">
                 <a:solidFill>
                   <a:srgbClr val="55665A"/>
                 </a:solidFill>
                 <a:latin typeface="Noto Sans KR"/>
               </a:rPr>
-              <a:t>모바일:</a:t>
-            </a:r>
-            <a:r>
-              <a:rPr sz="975" b="0" i="0" u="none">
+              <a:t>모바일</a:t>
+            </a:r>
+            <a:r>
+              <a:rPr sz="975" b="1" i="0" u="none" dirty="0">
                 <a:solidFill>
                   <a:srgbClr val="55665A"/>
                 </a:solidFill>
                 <a:latin typeface="Noto Sans KR"/>
               </a:rPr>
-              <a:t> 화면 가로 폭이 680px 이하인 작은 휴대폰으로 보면 복잡했던 카드 모양 가로 레이아웃이 상하 세로로 자동 줄 바꿈 정렬되는 미디어쿼리 디자인을 전 기종 탑재했습니다.</a:t>
+              <a:t>:</a:t>
+            </a:r>
+            <a:r>
+              <a:rPr sz="975" b="0" i="0" u="none" dirty="0">
+                <a:solidFill>
+                  <a:srgbClr val="55665A"/>
+                </a:solidFill>
+                <a:latin typeface="Noto Sans KR"/>
+              </a:rPr>
+              <a:t> </a:t>
+            </a:r>
+            <a:r>
+              <a:rPr sz="975" b="0" i="0" u="none" dirty="0" err="1">
+                <a:solidFill>
+                  <a:srgbClr val="55665A"/>
+                </a:solidFill>
+                <a:latin typeface="Noto Sans KR"/>
+              </a:rPr>
+              <a:t>화면</a:t>
+            </a:r>
+            <a:r>
+              <a:rPr sz="975" b="0" i="0" u="none" dirty="0">
+                <a:solidFill>
+                  <a:srgbClr val="55665A"/>
+                </a:solidFill>
+                <a:latin typeface="Noto Sans KR"/>
+              </a:rPr>
+              <a:t> </a:t>
+            </a:r>
+            <a:r>
+              <a:rPr sz="975" b="0" i="0" u="none" dirty="0" err="1">
+                <a:solidFill>
+                  <a:srgbClr val="55665A"/>
+                </a:solidFill>
+                <a:latin typeface="Noto Sans KR"/>
+              </a:rPr>
+              <a:t>가로</a:t>
+            </a:r>
+            <a:r>
+              <a:rPr sz="975" b="0" i="0" u="none" dirty="0">
+                <a:solidFill>
+                  <a:srgbClr val="55665A"/>
+                </a:solidFill>
+                <a:latin typeface="Noto Sans KR"/>
+              </a:rPr>
+              <a:t> </a:t>
+            </a:r>
+            <a:r>
+              <a:rPr sz="975" b="0" i="0" u="none" dirty="0" err="1">
+                <a:solidFill>
+                  <a:srgbClr val="55665A"/>
+                </a:solidFill>
+                <a:latin typeface="Noto Sans KR"/>
+              </a:rPr>
+              <a:t>폭이</a:t>
+            </a:r>
+            <a:r>
+              <a:rPr sz="975" b="0" i="0" u="none" dirty="0">
+                <a:solidFill>
+                  <a:srgbClr val="55665A"/>
+                </a:solidFill>
+                <a:latin typeface="Noto Sans KR"/>
+              </a:rPr>
+              <a:t> 680px </a:t>
+            </a:r>
+            <a:r>
+              <a:rPr sz="975" b="0" i="0" u="none" dirty="0" err="1">
+                <a:solidFill>
+                  <a:srgbClr val="55665A"/>
+                </a:solidFill>
+                <a:latin typeface="Noto Sans KR"/>
+              </a:rPr>
+              <a:t>이하인</a:t>
+            </a:r>
+            <a:r>
+              <a:rPr sz="975" b="0" i="0" u="none" dirty="0">
+                <a:solidFill>
+                  <a:srgbClr val="55665A"/>
+                </a:solidFill>
+                <a:latin typeface="Noto Sans KR"/>
+              </a:rPr>
+              <a:t> </a:t>
+            </a:r>
+            <a:r>
+              <a:rPr sz="975" b="0" i="0" u="none" dirty="0" err="1">
+                <a:solidFill>
+                  <a:srgbClr val="55665A"/>
+                </a:solidFill>
+                <a:latin typeface="Noto Sans KR"/>
+              </a:rPr>
+              <a:t>작은</a:t>
+            </a:r>
+            <a:r>
+              <a:rPr sz="975" b="0" i="0" u="none" dirty="0">
+                <a:solidFill>
+                  <a:srgbClr val="55665A"/>
+                </a:solidFill>
+                <a:latin typeface="Noto Sans KR"/>
+              </a:rPr>
+              <a:t> </a:t>
+            </a:r>
+            <a:r>
+              <a:rPr sz="975" b="0" i="0" u="none" dirty="0" err="1">
+                <a:solidFill>
+                  <a:srgbClr val="55665A"/>
+                </a:solidFill>
+                <a:latin typeface="Noto Sans KR"/>
+              </a:rPr>
+              <a:t>휴대폰으로</a:t>
+            </a:r>
+            <a:r>
+              <a:rPr sz="975" b="0" i="0" u="none" dirty="0">
+                <a:solidFill>
+                  <a:srgbClr val="55665A"/>
+                </a:solidFill>
+                <a:latin typeface="Noto Sans KR"/>
+              </a:rPr>
+              <a:t> </a:t>
+            </a:r>
+            <a:r>
+              <a:rPr sz="975" b="0" i="0" u="none" dirty="0" err="1">
+                <a:solidFill>
+                  <a:srgbClr val="55665A"/>
+                </a:solidFill>
+                <a:latin typeface="Noto Sans KR"/>
+              </a:rPr>
+              <a:t>보면</a:t>
+            </a:r>
+            <a:r>
+              <a:rPr sz="975" b="0" i="0" u="none" dirty="0">
+                <a:solidFill>
+                  <a:srgbClr val="55665A"/>
+                </a:solidFill>
+                <a:latin typeface="Noto Sans KR"/>
+              </a:rPr>
+              <a:t> </a:t>
+            </a:r>
+            <a:r>
+              <a:rPr sz="975" b="0" i="0" u="none" dirty="0" err="1">
+                <a:solidFill>
+                  <a:srgbClr val="55665A"/>
+                </a:solidFill>
+                <a:latin typeface="Noto Sans KR"/>
+              </a:rPr>
+              <a:t>복잡했던</a:t>
+            </a:r>
+            <a:r>
+              <a:rPr sz="975" b="0" i="0" u="none" dirty="0">
+                <a:solidFill>
+                  <a:srgbClr val="55665A"/>
+                </a:solidFill>
+                <a:latin typeface="Noto Sans KR"/>
+              </a:rPr>
+              <a:t> </a:t>
+            </a:r>
+            <a:r>
+              <a:rPr sz="975" b="0" i="0" u="none" dirty="0" err="1">
+                <a:solidFill>
+                  <a:srgbClr val="55665A"/>
+                </a:solidFill>
+                <a:latin typeface="Noto Sans KR"/>
+              </a:rPr>
+              <a:t>카드</a:t>
+            </a:r>
+            <a:r>
+              <a:rPr sz="975" b="0" i="0" u="none" dirty="0">
+                <a:solidFill>
+                  <a:srgbClr val="55665A"/>
+                </a:solidFill>
+                <a:latin typeface="Noto Sans KR"/>
+              </a:rPr>
+              <a:t> </a:t>
+            </a:r>
+            <a:r>
+              <a:rPr sz="975" b="0" i="0" u="none" dirty="0" err="1">
+                <a:solidFill>
+                  <a:srgbClr val="55665A"/>
+                </a:solidFill>
+                <a:latin typeface="Noto Sans KR"/>
+              </a:rPr>
+              <a:t>모양</a:t>
+            </a:r>
+            <a:r>
+              <a:rPr sz="975" b="0" i="0" u="none" dirty="0">
+                <a:solidFill>
+                  <a:srgbClr val="55665A"/>
+                </a:solidFill>
+                <a:latin typeface="Noto Sans KR"/>
+              </a:rPr>
+              <a:t> </a:t>
+            </a:r>
+            <a:r>
+              <a:rPr sz="975" b="0" i="0" u="none" dirty="0" err="1">
+                <a:solidFill>
+                  <a:srgbClr val="55665A"/>
+                </a:solidFill>
+                <a:latin typeface="Noto Sans KR"/>
+              </a:rPr>
+              <a:t>가로</a:t>
+            </a:r>
+            <a:r>
+              <a:rPr sz="975" b="0" i="0" u="none" dirty="0">
+                <a:solidFill>
+                  <a:srgbClr val="55665A"/>
+                </a:solidFill>
+                <a:latin typeface="Noto Sans KR"/>
+              </a:rPr>
+              <a:t> </a:t>
+            </a:r>
+            <a:r>
+              <a:rPr sz="975" b="0" i="0" u="none" dirty="0" err="1">
+                <a:solidFill>
+                  <a:srgbClr val="55665A"/>
+                </a:solidFill>
+                <a:latin typeface="Noto Sans KR"/>
+              </a:rPr>
+              <a:t>레이아웃이</a:t>
+            </a:r>
+            <a:r>
+              <a:rPr sz="975" b="0" i="0" u="none" dirty="0">
+                <a:solidFill>
+                  <a:srgbClr val="55665A"/>
+                </a:solidFill>
+                <a:latin typeface="Noto Sans KR"/>
+              </a:rPr>
+              <a:t> </a:t>
+            </a:r>
+            <a:r>
+              <a:rPr sz="975" b="0" i="0" u="none" dirty="0" err="1">
+                <a:solidFill>
+                  <a:srgbClr val="55665A"/>
+                </a:solidFill>
+                <a:latin typeface="Noto Sans KR"/>
+              </a:rPr>
+              <a:t>상하</a:t>
+            </a:r>
+            <a:r>
+              <a:rPr sz="975" b="0" i="0" u="none" dirty="0">
+                <a:solidFill>
+                  <a:srgbClr val="55665A"/>
+                </a:solidFill>
+                <a:latin typeface="Noto Sans KR"/>
+              </a:rPr>
+              <a:t> </a:t>
+            </a:r>
+            <a:r>
+              <a:rPr sz="975" b="0" i="0" u="none" dirty="0" err="1">
+                <a:solidFill>
+                  <a:srgbClr val="55665A"/>
+                </a:solidFill>
+                <a:latin typeface="Noto Sans KR"/>
+              </a:rPr>
+              <a:t>세로로</a:t>
+            </a:r>
+            <a:r>
+              <a:rPr sz="975" b="0" i="0" u="none" dirty="0">
+                <a:solidFill>
+                  <a:srgbClr val="55665A"/>
+                </a:solidFill>
+                <a:latin typeface="Noto Sans KR"/>
+              </a:rPr>
+              <a:t> </a:t>
+            </a:r>
+            <a:r>
+              <a:rPr sz="975" b="0" i="0" u="none" dirty="0" err="1">
+                <a:solidFill>
+                  <a:srgbClr val="55665A"/>
+                </a:solidFill>
+                <a:latin typeface="Noto Sans KR"/>
+              </a:rPr>
+              <a:t>자동</a:t>
+            </a:r>
+            <a:r>
+              <a:rPr sz="975" b="0" i="0" u="none" dirty="0">
+                <a:solidFill>
+                  <a:srgbClr val="55665A"/>
+                </a:solidFill>
+                <a:latin typeface="Noto Sans KR"/>
+              </a:rPr>
+              <a:t> 줄 </a:t>
+            </a:r>
+            <a:r>
+              <a:rPr sz="975" b="0" i="0" u="none" dirty="0" err="1">
+                <a:solidFill>
+                  <a:srgbClr val="55665A"/>
+                </a:solidFill>
+                <a:latin typeface="Noto Sans KR"/>
+              </a:rPr>
+              <a:t>바꿈</a:t>
+            </a:r>
+            <a:r>
+              <a:rPr sz="975" b="0" i="0" u="none" dirty="0">
+                <a:solidFill>
+                  <a:srgbClr val="55665A"/>
+                </a:solidFill>
+                <a:latin typeface="Noto Sans KR"/>
+              </a:rPr>
+              <a:t> </a:t>
+            </a:r>
+            <a:r>
+              <a:rPr sz="975" b="0" i="0" u="none" dirty="0" err="1">
+                <a:solidFill>
+                  <a:srgbClr val="55665A"/>
+                </a:solidFill>
+                <a:latin typeface="Noto Sans KR"/>
+              </a:rPr>
+              <a:t>정렬되는</a:t>
+            </a:r>
+            <a:r>
+              <a:rPr sz="975" b="0" i="0" u="none" dirty="0">
+                <a:solidFill>
+                  <a:srgbClr val="55665A"/>
+                </a:solidFill>
+                <a:latin typeface="Noto Sans KR"/>
+              </a:rPr>
+              <a:t> </a:t>
+            </a:r>
+            <a:r>
+              <a:rPr sz="975" b="0" i="0" u="none" dirty="0" err="1">
+                <a:solidFill>
+                  <a:srgbClr val="55665A"/>
+                </a:solidFill>
+                <a:latin typeface="Noto Sans KR"/>
+              </a:rPr>
+              <a:t>미디어쿼리</a:t>
+            </a:r>
+            <a:r>
+              <a:rPr sz="975" b="0" i="0" u="none" dirty="0">
+                <a:solidFill>
+                  <a:srgbClr val="55665A"/>
+                </a:solidFill>
+                <a:latin typeface="Noto Sans KR"/>
+              </a:rPr>
+              <a:t> </a:t>
+            </a:r>
+            <a:r>
+              <a:rPr sz="975" b="0" i="0" u="none" dirty="0" err="1">
+                <a:solidFill>
+                  <a:srgbClr val="55665A"/>
+                </a:solidFill>
+                <a:latin typeface="Noto Sans KR"/>
+              </a:rPr>
+              <a:t>디자인을</a:t>
+            </a:r>
+            <a:r>
+              <a:rPr sz="975" b="0" i="0" u="none" dirty="0">
+                <a:solidFill>
+                  <a:srgbClr val="55665A"/>
+                </a:solidFill>
+                <a:latin typeface="Noto Sans KR"/>
+              </a:rPr>
+              <a:t> 전 </a:t>
+            </a:r>
+            <a:r>
+              <a:rPr sz="975" b="0" i="0" u="none" dirty="0" err="1">
+                <a:solidFill>
+                  <a:srgbClr val="55665A"/>
+                </a:solidFill>
+                <a:latin typeface="Noto Sans KR"/>
+              </a:rPr>
+              <a:t>기종</a:t>
+            </a:r>
+            <a:r>
+              <a:rPr sz="975" b="0" i="0" u="none" dirty="0">
+                <a:solidFill>
+                  <a:srgbClr val="55665A"/>
+                </a:solidFill>
+                <a:latin typeface="Noto Sans KR"/>
+              </a:rPr>
+              <a:t> </a:t>
+            </a:r>
+            <a:r>
+              <a:rPr sz="975" b="0" i="0" u="none" dirty="0" err="1">
+                <a:solidFill>
+                  <a:srgbClr val="55665A"/>
+                </a:solidFill>
+                <a:latin typeface="Noto Sans KR"/>
+              </a:rPr>
+              <a:t>탑재했습니다</a:t>
+            </a:r>
+            <a:r>
+              <a:rPr sz="975" b="0" i="0" u="none" dirty="0">
+                <a:solidFill>
+                  <a:srgbClr val="55665A"/>
+                </a:solidFill>
+                <a:latin typeface="Noto Sans KR"/>
+              </a:rPr>
+              <a:t>.</a:t>
             </a:r>
           </a:p>
         </p:txBody>
@@ -5716,78 +7009,6 @@
           <a:chExt cx="0" cy="0"/>
         </a:xfrm>
       </p:grpSpPr>
-      <p:pic>
-        <p:nvPicPr>
-          <p:cNvPr id="2" name="Picture 1" descr="image.png"/>
-          <p:cNvPicPr>
-            <a:picLocks noChangeAspect="1"/>
-          </p:cNvPicPr>
-          <p:nvPr/>
-        </p:nvPicPr>
-        <p:blipFill>
-          <a:blip r:embed="rId2"/>
-          <a:stretch>
-            <a:fillRect/>
-          </a:stretch>
-        </p:blipFill>
-        <p:spPr>
-          <a:xfrm>
-            <a:off x="571500" y="962025"/>
-            <a:ext cx="5896719" cy="5467350"/>
-          </a:xfrm>
-          <a:prstGeom prst="rect">
-            <a:avLst/>
-          </a:prstGeom>
-        </p:spPr>
-      </p:pic>
-      <p:pic>
-        <p:nvPicPr>
-          <p:cNvPr id="3" name="Picture 2" descr="image.png"/>
-          <p:cNvPicPr>
-            <a:picLocks noChangeAspect="1"/>
-          </p:cNvPicPr>
-          <p:nvPr/>
-        </p:nvPicPr>
-        <p:blipFill>
-          <a:blip r:embed="rId3"/>
-          <a:stretch>
-            <a:fillRect/>
-          </a:stretch>
-        </p:blipFill>
-        <p:spPr>
-          <a:xfrm>
-            <a:off x="723900" y="1438275"/>
-            <a:ext cx="5591919" cy="333375"/>
-          </a:xfrm>
-          <a:prstGeom prst="rect">
-            <a:avLst/>
-          </a:prstGeom>
-        </p:spPr>
-      </p:pic>
-      <p:pic>
-        <p:nvPicPr>
-          <p:cNvPr id="4" name="Picture 3" descr="image.png"/>
-          <p:cNvPicPr>
-            <a:picLocks noChangeAspect="1"/>
-          </p:cNvPicPr>
-          <p:nvPr/>
-        </p:nvPicPr>
-        <p:blipFill>
-          <a:blip r:embed="rId4"/>
-          <a:stretch>
-            <a:fillRect/>
-          </a:stretch>
-        </p:blipFill>
-        <p:spPr>
-          <a:xfrm>
-            <a:off x="723900" y="1866900"/>
-            <a:ext cx="5591919" cy="876300"/>
-          </a:xfrm>
-          <a:prstGeom prst="rect">
-            <a:avLst/>
-          </a:prstGeom>
-        </p:spPr>
-      </p:pic>
       <p:sp>
         <p:nvSpPr>
           <p:cNvPr id="5" name="TextBox 4"/>
@@ -5816,13 +7037,85 @@
               </a:lnSpc>
             </a:pPr>
             <a:r>
-              <a:rPr sz="2250" b="0" i="0" u="none">
+              <a:rPr sz="2250" b="0" i="0" u="none" dirty="0">
                 <a:solidFill>
                   <a:srgbClr val="0C3C20"/>
                 </a:solidFill>
                 <a:latin typeface="Noto Sans KR ExtraBold"/>
               </a:rPr>
-              <a:t>4. 구현 화면: 메인 홈, 검색 및 CSV 추출 화면</a:t>
+              <a:t>4. </a:t>
+            </a:r>
+            <a:r>
+              <a:rPr sz="2250" b="0" i="0" u="none" dirty="0" err="1">
+                <a:solidFill>
+                  <a:srgbClr val="0C3C20"/>
+                </a:solidFill>
+                <a:latin typeface="Noto Sans KR ExtraBold"/>
+              </a:rPr>
+              <a:t>구현</a:t>
+            </a:r>
+            <a:r>
+              <a:rPr sz="2250" b="0" i="0" u="none" dirty="0">
+                <a:solidFill>
+                  <a:srgbClr val="0C3C20"/>
+                </a:solidFill>
+                <a:latin typeface="Noto Sans KR ExtraBold"/>
+              </a:rPr>
+              <a:t> </a:t>
+            </a:r>
+            <a:r>
+              <a:rPr sz="2250" b="0" i="0" u="none" dirty="0" err="1">
+                <a:solidFill>
+                  <a:srgbClr val="0C3C20"/>
+                </a:solidFill>
+                <a:latin typeface="Noto Sans KR ExtraBold"/>
+              </a:rPr>
+              <a:t>화면</a:t>
+            </a:r>
+            <a:r>
+              <a:rPr sz="2250" b="0" i="0" u="none" dirty="0">
+                <a:solidFill>
+                  <a:srgbClr val="0C3C20"/>
+                </a:solidFill>
+                <a:latin typeface="Noto Sans KR ExtraBold"/>
+              </a:rPr>
+              <a:t>: </a:t>
+            </a:r>
+            <a:r>
+              <a:rPr sz="2250" b="0" i="0" u="none" dirty="0" err="1">
+                <a:solidFill>
+                  <a:srgbClr val="0C3C20"/>
+                </a:solidFill>
+                <a:latin typeface="Noto Sans KR ExtraBold"/>
+              </a:rPr>
+              <a:t>메인</a:t>
+            </a:r>
+            <a:r>
+              <a:rPr sz="2250" b="0" i="0" u="none" dirty="0">
+                <a:solidFill>
+                  <a:srgbClr val="0C3C20"/>
+                </a:solidFill>
+                <a:latin typeface="Noto Sans KR ExtraBold"/>
+              </a:rPr>
+              <a:t> 홈, </a:t>
+            </a:r>
+            <a:r>
+              <a:rPr sz="2250" b="0" i="0" u="none" dirty="0" err="1">
+                <a:solidFill>
+                  <a:srgbClr val="0C3C20"/>
+                </a:solidFill>
+                <a:latin typeface="Noto Sans KR ExtraBold"/>
+              </a:rPr>
+              <a:t>검색</a:t>
+            </a:r>
+            <a:r>
+              <a:rPr sz="2250" b="0" i="0" u="none" dirty="0">
+                <a:solidFill>
+                  <a:srgbClr val="0C3C20"/>
+                </a:solidFill>
+                <a:latin typeface="Noto Sans KR ExtraBold"/>
+              </a:rPr>
+              <a:t> 및</a:t>
             </a:r>
           </a:p>
         </p:txBody>
@@ -5874,50 +7167,6 @@
       </p:sp>
       <p:sp>
         <p:nvSpPr>
-          <p:cNvPr id="7" name="TextBox 6"/>
-          <p:cNvSpPr txBox="1"/>
-          <p:nvPr/>
-        </p:nvSpPr>
-        <p:spPr>
-          <a:xfrm>
-            <a:off x="1416248" y="1114425"/>
-            <a:ext cx="4899570" cy="171450"/>
-          </a:xfrm>
-          <a:prstGeom prst="rect">
-            <a:avLst/>
-          </a:prstGeom>
-          <a:noFill/>
-        </p:spPr>
-        <p:txBody>
-          <a:bodyPr wrap="square" lIns="0" tIns="0" rIns="0" bIns="0" anchor="ctr">
-            <a:spAutoFit/>
-          </a:bodyPr>
-          <a:lstStyle/>
-          <a:p>
-            <a:pPr algn="l"/>
-            <a:r>
-              <a:rPr sz="900" b="1" i="0" u="none">
-                <a:solidFill>
-                  <a:srgbClr val="0C3C20"/>
-                </a:solidFill>
-                <a:latin typeface="Noto Sans KR"/>
-              </a:rPr>
-              <a:t> 캠핑나침반 </a:t>
-            </a:r>
-            <a:r>
-              <a:rPr sz="900" b="1" i="0" u="none">
-                <a:solidFill>
-                  <a:srgbClr val="999999"/>
-                </a:solidFill>
-                <a:latin typeface="Noto Sans KR"/>
-              </a:rPr>
-              <a:t>camping-scrapper.onrender.com</a:t>
-            </a:r>
-          </a:p>
-        </p:txBody>
-      </p:sp>
-      <p:sp>
-        <p:nvSpPr>
           <p:cNvPr id="8" name="Rectangle 7"/>
           <p:cNvSpPr/>
           <p:nvPr/>
@@ -5989,41 +7238,59 @@
               </a:lnSpc>
             </a:pPr>
             <a:r>
-              <a:rPr sz="1350" b="1" i="0" u="none">
+              <a:rPr sz="1350" b="1" i="0" u="none" dirty="0" err="1">
                 <a:solidFill>
                   <a:srgbClr val="0C3C20"/>
                 </a:solidFill>
                 <a:latin typeface="Noto Sans KR"/>
               </a:rPr>
-              <a:t>유기적 뷰 매핑 구성</a:t>
-            </a:r>
-          </a:p>
-        </p:txBody>
-      </p:sp>
-      <p:pic>
-        <p:nvPicPr>
-          <p:cNvPr id="10" name="Picture 9" descr="image.png"/>
-          <p:cNvPicPr>
-            <a:picLocks noChangeAspect="1"/>
-          </p:cNvPicPr>
-          <p:nvPr/>
-        </p:nvPicPr>
-        <p:blipFill>
-          <a:blip r:embed="rId5"/>
-          <a:stretch>
-            <a:fillRect/>
-          </a:stretch>
-        </p:blipFill>
-        <p:spPr>
-          <a:xfrm>
-            <a:off x="828675" y="1971675"/>
-            <a:ext cx="666750" cy="666750"/>
-          </a:xfrm>
-          <a:prstGeom prst="rect">
-            <a:avLst/>
-          </a:prstGeom>
-        </p:spPr>
-      </p:pic>
+              <a:t>유기적</a:t>
+            </a:r>
+            <a:r>
+              <a:rPr sz="1350" b="1" i="0" u="none" dirty="0">
+                <a:solidFill>
+                  <a:srgbClr val="0C3C20"/>
+                </a:solidFill>
+                <a:latin typeface="Noto Sans KR"/>
+              </a:rPr>
+              <a:t> 뷰 </a:t>
+            </a:r>
+            <a:r>
+              <a:rPr sz="1350" b="1" i="0" u="none" dirty="0" err="1">
+                <a:solidFill>
+                  <a:srgbClr val="0C3C20"/>
+                </a:solidFill>
+                <a:latin typeface="Noto Sans KR"/>
+              </a:rPr>
+              <a:t>매핑</a:t>
+            </a:r>
+            <a:r>
+              <a:rPr sz="1350" b="1" i="0" u="none" dirty="0">
+                <a:solidFill>
+                  <a:srgbClr val="0C3C20"/>
+                </a:solidFill>
+                <a:latin typeface="Noto Sans KR"/>
+              </a:rPr>
+              <a:t> </a:t>
+            </a:r>
+            <a:r>
+              <a:rPr sz="1350" b="1" i="0" u="none" dirty="0" err="1">
+                <a:solidFill>
+                  <a:srgbClr val="0C3C20"/>
+                </a:solidFill>
+                <a:latin typeface="Noto Sans KR"/>
+              </a:rPr>
+              <a:t>구성</a:t>
+            </a:r>
+            <a:endParaRPr sz="1350" b="1" i="0" u="none" dirty="0">
+              <a:solidFill>
+                <a:srgbClr val="0C3C20"/>
+              </a:solidFill>
+              <a:latin typeface="Noto Sans KR"/>
+            </a:endParaRPr>
+          </a:p>
+        </p:txBody>
+      </p:sp>
       <p:pic>
         <p:nvPicPr>
           <p:cNvPr id="11" name="Picture 10" descr="image.png"/>
@@ -6033,7 +7300,7 @@
           <p:nvPr/>
         </p:nvPicPr>
         <p:blipFill>
-          <a:blip r:embed="rId6"/>
+          <a:blip r:embed="rId2"/>
           <a:stretch>
             <a:fillRect/>
           </a:stretch>
@@ -6124,23 +7391,308 @@
               </a:lnSpc>
             </a:pPr>
             <a:r>
-              <a:rPr sz="1050" b="1" i="0" u="none">
+              <a:rPr sz="1050" b="1" i="0" u="none" dirty="0">
                 <a:solidFill>
                   <a:srgbClr val="E65F2C"/>
                 </a:solidFill>
                 <a:latin typeface="Noto Sans KR"/>
               </a:rPr>
-              <a:t>● 검색 결과 목록:</a:t>
-            </a:r>
-            <a:r>
-              <a:rPr sz="1050" b="0" i="0" u="none">
-                <a:solidFill>
-                  <a:srgbClr val="2E3B32"/>
-                </a:solidFill>
-                <a:latin typeface="Noto Sans KR"/>
-              </a:rPr>
-              <a:t> 실제 캠핑지 전경 사진, 기상청 주말 요약 기상 정보, 편의 아이콘 일괄 노출</a:t>
-            </a:r>
+              <a:t>● </a:t>
+            </a:r>
+            <a:r>
+              <a:rPr sz="1050" b="1" i="0" u="none" dirty="0" err="1">
+                <a:solidFill>
+                  <a:srgbClr val="E65F2C"/>
+                </a:solidFill>
+                <a:latin typeface="Noto Sans KR"/>
+              </a:rPr>
+              <a:t>검색</a:t>
+            </a:r>
+            <a:r>
+              <a:rPr sz="1050" b="1" i="0" u="none" dirty="0">
+                <a:solidFill>
+                  <a:srgbClr val="E65F2C"/>
+                </a:solidFill>
+                <a:latin typeface="Noto Sans KR"/>
+              </a:rPr>
+              <a:t> </a:t>
+            </a:r>
+            <a:r>
+              <a:rPr sz="1050" b="1" i="0" u="none" dirty="0" err="1">
+                <a:solidFill>
+                  <a:srgbClr val="E65F2C"/>
+                </a:solidFill>
+                <a:latin typeface="Noto Sans KR"/>
+              </a:rPr>
+              <a:t>결과</a:t>
+            </a:r>
+            <a:r>
+              <a:rPr sz="1050" b="1" i="0" u="none" dirty="0">
+                <a:solidFill>
+                  <a:srgbClr val="E65F2C"/>
+                </a:solidFill>
+                <a:latin typeface="Noto Sans KR"/>
+              </a:rPr>
+              <a:t> </a:t>
+            </a:r>
+            <a:r>
+              <a:rPr sz="1050" b="1" i="0" u="none" dirty="0" err="1">
+                <a:solidFill>
+                  <a:srgbClr val="E65F2C"/>
+                </a:solidFill>
+                <a:latin typeface="Noto Sans KR"/>
+              </a:rPr>
+              <a:t>목록</a:t>
+            </a:r>
+            <a:r>
+              <a:rPr sz="1050" b="1" i="0" u="none" dirty="0">
+                <a:solidFill>
+                  <a:srgbClr val="E65F2C"/>
+                </a:solidFill>
+                <a:latin typeface="Noto Sans KR"/>
+              </a:rPr>
+              <a:t>:</a:t>
+            </a:r>
+            <a:r>
+              <a:rPr sz="1050" b="0" i="0" u="none" dirty="0">
+                <a:solidFill>
+                  <a:srgbClr val="2E3B32"/>
+                </a:solidFill>
+                <a:latin typeface="Noto Sans KR"/>
+              </a:rPr>
+              <a:t> </a:t>
+            </a:r>
+            <a:r>
+              <a:rPr sz="1050" b="0" i="0" u="none" dirty="0" err="1">
+                <a:solidFill>
+                  <a:srgbClr val="2E3B32"/>
+                </a:solidFill>
+                <a:latin typeface="Noto Sans KR"/>
+              </a:rPr>
+              <a:t>실제</a:t>
+            </a:r>
+            <a:r>
+              <a:rPr sz="1050" b="0" i="0" u="none" dirty="0">
+                <a:solidFill>
+                  <a:srgbClr val="2E3B32"/>
+                </a:solidFill>
+                <a:latin typeface="Noto Sans KR"/>
+              </a:rPr>
+              <a:t> </a:t>
+            </a:r>
+            <a:r>
+              <a:rPr sz="1050" b="0" i="0" u="none" dirty="0" err="1">
+                <a:solidFill>
+                  <a:srgbClr val="2E3B32"/>
+                </a:solidFill>
+                <a:latin typeface="Noto Sans KR"/>
+              </a:rPr>
+              <a:t>캠핑지</a:t>
+            </a:r>
+            <a:r>
+              <a:rPr sz="1050" b="0" i="0" u="none" dirty="0">
+                <a:solidFill>
+                  <a:srgbClr val="2E3B32"/>
+                </a:solidFill>
+                <a:latin typeface="Noto Sans KR"/>
+              </a:rPr>
+              <a:t> </a:t>
+            </a:r>
+            <a:r>
+              <a:rPr sz="1050" b="0" i="0" u="none" dirty="0" err="1">
+                <a:solidFill>
+                  <a:srgbClr val="2E3B32"/>
+                </a:solidFill>
+                <a:latin typeface="Noto Sans KR"/>
+              </a:rPr>
+              <a:t>전경</a:t>
+            </a:r>
+            <a:r>
+              <a:rPr sz="1050" b="0" i="0" u="none" dirty="0">
+                <a:solidFill>
+                  <a:srgbClr val="2E3B32"/>
+                </a:solidFill>
+                <a:latin typeface="Noto Sans KR"/>
+              </a:rPr>
+              <a:t> </a:t>
+            </a:r>
+            <a:r>
+              <a:rPr sz="1050" b="0" i="0" u="none" dirty="0" err="1">
+                <a:solidFill>
+                  <a:srgbClr val="2E3B32"/>
+                </a:solidFill>
+                <a:latin typeface="Noto Sans KR"/>
+              </a:rPr>
+              <a:t>사진</a:t>
+            </a:r>
+            <a:r>
+              <a:rPr sz="1050" b="0" i="0" u="none" dirty="0">
+                <a:solidFill>
+                  <a:srgbClr val="2E3B32"/>
+                </a:solidFill>
+                <a:latin typeface="Noto Sans KR"/>
+              </a:rPr>
+              <a:t>, </a:t>
+            </a:r>
+            <a:r>
+              <a:rPr sz="1050" b="0" i="0" u="none" dirty="0" err="1">
+                <a:solidFill>
+                  <a:srgbClr val="2E3B32"/>
+                </a:solidFill>
+                <a:latin typeface="Noto Sans KR"/>
+              </a:rPr>
+              <a:t>기상청</a:t>
+            </a:r>
+            <a:r>
+              <a:rPr sz="1050" b="0" i="0" u="none" dirty="0">
+                <a:solidFill>
+                  <a:srgbClr val="2E3B32"/>
+                </a:solidFill>
+                <a:latin typeface="Noto Sans KR"/>
+              </a:rPr>
+              <a:t> </a:t>
+            </a:r>
+            <a:r>
+              <a:rPr sz="1050" b="0" i="0" u="none" dirty="0" err="1">
+                <a:solidFill>
+                  <a:srgbClr val="2E3B32"/>
+                </a:solidFill>
+                <a:latin typeface="Noto Sans KR"/>
+              </a:rPr>
+              <a:t>주말</a:t>
+            </a:r>
+            <a:r>
+              <a:rPr sz="1050" b="0" i="0" u="none" dirty="0">
+                <a:solidFill>
+                  <a:srgbClr val="2E3B32"/>
+                </a:solidFill>
+                <a:latin typeface="Noto Sans KR"/>
+              </a:rPr>
+              <a:t> </a:t>
+            </a:r>
+            <a:r>
+              <a:rPr sz="1050" b="0" i="0" u="none" dirty="0" err="1">
+                <a:solidFill>
+                  <a:srgbClr val="2E3B32"/>
+                </a:solidFill>
+                <a:latin typeface="Noto Sans KR"/>
+              </a:rPr>
+              <a:t>요약</a:t>
+            </a:r>
+            <a:r>
+              <a:rPr sz="1050" b="0" i="0" u="none" dirty="0">
+                <a:solidFill>
+                  <a:srgbClr val="2E3B32"/>
+                </a:solidFill>
+                <a:latin typeface="Noto Sans KR"/>
+              </a:rPr>
+              <a:t> </a:t>
+            </a:r>
+            <a:r>
+              <a:rPr sz="1050" b="0" i="0" u="none" dirty="0" err="1">
+                <a:solidFill>
+                  <a:srgbClr val="2E3B32"/>
+                </a:solidFill>
+                <a:latin typeface="Noto Sans KR"/>
+              </a:rPr>
+              <a:t>기상</a:t>
+            </a:r>
+            <a:r>
+              <a:rPr sz="1050" b="0" i="0" u="none" dirty="0">
+                <a:solidFill>
+                  <a:srgbClr val="2E3B32"/>
+                </a:solidFill>
+                <a:latin typeface="Noto Sans KR"/>
+              </a:rPr>
+              <a:t> </a:t>
+            </a:r>
+            <a:r>
+              <a:rPr sz="1050" b="0" i="0" u="none" dirty="0" err="1">
+                <a:solidFill>
+                  <a:srgbClr val="2E3B32"/>
+                </a:solidFill>
+                <a:latin typeface="Noto Sans KR"/>
+              </a:rPr>
+              <a:t>정보</a:t>
+            </a:r>
+            <a:r>
+              <a:rPr sz="1050" b="0" i="0" u="none" dirty="0">
+                <a:solidFill>
+                  <a:srgbClr val="2E3B32"/>
+                </a:solidFill>
+                <a:latin typeface="Noto Sans KR"/>
+              </a:rPr>
+              <a:t>, </a:t>
+            </a:r>
+            <a:r>
+              <a:rPr sz="1050" b="0" i="0" u="none" dirty="0" err="1">
+                <a:solidFill>
+                  <a:srgbClr val="2E3B32"/>
+                </a:solidFill>
+                <a:latin typeface="Noto Sans KR"/>
+              </a:rPr>
+              <a:t>편의</a:t>
+            </a:r>
+            <a:r>
+              <a:rPr sz="1050" b="0" i="0" u="none" dirty="0">
+                <a:solidFill>
+                  <a:srgbClr val="2E3B32"/>
+                </a:solidFill>
+                <a:latin typeface="Noto Sans KR"/>
+              </a:rPr>
+              <a:t> </a:t>
+            </a:r>
+            <a:r>
+              <a:rPr sz="1050" b="0" i="0" u="none" dirty="0" err="1">
+                <a:solidFill>
+                  <a:srgbClr val="2E3B32"/>
+                </a:solidFill>
+                <a:latin typeface="Noto Sans KR"/>
+              </a:rPr>
+              <a:t>아이콘</a:t>
+            </a:r>
+            <a:r>
+              <a:rPr sz="1050" b="0" i="0" u="none" dirty="0">
+                <a:solidFill>
+                  <a:srgbClr val="2E3B32"/>
+                </a:solidFill>
+                <a:latin typeface="Noto Sans KR"/>
+              </a:rPr>
+              <a:t> </a:t>
+            </a:r>
+            <a:r>
+              <a:rPr sz="1050" b="0" i="0" u="none" dirty="0" err="1">
+                <a:solidFill>
+                  <a:srgbClr val="2E3B32"/>
+                </a:solidFill>
+                <a:latin typeface="Noto Sans KR"/>
+              </a:rPr>
+              <a:t>일괄</a:t>
+            </a:r>
+            <a:r>
+              <a:rPr sz="1050" b="0" i="0" u="none" dirty="0">
+                <a:solidFill>
+                  <a:srgbClr val="2E3B32"/>
+                </a:solidFill>
+                <a:latin typeface="Noto Sans KR"/>
+              </a:rPr>
+              <a:t> </a:t>
+            </a:r>
+            <a:r>
+              <a:rPr sz="1050" b="0" i="0" u="none" dirty="0" err="1">
+                <a:solidFill>
+                  <a:srgbClr val="2E3B32"/>
+                </a:solidFill>
+                <a:latin typeface="Noto Sans KR"/>
+              </a:rPr>
+              <a:t>노출</a:t>
+            </a:r>
+            <a:endParaRPr sz="1050" b="0" i="0" u="none" dirty="0">
+              <a:solidFill>
+                <a:srgbClr val="2E3B32"/>
+              </a:solidFill>
+              <a:latin typeface="Noto Sans KR"/>
+            </a:endParaRPr>
           </a:p>
         </p:txBody>
       </p:sp>
@@ -6192,196 +7744,6 @@
           </a:p>
         </p:txBody>
       </p:sp>
-      <p:pic>
-        <p:nvPicPr>
-          <p:cNvPr id="15" name="Picture 14" descr="image.png"/>
-          <p:cNvPicPr>
-            <a:picLocks noChangeAspect="1"/>
-          </p:cNvPicPr>
-          <p:nvPr/>
-        </p:nvPicPr>
-        <p:blipFill>
-          <a:blip r:embed="rId7"/>
-          <a:stretch>
-            <a:fillRect/>
-          </a:stretch>
-        </p:blipFill>
-        <p:spPr>
-          <a:xfrm>
-            <a:off x="723900" y="1133475"/>
-            <a:ext cx="88999" cy="114300"/>
-          </a:xfrm>
-          <a:prstGeom prst="rect">
-            <a:avLst/>
-          </a:prstGeom>
-        </p:spPr>
-      </p:pic>
-      <p:pic>
-        <p:nvPicPr>
-          <p:cNvPr id="16" name="Picture 15" descr="image.png"/>
-          <p:cNvPicPr>
-            <a:picLocks noChangeAspect="1"/>
-          </p:cNvPicPr>
-          <p:nvPr/>
-        </p:nvPicPr>
-        <p:blipFill>
-          <a:blip r:embed="rId8"/>
-          <a:stretch>
-            <a:fillRect/>
-          </a:stretch>
-        </p:blipFill>
-        <p:spPr>
-          <a:xfrm>
-            <a:off x="1102667" y="2228850"/>
-            <a:ext cx="118616" cy="152400"/>
-          </a:xfrm>
-          <a:prstGeom prst="rect">
-            <a:avLst/>
-          </a:prstGeom>
-        </p:spPr>
-      </p:pic>
-      <p:sp>
-        <p:nvSpPr>
-          <p:cNvPr id="17" name="TextBox 16"/>
-          <p:cNvSpPr txBox="1"/>
-          <p:nvPr/>
-        </p:nvSpPr>
-        <p:spPr>
-          <a:xfrm>
-            <a:off x="1590675" y="2005012"/>
-            <a:ext cx="1910506" cy="161925"/>
-          </a:xfrm>
-          <a:prstGeom prst="rect">
-            <a:avLst/>
-          </a:prstGeom>
-          <a:noFill/>
-        </p:spPr>
-        <p:txBody>
-          <a:bodyPr wrap="square" lIns="0" tIns="0" rIns="0" bIns="0" anchor="t">
-            <a:spAutoFit/>
-          </a:bodyPr>
-          <a:lstStyle/>
-          <a:p>
-            <a:pPr algn="l"/>
-            <a:r>
-              <a:rPr sz="900" b="1" i="0" u="none" dirty="0">
-                <a:solidFill>
-                  <a:srgbClr val="0C3C20"/>
-                </a:solidFill>
-                <a:latin typeface="Noto Sans KR"/>
-              </a:rPr>
-              <a:t>⛺ </a:t>
-            </a:r>
-            <a:r>
-              <a:rPr sz="900" b="1" i="0" u="none" dirty="0" err="1">
-                <a:solidFill>
-                  <a:srgbClr val="0C3C20"/>
-                </a:solidFill>
-                <a:latin typeface="Noto Sans KR"/>
-              </a:rPr>
-              <a:t>별빛솔밭</a:t>
-            </a:r>
-            <a:r>
-              <a:rPr sz="900" b="1" i="0" u="none" dirty="0">
-                <a:solidFill>
-                  <a:srgbClr val="0C3C20"/>
-                </a:solidFill>
-                <a:latin typeface="Noto Sans KR"/>
-              </a:rPr>
-              <a:t> </a:t>
-            </a:r>
-            <a:r>
-              <a:rPr sz="900" b="1" i="0" u="none" dirty="0" err="1">
-                <a:solidFill>
-                  <a:srgbClr val="0C3C20"/>
-                </a:solidFill>
-                <a:latin typeface="Noto Sans KR"/>
-              </a:rPr>
-              <a:t>오토캠핑장</a:t>
-            </a:r>
-            <a:r>
-              <a:rPr sz="900" b="1" i="0" u="none" dirty="0">
-                <a:solidFill>
-                  <a:srgbClr val="0C3C20"/>
-                </a:solidFill>
-                <a:latin typeface="Noto Sans KR"/>
-              </a:rPr>
-              <a:t> (</a:t>
-            </a:r>
-            <a:r>
-              <a:rPr sz="900" b="1" i="0" u="none" dirty="0" err="1">
-                <a:solidFill>
-                  <a:srgbClr val="0C3C20"/>
-                </a:solidFill>
-                <a:latin typeface="Noto Sans KR"/>
-              </a:rPr>
-              <a:t>강원</a:t>
-            </a:r>
-            <a:r>
-              <a:rPr sz="900" b="1" i="0" u="none" dirty="0">
-                <a:solidFill>
-                  <a:srgbClr val="0C3C20"/>
-                </a:solidFill>
-                <a:latin typeface="Noto Sans KR"/>
-              </a:rPr>
-              <a:t> </a:t>
-            </a:r>
-            <a:r>
-              <a:rPr sz="900" b="1" i="0" u="none" dirty="0" err="1">
-                <a:solidFill>
-                  <a:srgbClr val="0C3C20"/>
-                </a:solidFill>
-                <a:latin typeface="Noto Sans KR"/>
-              </a:rPr>
-              <a:t>원주</a:t>
-            </a:r>
-            <a:r>
-              <a:rPr sz="900" b="1" i="0" u="none" dirty="0">
-                <a:solidFill>
-                  <a:srgbClr val="0C3C20"/>
-                </a:solidFill>
-                <a:latin typeface="Noto Sans KR"/>
-              </a:rPr>
-              <a:t>)</a:t>
-            </a:r>
-          </a:p>
-        </p:txBody>
-      </p:sp>
-      <p:sp>
-        <p:nvSpPr>
-          <p:cNvPr id="18" name="TextBox 17"/>
-          <p:cNvSpPr txBox="1"/>
-          <p:nvPr/>
-        </p:nvSpPr>
-        <p:spPr>
-          <a:xfrm>
-            <a:off x="1683079" y="2205037"/>
-            <a:ext cx="1910506" cy="133350"/>
-          </a:xfrm>
-          <a:prstGeom prst="rect">
-            <a:avLst/>
-          </a:prstGeom>
-          <a:noFill/>
-        </p:spPr>
-        <p:txBody>
-          <a:bodyPr wrap="square" lIns="74116" tIns="0" rIns="0" bIns="0" anchor="t">
-            <a:spAutoFit/>
-          </a:bodyPr>
-          <a:lstStyle/>
-          <a:p>
-            <a:pPr algn="l"/>
-            <a:r>
-              <a:rPr sz="750" b="0" i="0" u="none">
-                <a:solidFill>
-                  <a:srgbClr val="55665A"/>
-                </a:solidFill>
-                <a:latin typeface="Noto Sans KR"/>
-              </a:rPr>
-              <a:t>내 출발지 ➔ 마트 ➔ 캠핑장 (약 52분 소요)</a:t>
-            </a:r>
-          </a:p>
-        </p:txBody>
-      </p:sp>
       <p:sp>
         <p:nvSpPr>
           <p:cNvPr id="19" name="TextBox 18"/>
@@ -6501,94 +7863,28 @@
       </p:sp>
       <p:pic>
         <p:nvPicPr>
-          <p:cNvPr id="22" name="Picture 21" descr="image.png"/>
+          <p:cNvPr id="29" name="그림 28" descr="The image is a web page with a search result for campgrounds in Gunwi County, South Korea, including details like location, contact number, amenities, and weather forecast for a weekend.&#10;&#10;AI 생성 콘텐츠는 정확하지 않을 수 있습니다.">
+            <a:extLst>
+              <a:ext uri="{FF2B5EF4-FFF2-40B4-BE49-F238E27FC236}">
+                <a16:creationId xmlns:a16="http://schemas.microsoft.com/office/drawing/2014/main" id="{24A3EB2C-DB8B-62E6-654F-B3E93F14B80B}"/>
+              </a:ext>
+            </a:extLst>
+          </p:cNvPr>
           <p:cNvPicPr>
             <a:picLocks noChangeAspect="1"/>
           </p:cNvPicPr>
           <p:nvPr/>
         </p:nvPicPr>
         <p:blipFill>
-          <a:blip r:embed="rId9"/>
+          <a:blip r:embed="rId3"/>
           <a:stretch>
             <a:fillRect/>
           </a:stretch>
         </p:blipFill>
         <p:spPr>
           <a:xfrm>
-            <a:off x="1590675" y="2224087"/>
-            <a:ext cx="74116" cy="95250"/>
-          </a:xfrm>
-          <a:prstGeom prst="rect">
-            <a:avLst/>
-          </a:prstGeom>
-        </p:spPr>
-      </p:pic>
-      <p:pic>
-        <p:nvPicPr>
-          <p:cNvPr id="23" name="Picture 22" descr="image.png"/>
-          <p:cNvPicPr>
-            <a:picLocks noChangeAspect="1"/>
-          </p:cNvPicPr>
-          <p:nvPr/>
-        </p:nvPicPr>
-        <p:blipFill>
-          <a:blip r:embed="rId10"/>
-          <a:stretch>
-            <a:fillRect/>
-          </a:stretch>
-        </p:blipFill>
-        <p:spPr>
-          <a:xfrm>
-            <a:off x="1590675" y="2414587"/>
-            <a:ext cx="333375" cy="190500"/>
-          </a:xfrm>
-          <a:prstGeom prst="rect">
-            <a:avLst/>
-          </a:prstGeom>
-        </p:spPr>
-      </p:pic>
-      <p:pic>
-        <p:nvPicPr>
-          <p:cNvPr id="24" name="Picture 23" descr="image.png"/>
-          <p:cNvPicPr>
-            <a:picLocks noChangeAspect="1"/>
-          </p:cNvPicPr>
-          <p:nvPr/>
-        </p:nvPicPr>
-        <p:blipFill>
-          <a:blip r:embed="rId11"/>
-          <a:stretch>
-            <a:fillRect/>
-          </a:stretch>
-        </p:blipFill>
-        <p:spPr>
-          <a:xfrm>
-            <a:off x="1962150" y="2414587"/>
-            <a:ext cx="366861" cy="190500"/>
-          </a:xfrm>
-          <a:prstGeom prst="rect">
-            <a:avLst/>
-          </a:prstGeom>
-        </p:spPr>
-      </p:pic>
-      <p:pic>
-        <p:nvPicPr>
-          <p:cNvPr id="25" name="Picture 24" descr="image.png"/>
-          <p:cNvPicPr>
-            <a:picLocks noChangeAspect="1"/>
-          </p:cNvPicPr>
-          <p:nvPr/>
-        </p:nvPicPr>
-        <p:blipFill>
-          <a:blip r:embed="rId12"/>
-          <a:stretch>
-            <a:fillRect/>
-          </a:stretch>
-        </p:blipFill>
-        <p:spPr>
-          <a:xfrm>
-            <a:off x="2367111" y="2414587"/>
-            <a:ext cx="571648" cy="190500"/>
+            <a:off x="600075" y="1431984"/>
+            <a:ext cx="5715744" cy="4476212"/>
           </a:xfrm>
           <a:prstGeom prst="rect">
             <a:avLst/>
@@ -6828,7 +8124,7 @@
         <p:spPr>
           <a:xfrm>
             <a:off x="809625" y="4623262"/>
-            <a:ext cx="10620375" cy="358973"/>
+            <a:ext cx="10620375" cy="164532"/>
           </a:xfrm>
           <a:prstGeom prst="rect">
             <a:avLst/>
@@ -6847,40 +8143,211 @@
               </a:lnSpc>
             </a:pPr>
             <a:r>
-              <a:rPr sz="975" b="1" i="0" u="none">
-                <a:solidFill>
-                  <a:srgbClr val="4A4230"/>
-                </a:solidFill>
-                <a:latin typeface="Noto Sans KR"/>
-              </a:rPr>
-              <a:t>'덜 자주 호출하고, 대표 좌표로 간소화하며, 이미 가져온 정보는 3시간 동안 돌려쓴다!'</a:t>
-            </a:r>
-            <a:r>
-              <a:rPr sz="975" b="0" i="0" u="none">
-                <a:solidFill>
-                  <a:srgbClr val="4A4230"/>
-                </a:solidFill>
-                <a:latin typeface="Noto Sans KR"/>
-              </a:rPr>
-              <a:t>는 자원 절약 사상을 이식하여 기상 호출 트래픽량을 </a:t>
-            </a:r>
-            <a:r>
-              <a:rPr sz="975" b="1" i="0" u="none">
-                <a:solidFill>
-                  <a:srgbClr val="E65F2C"/>
-                </a:solidFill>
-                <a:latin typeface="Noto Sans KR"/>
-              </a:rPr>
-              <a:t>95% 이상 획기적으로 낮춰</a:t>
-            </a:r>
-            <a:r>
-              <a:rPr sz="975" b="0" i="0" u="none">
-                <a:solidFill>
-                  <a:srgbClr val="4A4230"/>
-                </a:solidFill>
-                <a:latin typeface="Noto Sans KR"/>
-              </a:rPr>
-              <a:t> 에러 리스크를 원천 진압했습니다.</a:t>
+              <a:rPr sz="975" b="1" i="0" u="none" dirty="0">
+                <a:solidFill>
+                  <a:srgbClr val="4A4230"/>
+                </a:solidFill>
+                <a:latin typeface="Noto Sans KR"/>
+              </a:rPr>
+              <a:t>'덜 </a:t>
+            </a:r>
+            <a:r>
+              <a:rPr sz="975" b="1" i="0" u="none" dirty="0" err="1">
+                <a:solidFill>
+                  <a:srgbClr val="4A4230"/>
+                </a:solidFill>
+                <a:latin typeface="Noto Sans KR"/>
+              </a:rPr>
+              <a:t>자주</a:t>
+            </a:r>
+            <a:r>
+              <a:rPr sz="975" b="1" i="0" u="none" dirty="0">
+                <a:solidFill>
+                  <a:srgbClr val="4A4230"/>
+                </a:solidFill>
+                <a:latin typeface="Noto Sans KR"/>
+              </a:rPr>
+              <a:t> </a:t>
+            </a:r>
+            <a:r>
+              <a:rPr sz="975" b="1" i="0" u="none" dirty="0" err="1">
+                <a:solidFill>
+                  <a:srgbClr val="4A4230"/>
+                </a:solidFill>
+                <a:latin typeface="Noto Sans KR"/>
+              </a:rPr>
+              <a:t>호출하고</a:t>
+            </a:r>
+            <a:r>
+              <a:rPr sz="975" b="1" i="0" u="none" dirty="0">
+                <a:solidFill>
+                  <a:srgbClr val="4A4230"/>
+                </a:solidFill>
+                <a:latin typeface="Noto Sans KR"/>
+              </a:rPr>
+              <a:t>, </a:t>
+            </a:r>
+            <a:r>
+              <a:rPr sz="975" b="1" i="0" u="none" dirty="0" err="1">
+                <a:solidFill>
+                  <a:srgbClr val="4A4230"/>
+                </a:solidFill>
+                <a:latin typeface="Noto Sans KR"/>
+              </a:rPr>
+              <a:t>대표</a:t>
+            </a:r>
+            <a:r>
+              <a:rPr sz="975" b="1" i="0" u="none" dirty="0">
+                <a:solidFill>
+                  <a:srgbClr val="4A4230"/>
+                </a:solidFill>
+                <a:latin typeface="Noto Sans KR"/>
+              </a:rPr>
+              <a:t> </a:t>
+            </a:r>
+            <a:r>
+              <a:rPr sz="975" b="1" i="0" u="none" dirty="0" err="1">
+                <a:solidFill>
+                  <a:srgbClr val="4A4230"/>
+                </a:solidFill>
+                <a:latin typeface="Noto Sans KR"/>
+              </a:rPr>
+              <a:t>좌표로</a:t>
+            </a:r>
+            <a:r>
+              <a:rPr sz="975" b="1" i="0" u="none" dirty="0">
+                <a:solidFill>
+                  <a:srgbClr val="4A4230"/>
+                </a:solidFill>
+                <a:latin typeface="Noto Sans KR"/>
+              </a:rPr>
+              <a:t> </a:t>
+            </a:r>
+            <a:r>
+              <a:rPr sz="975" b="1" i="0" u="none" dirty="0" err="1">
+                <a:solidFill>
+                  <a:srgbClr val="4A4230"/>
+                </a:solidFill>
+                <a:latin typeface="Noto Sans KR"/>
+              </a:rPr>
+              <a:t>간소화하며</a:t>
+            </a:r>
+            <a:r>
+              <a:rPr sz="975" b="1" i="0" u="none" dirty="0">
+                <a:solidFill>
+                  <a:srgbClr val="4A4230"/>
+                </a:solidFill>
+                <a:latin typeface="Noto Sans KR"/>
+              </a:rPr>
+              <a:t>, </a:t>
+            </a:r>
+            <a:r>
+              <a:rPr sz="975" b="1" i="0" u="none" dirty="0" err="1">
+                <a:solidFill>
+                  <a:srgbClr val="4A4230"/>
+                </a:solidFill>
+                <a:latin typeface="Noto Sans KR"/>
+              </a:rPr>
+              <a:t>이미</a:t>
+            </a:r>
+            <a:r>
+              <a:rPr sz="975" b="1" i="0" u="none" dirty="0">
+                <a:solidFill>
+                  <a:srgbClr val="4A4230"/>
+                </a:solidFill>
+                <a:latin typeface="Noto Sans KR"/>
+              </a:rPr>
+              <a:t> </a:t>
+            </a:r>
+            <a:r>
+              <a:rPr sz="975" b="1" i="0" u="none" dirty="0" err="1">
+                <a:solidFill>
+                  <a:srgbClr val="4A4230"/>
+                </a:solidFill>
+                <a:latin typeface="Noto Sans KR"/>
+              </a:rPr>
+              <a:t>가져온</a:t>
+            </a:r>
+            <a:r>
+              <a:rPr sz="975" b="1" i="0" u="none" dirty="0">
+                <a:solidFill>
+                  <a:srgbClr val="4A4230"/>
+                </a:solidFill>
+                <a:latin typeface="Noto Sans KR"/>
+              </a:rPr>
+              <a:t> </a:t>
+            </a:r>
+            <a:r>
+              <a:rPr sz="975" b="1" i="0" u="none" dirty="0" err="1">
+                <a:solidFill>
+                  <a:srgbClr val="4A4230"/>
+                </a:solidFill>
+                <a:latin typeface="Noto Sans KR"/>
+              </a:rPr>
+              <a:t>정보는</a:t>
+            </a:r>
+            <a:r>
+              <a:rPr sz="975" b="1" i="0" u="none" dirty="0">
+                <a:solidFill>
+                  <a:srgbClr val="4A4230"/>
+                </a:solidFill>
+                <a:latin typeface="Noto Sans KR"/>
+              </a:rPr>
+              <a:t> 3시간 </a:t>
+            </a:r>
+            <a:r>
+              <a:rPr sz="975" b="1" i="0" u="none" dirty="0" err="1">
+                <a:solidFill>
+                  <a:srgbClr val="4A4230"/>
+                </a:solidFill>
+                <a:latin typeface="Noto Sans KR"/>
+              </a:rPr>
+              <a:t>동안</a:t>
+            </a:r>
+            <a:r>
+              <a:rPr sz="975" b="1" i="0" u="none" dirty="0">
+                <a:solidFill>
+                  <a:srgbClr val="4A4230"/>
+                </a:solidFill>
+                <a:latin typeface="Noto Sans KR"/>
+              </a:rPr>
+              <a:t> </a:t>
+            </a:r>
+            <a:r>
+              <a:rPr sz="975" b="1" i="0" u="none" dirty="0" err="1">
+                <a:solidFill>
+                  <a:srgbClr val="4A4230"/>
+                </a:solidFill>
+                <a:latin typeface="Noto Sans KR"/>
+              </a:rPr>
+              <a:t>돌려쓴다</a:t>
+            </a:r>
+            <a:r>
+              <a:rPr sz="975" b="1" i="0" u="none" dirty="0">
+                <a:solidFill>
+                  <a:srgbClr val="4A4230"/>
+                </a:solidFill>
+                <a:latin typeface="Noto Sans KR"/>
+              </a:rPr>
+              <a:t>!＇</a:t>
+            </a:r>
+            <a:r>
+              <a:rPr lang="ko-KR" altLang="en-US" sz="975" dirty="0">
+                <a:solidFill>
+                  <a:srgbClr val="4A4230"/>
+                </a:solidFill>
+                <a:latin typeface="Noto Sans KR"/>
+              </a:rPr>
+              <a:t>라는 것으로서 중복 호출을 차단하여 정해진 한도 내에서 효율적으로 썼음</a:t>
+            </a:r>
+            <a:r>
+              <a:rPr sz="975" b="0" i="0" u="none" dirty="0">
+                <a:solidFill>
+                  <a:srgbClr val="4A4230"/>
+                </a:solidFill>
+                <a:latin typeface="Noto Sans KR"/>
+              </a:rPr>
+              <a:t>.</a:t>
             </a:r>
           </a:p>
         </p:txBody>
@@ -12869,13 +14336,400 @@
               </a:lnSpc>
             </a:pPr>
             <a:r>
-              <a:rPr sz="975" b="0" i="0" u="none">
-                <a:solidFill>
-                  <a:srgbClr val="4A4230"/>
-                </a:solidFill>
-                <a:latin typeface="Noto Sans KR"/>
-              </a:rPr>
-              <a:t>네이버 클라우드는 API 신청 후 클라이언트 ID 및 Secret 발급을 통해 상호 유기적 암호화 전송을 유지하며, Open-Meteo는 별도 키가 필요 없는 완전 개방형 API로 트래픽 유연성을 부여했습니다.</a:t>
+              <a:rPr sz="975" b="0" i="0" u="none" dirty="0" err="1">
+                <a:solidFill>
+                  <a:srgbClr val="4A4230"/>
+                </a:solidFill>
+                <a:latin typeface="Noto Sans KR"/>
+              </a:rPr>
+              <a:t>네이버</a:t>
+            </a:r>
+            <a:r>
+              <a:rPr sz="975" b="0" i="0" u="none" dirty="0">
+                <a:solidFill>
+                  <a:srgbClr val="4A4230"/>
+                </a:solidFill>
+                <a:latin typeface="Noto Sans KR"/>
+              </a:rPr>
+              <a:t> </a:t>
+            </a:r>
+            <a:r>
+              <a:rPr sz="975" b="0" i="0" u="none" dirty="0" err="1">
+                <a:solidFill>
+                  <a:srgbClr val="4A4230"/>
+                </a:solidFill>
+                <a:latin typeface="Noto Sans KR"/>
+              </a:rPr>
+              <a:t>클라우드는</a:t>
+            </a:r>
+            <a:r>
+              <a:rPr sz="975" b="0" i="0" u="none" dirty="0">
+                <a:solidFill>
+                  <a:srgbClr val="4A4230"/>
+                </a:solidFill>
+                <a:latin typeface="Noto Sans KR"/>
+              </a:rPr>
+              <a:t> API </a:t>
+            </a:r>
+            <a:r>
+              <a:rPr sz="975" b="0" i="0" u="none" dirty="0" err="1">
+                <a:solidFill>
+                  <a:srgbClr val="4A4230"/>
+                </a:solidFill>
+                <a:latin typeface="Noto Sans KR"/>
+              </a:rPr>
+              <a:t>신청</a:t>
+            </a:r>
+            <a:r>
+              <a:rPr sz="975" b="0" i="0" u="none" dirty="0">
+                <a:solidFill>
+                  <a:srgbClr val="4A4230"/>
+                </a:solidFill>
+                <a:latin typeface="Noto Sans KR"/>
+              </a:rPr>
+              <a:t> 후 </a:t>
+            </a:r>
+            <a:r>
+              <a:rPr sz="975" b="0" i="0" u="none" dirty="0" err="1">
+                <a:solidFill>
+                  <a:srgbClr val="4A4230"/>
+                </a:solidFill>
+                <a:latin typeface="Noto Sans KR"/>
+              </a:rPr>
+              <a:t>클라이언트</a:t>
+            </a:r>
+            <a:r>
+              <a:rPr sz="975" b="0" i="0" u="none" dirty="0">
+                <a:solidFill>
+                  <a:srgbClr val="4A4230"/>
+                </a:solidFill>
+                <a:latin typeface="Noto Sans KR"/>
+              </a:rPr>
+              <a:t> ID 및 Secret </a:t>
+            </a:r>
+            <a:r>
+              <a:rPr sz="975" b="0" i="0" u="none" dirty="0" err="1">
+                <a:solidFill>
+                  <a:srgbClr val="4A4230"/>
+                </a:solidFill>
+                <a:latin typeface="Noto Sans KR"/>
+              </a:rPr>
+              <a:t>발급을</a:t>
+            </a:r>
+            <a:r>
+              <a:rPr sz="975" b="0" i="0" u="none" dirty="0">
+                <a:solidFill>
+                  <a:srgbClr val="4A4230"/>
+                </a:solidFill>
+                <a:latin typeface="Noto Sans KR"/>
+              </a:rPr>
+              <a:t> </a:t>
+            </a:r>
+            <a:r>
+              <a:rPr sz="975" b="0" i="0" u="none" dirty="0" err="1">
+                <a:solidFill>
+                  <a:srgbClr val="4A4230"/>
+                </a:solidFill>
+                <a:latin typeface="Noto Sans KR"/>
+              </a:rPr>
+              <a:t>통해</a:t>
+            </a:r>
+            <a:r>
+              <a:rPr sz="975" b="0" i="0" u="none" dirty="0">
+                <a:solidFill>
+                  <a:srgbClr val="4A4230"/>
+                </a:solidFill>
+                <a:latin typeface="Noto Sans KR"/>
+              </a:rPr>
+              <a:t> </a:t>
+            </a:r>
+            <a:r>
+              <a:rPr sz="975" b="0" i="0" u="none" dirty="0" err="1">
+                <a:solidFill>
+                  <a:srgbClr val="4A4230"/>
+                </a:solidFill>
+                <a:latin typeface="Noto Sans KR"/>
+              </a:rPr>
+              <a:t>상호</a:t>
+            </a:r>
+            <a:r>
+              <a:rPr sz="975" b="0" i="0" u="none" dirty="0">
+                <a:solidFill>
+                  <a:srgbClr val="4A4230"/>
+                </a:solidFill>
+                <a:latin typeface="Noto Sans KR"/>
+              </a:rPr>
+              <a:t> </a:t>
+            </a:r>
+            <a:r>
+              <a:rPr sz="975" b="0" i="0" u="none" dirty="0" err="1">
+                <a:solidFill>
+                  <a:srgbClr val="4A4230"/>
+                </a:solidFill>
+                <a:latin typeface="Noto Sans KR"/>
+              </a:rPr>
+              <a:t>유기적</a:t>
+            </a:r>
+            <a:r>
+              <a:rPr sz="975" b="0" i="0" u="none" dirty="0">
+                <a:solidFill>
+                  <a:srgbClr val="4A4230"/>
+                </a:solidFill>
+                <a:latin typeface="Noto Sans KR"/>
+              </a:rPr>
+              <a:t> </a:t>
+            </a:r>
+            <a:r>
+              <a:rPr sz="975" b="0" i="0" u="none" dirty="0" err="1">
+                <a:solidFill>
+                  <a:srgbClr val="4A4230"/>
+                </a:solidFill>
+                <a:latin typeface="Noto Sans KR"/>
+              </a:rPr>
+              <a:t>암호화</a:t>
+            </a:r>
+            <a:r>
+              <a:rPr sz="975" b="0" i="0" u="none" dirty="0">
+                <a:solidFill>
+                  <a:srgbClr val="4A4230"/>
+                </a:solidFill>
+                <a:latin typeface="Noto Sans KR"/>
+              </a:rPr>
+              <a:t> </a:t>
+            </a:r>
+            <a:r>
+              <a:rPr sz="975" b="0" i="0" u="none" dirty="0" err="1">
+                <a:solidFill>
+                  <a:srgbClr val="4A4230"/>
+                </a:solidFill>
+                <a:latin typeface="Noto Sans KR"/>
+              </a:rPr>
+              <a:t>전송을</a:t>
+            </a:r>
+            <a:r>
+              <a:rPr sz="975" b="0" i="0" u="none" dirty="0">
+                <a:solidFill>
+                  <a:srgbClr val="4A4230"/>
+                </a:solidFill>
+                <a:latin typeface="Noto Sans KR"/>
+              </a:rPr>
+              <a:t> </a:t>
+            </a:r>
+            <a:r>
+              <a:rPr sz="975" b="0" i="0" u="none" dirty="0" err="1">
+                <a:solidFill>
+                  <a:srgbClr val="4A4230"/>
+                </a:solidFill>
+                <a:latin typeface="Noto Sans KR"/>
+              </a:rPr>
+              <a:t>유지하며</a:t>
+            </a:r>
+            <a:r>
+              <a:rPr sz="975" b="0" i="0" u="none" dirty="0">
+                <a:solidFill>
+                  <a:srgbClr val="4A4230"/>
+                </a:solidFill>
+                <a:latin typeface="Noto Sans KR"/>
+              </a:rPr>
+              <a:t>, Open-</a:t>
+            </a:r>
+            <a:r>
+              <a:rPr sz="975" b="0" i="0" u="none" dirty="0" err="1">
+                <a:solidFill>
+                  <a:srgbClr val="4A4230"/>
+                </a:solidFill>
+                <a:latin typeface="Noto Sans KR"/>
+              </a:rPr>
+              <a:t>Meteo는</a:t>
+            </a:r>
+            <a:r>
+              <a:rPr sz="975" b="0" i="0" u="none" dirty="0">
+                <a:solidFill>
+                  <a:srgbClr val="4A4230"/>
+                </a:solidFill>
+                <a:latin typeface="Noto Sans KR"/>
+              </a:rPr>
+              <a:t> </a:t>
+            </a:r>
+            <a:r>
+              <a:rPr sz="975" b="0" i="0" u="none" dirty="0" err="1">
+                <a:solidFill>
+                  <a:srgbClr val="4A4230"/>
+                </a:solidFill>
+                <a:latin typeface="Noto Sans KR"/>
+              </a:rPr>
+              <a:t>별도</a:t>
+            </a:r>
+            <a:r>
+              <a:rPr sz="975" b="0" i="0" u="none" dirty="0">
+                <a:solidFill>
+                  <a:srgbClr val="4A4230"/>
+                </a:solidFill>
+                <a:latin typeface="Noto Sans KR"/>
+              </a:rPr>
+              <a:t> </a:t>
+            </a:r>
+            <a:r>
+              <a:rPr sz="975" b="0" i="0" u="none" dirty="0" err="1">
+                <a:solidFill>
+                  <a:srgbClr val="4A4230"/>
+                </a:solidFill>
+                <a:latin typeface="Noto Sans KR"/>
+              </a:rPr>
+              <a:t>키가</a:t>
+            </a:r>
+            <a:r>
+              <a:rPr sz="975" b="0" i="0" u="none" dirty="0">
+                <a:solidFill>
+                  <a:srgbClr val="4A4230"/>
+                </a:solidFill>
+                <a:latin typeface="Noto Sans KR"/>
+              </a:rPr>
+              <a:t> </a:t>
+            </a:r>
+            <a:r>
+              <a:rPr sz="975" b="0" i="0" u="none" dirty="0" err="1">
+                <a:solidFill>
+                  <a:srgbClr val="4A4230"/>
+                </a:solidFill>
+                <a:latin typeface="Noto Sans KR"/>
+              </a:rPr>
+              <a:t>필요</a:t>
+            </a:r>
+            <a:r>
+              <a:rPr sz="975" b="0" i="0" u="none" dirty="0">
+                <a:solidFill>
+                  <a:srgbClr val="4A4230"/>
+                </a:solidFill>
+                <a:latin typeface="Noto Sans KR"/>
+              </a:rPr>
+              <a:t> </a:t>
+            </a:r>
+            <a:r>
+              <a:rPr sz="975" b="0" i="0" u="none" dirty="0" err="1">
+                <a:solidFill>
+                  <a:srgbClr val="4A4230"/>
+                </a:solidFill>
+                <a:latin typeface="Noto Sans KR"/>
+              </a:rPr>
+              <a:t>없는</a:t>
+            </a:r>
+            <a:r>
+              <a:rPr sz="975" b="0" i="0" u="none" dirty="0">
+                <a:solidFill>
+                  <a:srgbClr val="4A4230"/>
+                </a:solidFill>
+                <a:latin typeface="Noto Sans KR"/>
+              </a:rPr>
+              <a:t> </a:t>
+            </a:r>
+            <a:r>
+              <a:rPr sz="975" b="0" i="0" u="none" dirty="0" err="1">
+                <a:solidFill>
+                  <a:srgbClr val="4A4230"/>
+                </a:solidFill>
+                <a:latin typeface="Noto Sans KR"/>
+              </a:rPr>
+              <a:t>완전</a:t>
+            </a:r>
+            <a:r>
+              <a:rPr sz="975" b="0" i="0" u="none" dirty="0">
+                <a:solidFill>
+                  <a:srgbClr val="4A4230"/>
+                </a:solidFill>
+                <a:latin typeface="Noto Sans KR"/>
+              </a:rPr>
+              <a:t> </a:t>
+            </a:r>
+            <a:r>
+              <a:rPr sz="975" b="0" i="0" u="none" dirty="0" err="1">
+                <a:solidFill>
+                  <a:srgbClr val="4A4230"/>
+                </a:solidFill>
+                <a:latin typeface="Noto Sans KR"/>
+              </a:rPr>
+              <a:t>개방형</a:t>
+            </a:r>
+            <a:r>
+              <a:rPr sz="975" b="0" i="0" u="none" dirty="0">
+                <a:solidFill>
+                  <a:srgbClr val="4A4230"/>
+                </a:solidFill>
+                <a:latin typeface="Noto Sans KR"/>
+              </a:rPr>
+              <a:t> </a:t>
+            </a:r>
+            <a:r>
+              <a:rPr sz="975" b="0" i="0" u="none" dirty="0" err="1">
+                <a:solidFill>
+                  <a:srgbClr val="4A4230"/>
+                </a:solidFill>
+                <a:latin typeface="Noto Sans KR"/>
+              </a:rPr>
+              <a:t>API로</a:t>
+            </a:r>
+            <a:r>
+              <a:rPr sz="975" b="0" i="0" u="none" dirty="0">
+                <a:solidFill>
+                  <a:srgbClr val="4A4230"/>
+                </a:solidFill>
+                <a:latin typeface="Noto Sans KR"/>
+              </a:rPr>
+              <a:t> </a:t>
+            </a:r>
+            <a:r>
+              <a:rPr sz="975" b="0" i="0" u="none" dirty="0" err="1">
+                <a:solidFill>
+                  <a:srgbClr val="4A4230"/>
+                </a:solidFill>
+                <a:latin typeface="Noto Sans KR"/>
+              </a:rPr>
+              <a:t>트래픽</a:t>
+            </a:r>
+            <a:r>
+              <a:rPr sz="975" b="0" i="0" u="none" dirty="0">
+                <a:solidFill>
+                  <a:srgbClr val="4A4230"/>
+                </a:solidFill>
+                <a:latin typeface="Noto Sans KR"/>
+              </a:rPr>
+              <a:t> </a:t>
+            </a:r>
+            <a:r>
+              <a:rPr sz="975" b="0" i="0" u="none" dirty="0" err="1">
+                <a:solidFill>
+                  <a:srgbClr val="4A4230"/>
+                </a:solidFill>
+                <a:latin typeface="Noto Sans KR"/>
+              </a:rPr>
+              <a:t>유연성을</a:t>
+            </a:r>
+            <a:r>
+              <a:rPr sz="975" b="0" i="0" u="none" dirty="0">
+                <a:solidFill>
+                  <a:srgbClr val="4A4230"/>
+                </a:solidFill>
+                <a:latin typeface="Noto Sans KR"/>
+              </a:rPr>
+              <a:t> </a:t>
+            </a:r>
+            <a:r>
+              <a:rPr sz="975" b="0" i="0" u="none" dirty="0" err="1">
+                <a:solidFill>
+                  <a:srgbClr val="4A4230"/>
+                </a:solidFill>
+                <a:latin typeface="Noto Sans KR"/>
+              </a:rPr>
+              <a:t>부여했습니다</a:t>
+            </a:r>
+            <a:r>
+              <a:rPr sz="975" b="0" i="0" u="none" dirty="0">
+                <a:solidFill>
+                  <a:srgbClr val="4A4230"/>
+                </a:solidFill>
+                <a:latin typeface="Noto Sans KR"/>
+              </a:rPr>
+              <a:t>.</a:t>
             </a:r>
           </a:p>
         </p:txBody>
@@ -12924,7 +14778,7 @@
         <p:spPr>
           <a:xfrm>
             <a:off x="6215062" y="4902398"/>
-            <a:ext cx="5214937" cy="344005"/>
+            <a:ext cx="5214937" cy="164019"/>
           </a:xfrm>
           <a:prstGeom prst="rect">
             <a:avLst/>
@@ -12988,22 +14842,13 @@
               <a:t>데이터</a:t>
             </a:r>
             <a:r>
-              <a:rPr sz="975" b="0" i="0" u="none" dirty="0">
-                <a:solidFill>
-                  <a:srgbClr val="4A4230"/>
-                </a:solidFill>
-                <a:latin typeface="Noto Sans KR"/>
-              </a:rPr>
-              <a:t> </a:t>
-            </a:r>
-            <a:r>
-              <a:rPr sz="975" b="0" i="0" u="none" dirty="0" err="1">
-                <a:solidFill>
-                  <a:srgbClr val="4A4230"/>
-                </a:solidFill>
-                <a:latin typeface="Noto Sans KR"/>
-              </a:rPr>
-              <a:t>파이프라인은</a:t>
+              <a:rPr lang="ko-KR" altLang="en-US" sz="975" dirty="0">
+                <a:solidFill>
+                  <a:srgbClr val="4A4230"/>
+                </a:solidFill>
+                <a:latin typeface="Noto Sans KR"/>
+              </a:rPr>
+              <a:t>는</a:t>
             </a:r>
             <a:r>
               <a:rPr sz="975" b="0" i="0" u="none" dirty="0">
@@ -13612,7 +15457,7 @@
         <p:spPr>
           <a:xfrm>
             <a:off x="809625" y="5927526"/>
-            <a:ext cx="10620375" cy="358973"/>
+            <a:ext cx="10620375" cy="344005"/>
           </a:xfrm>
           <a:prstGeom prst="rect">
             <a:avLst/>
@@ -13631,31 +15476,472 @@
               </a:lnSpc>
             </a:pPr>
             <a:r>
-              <a:rPr sz="975" b="0" i="0" u="none">
-                <a:solidFill>
-                  <a:srgbClr val="4A4230"/>
-                </a:solidFill>
-                <a:latin typeface="Noto Sans KR"/>
-              </a:rPr>
-              <a:t>본 캠핑나침반 프로젝트는 </a:t>
-            </a:r>
-            <a:r>
-              <a:rPr sz="975" b="1" i="0" u="none">
-                <a:solidFill>
-                  <a:srgbClr val="4A4230"/>
-                </a:solidFill>
-                <a:latin typeface="Noto Sans KR"/>
-              </a:rPr>
-              <a:t>100% 검증된 API 통신</a:t>
-            </a:r>
-            <a:r>
-              <a:rPr sz="975" b="0" i="0" u="none">
-                <a:solidFill>
-                  <a:srgbClr val="4A4230"/>
-                </a:solidFill>
-                <a:latin typeface="Noto Sans KR"/>
-              </a:rPr>
-              <a:t>만을 이용합니다. 공공데이터포털 정식 파이프라인을 구축하여 실시간 JSON 형식으로 캠핑장 정보를 수수하므로, 임시 웹페이지 HTML을 무단으로 긁어서 연동 오류를 뿜어내는 '크롤링'은 철저히 배제했습니다.</a:t>
+              <a:rPr sz="975" b="0" i="0" u="none" dirty="0">
+                <a:solidFill>
+                  <a:srgbClr val="4A4230"/>
+                </a:solidFill>
+                <a:latin typeface="Noto Sans KR"/>
+              </a:rPr>
+              <a:t>본 </a:t>
+            </a:r>
+            <a:r>
+              <a:rPr sz="975" b="0" i="0" u="none" dirty="0" err="1">
+                <a:solidFill>
+                  <a:srgbClr val="4A4230"/>
+                </a:solidFill>
+                <a:latin typeface="Noto Sans KR"/>
+              </a:rPr>
+              <a:t>캠핑나침반</a:t>
+            </a:r>
+            <a:r>
+              <a:rPr sz="975" b="0" i="0" u="none" dirty="0">
+                <a:solidFill>
+                  <a:srgbClr val="4A4230"/>
+                </a:solidFill>
+                <a:latin typeface="Noto Sans KR"/>
+              </a:rPr>
+              <a:t> </a:t>
+            </a:r>
+            <a:r>
+              <a:rPr sz="975" b="0" i="0" u="none" dirty="0" err="1">
+                <a:solidFill>
+                  <a:srgbClr val="4A4230"/>
+                </a:solidFill>
+                <a:latin typeface="Noto Sans KR"/>
+              </a:rPr>
+              <a:t>프로젝트는</a:t>
+            </a:r>
+            <a:r>
+              <a:rPr sz="975" b="0" i="0" u="none" dirty="0">
+                <a:solidFill>
+                  <a:srgbClr val="4A4230"/>
+                </a:solidFill>
+                <a:latin typeface="Noto Sans KR"/>
+              </a:rPr>
+              <a:t> </a:t>
+            </a:r>
+            <a:r>
+              <a:rPr sz="975" b="1" i="0" u="none" dirty="0">
+                <a:solidFill>
+                  <a:srgbClr val="4A4230"/>
+                </a:solidFill>
+                <a:latin typeface="Noto Sans KR"/>
+              </a:rPr>
+              <a:t>100% </a:t>
+            </a:r>
+            <a:r>
+              <a:rPr sz="975" b="1" i="0" u="none" dirty="0" err="1">
+                <a:solidFill>
+                  <a:srgbClr val="4A4230"/>
+                </a:solidFill>
+                <a:latin typeface="Noto Sans KR"/>
+              </a:rPr>
+              <a:t>검증된</a:t>
+            </a:r>
+            <a:r>
+              <a:rPr sz="975" b="1" i="0" u="none" dirty="0">
+                <a:solidFill>
+                  <a:srgbClr val="4A4230"/>
+                </a:solidFill>
+                <a:latin typeface="Noto Sans KR"/>
+              </a:rPr>
+              <a:t> API </a:t>
+            </a:r>
+            <a:r>
+              <a:rPr sz="975" b="1" i="0" u="none" dirty="0" err="1">
+                <a:solidFill>
+                  <a:srgbClr val="4A4230"/>
+                </a:solidFill>
+                <a:latin typeface="Noto Sans KR"/>
+              </a:rPr>
+              <a:t>통신</a:t>
+            </a:r>
+            <a:r>
+              <a:rPr sz="975" b="0" i="0" u="none" dirty="0" err="1">
+                <a:solidFill>
+                  <a:srgbClr val="4A4230"/>
+                </a:solidFill>
+                <a:latin typeface="Noto Sans KR"/>
+              </a:rPr>
+              <a:t>만을</a:t>
+            </a:r>
+            <a:r>
+              <a:rPr sz="975" b="0" i="0" u="none" dirty="0">
+                <a:solidFill>
+                  <a:srgbClr val="4A4230"/>
+                </a:solidFill>
+                <a:latin typeface="Noto Sans KR"/>
+              </a:rPr>
+              <a:t> </a:t>
+            </a:r>
+            <a:r>
+              <a:rPr sz="975" b="0" i="0" u="none" dirty="0" err="1">
+                <a:solidFill>
+                  <a:srgbClr val="4A4230"/>
+                </a:solidFill>
+                <a:latin typeface="Noto Sans KR"/>
+              </a:rPr>
+              <a:t>이용합니다</a:t>
+            </a:r>
+            <a:r>
+              <a:rPr sz="975" b="0" i="0" u="none" dirty="0">
+                <a:solidFill>
+                  <a:srgbClr val="4A4230"/>
+                </a:solidFill>
+                <a:latin typeface="Noto Sans KR"/>
+              </a:rPr>
+              <a:t>. </a:t>
+            </a:r>
+            <a:r>
+              <a:rPr sz="975" b="0" i="0" u="none" dirty="0" err="1">
+                <a:solidFill>
+                  <a:srgbClr val="4A4230"/>
+                </a:solidFill>
+                <a:latin typeface="Noto Sans KR"/>
+              </a:rPr>
+              <a:t>공공데이터포털</a:t>
+            </a:r>
+            <a:r>
+              <a:rPr sz="975" b="0" i="0" u="none" dirty="0">
+                <a:solidFill>
+                  <a:srgbClr val="4A4230"/>
+                </a:solidFill>
+                <a:latin typeface="Noto Sans KR"/>
+              </a:rPr>
+              <a:t> </a:t>
+            </a:r>
+            <a:r>
+              <a:rPr sz="975" b="0" i="0" u="none" dirty="0" err="1">
+                <a:solidFill>
+                  <a:srgbClr val="4A4230"/>
+                </a:solidFill>
+                <a:latin typeface="Noto Sans KR"/>
+              </a:rPr>
+              <a:t>정식</a:t>
+            </a:r>
+            <a:r>
+              <a:rPr sz="975" b="0" i="0" u="none" dirty="0">
+                <a:solidFill>
+                  <a:srgbClr val="4A4230"/>
+                </a:solidFill>
+                <a:latin typeface="Noto Sans KR"/>
+              </a:rPr>
+              <a:t> </a:t>
+            </a:r>
+            <a:r>
+              <a:rPr sz="975" b="0" i="0" u="none" dirty="0" err="1">
+                <a:solidFill>
+                  <a:srgbClr val="4A4230"/>
+                </a:solidFill>
+                <a:latin typeface="Noto Sans KR"/>
+              </a:rPr>
+              <a:t>파이프라인을</a:t>
+            </a:r>
+            <a:r>
+              <a:rPr sz="975" b="0" i="0" u="none" dirty="0">
+                <a:solidFill>
+                  <a:srgbClr val="4A4230"/>
+                </a:solidFill>
+                <a:latin typeface="Noto Sans KR"/>
+              </a:rPr>
+              <a:t> </a:t>
+            </a:r>
+            <a:r>
+              <a:rPr sz="975" b="0" i="0" u="none" dirty="0" err="1">
+                <a:solidFill>
+                  <a:srgbClr val="4A4230"/>
+                </a:solidFill>
+                <a:latin typeface="Noto Sans KR"/>
+              </a:rPr>
+              <a:t>구축하여</a:t>
+            </a:r>
+            <a:r>
+              <a:rPr sz="975" b="0" i="0" u="none" dirty="0">
+                <a:solidFill>
+                  <a:srgbClr val="4A4230"/>
+                </a:solidFill>
+                <a:latin typeface="Noto Sans KR"/>
+              </a:rPr>
+              <a:t> </a:t>
+            </a:r>
+            <a:r>
+              <a:rPr sz="975" b="0" i="0" u="none" dirty="0" err="1">
+                <a:solidFill>
+                  <a:srgbClr val="4A4230"/>
+                </a:solidFill>
+                <a:latin typeface="Noto Sans KR"/>
+              </a:rPr>
+              <a:t>실시간</a:t>
+            </a:r>
+            <a:r>
+              <a:rPr sz="975" b="0" i="0" u="none" dirty="0">
+                <a:solidFill>
+                  <a:srgbClr val="4A4230"/>
+                </a:solidFill>
+                <a:latin typeface="Noto Sans KR"/>
+              </a:rPr>
+              <a:t> JSON </a:t>
+            </a:r>
+            <a:r>
+              <a:rPr sz="975" b="0" i="0" u="none" dirty="0" err="1">
+                <a:solidFill>
+                  <a:srgbClr val="4A4230"/>
+                </a:solidFill>
+                <a:latin typeface="Noto Sans KR"/>
+              </a:rPr>
+              <a:t>형식으로</a:t>
+            </a:r>
+            <a:r>
+              <a:rPr sz="975" b="0" i="0" u="none" dirty="0">
+                <a:solidFill>
+                  <a:srgbClr val="4A4230"/>
+                </a:solidFill>
+                <a:latin typeface="Noto Sans KR"/>
+              </a:rPr>
+              <a:t> </a:t>
+            </a:r>
+            <a:r>
+              <a:rPr sz="975" b="0" i="0" u="none" dirty="0" err="1">
+                <a:solidFill>
+                  <a:srgbClr val="4A4230"/>
+                </a:solidFill>
+                <a:latin typeface="Noto Sans KR"/>
+              </a:rPr>
+              <a:t>캠핑장</a:t>
+            </a:r>
+            <a:r>
+              <a:rPr sz="975" b="0" i="0" u="none" dirty="0">
+                <a:solidFill>
+                  <a:srgbClr val="4A4230"/>
+                </a:solidFill>
+                <a:latin typeface="Noto Sans KR"/>
+              </a:rPr>
+              <a:t> </a:t>
+            </a:r>
+            <a:r>
+              <a:rPr sz="975" b="0" i="0" u="none" dirty="0" err="1">
+                <a:solidFill>
+                  <a:srgbClr val="4A4230"/>
+                </a:solidFill>
+                <a:latin typeface="Noto Sans KR"/>
+              </a:rPr>
+              <a:t>정보를</a:t>
+            </a:r>
+            <a:r>
+              <a:rPr sz="975" b="0" i="0" u="none" dirty="0">
+                <a:solidFill>
+                  <a:srgbClr val="4A4230"/>
+                </a:solidFill>
+                <a:latin typeface="Noto Sans KR"/>
+              </a:rPr>
+              <a:t> </a:t>
+            </a:r>
+            <a:r>
+              <a:rPr sz="975" b="0" i="0" u="none" dirty="0" err="1">
+                <a:solidFill>
+                  <a:srgbClr val="4A4230"/>
+                </a:solidFill>
+                <a:latin typeface="Noto Sans KR"/>
+              </a:rPr>
+              <a:t>수수하므로</a:t>
+            </a:r>
+            <a:r>
+              <a:rPr sz="975" b="0" i="0" u="none" dirty="0">
+                <a:solidFill>
+                  <a:srgbClr val="4A4230"/>
+                </a:solidFill>
+                <a:latin typeface="Noto Sans KR"/>
+              </a:rPr>
+              <a:t>, </a:t>
+            </a:r>
+            <a:r>
+              <a:rPr sz="975" b="0" i="0" u="none" dirty="0" err="1">
+                <a:solidFill>
+                  <a:srgbClr val="4A4230"/>
+                </a:solidFill>
+                <a:latin typeface="Noto Sans KR"/>
+              </a:rPr>
+              <a:t>임시</a:t>
+            </a:r>
+            <a:r>
+              <a:rPr sz="975" b="0" i="0" u="none" dirty="0">
+                <a:solidFill>
+                  <a:srgbClr val="4A4230"/>
+                </a:solidFill>
+                <a:latin typeface="Noto Sans KR"/>
+              </a:rPr>
+              <a:t> </a:t>
+            </a:r>
+            <a:r>
+              <a:rPr sz="975" b="0" i="0" u="none" dirty="0" err="1">
+                <a:solidFill>
+                  <a:srgbClr val="4A4230"/>
+                </a:solidFill>
+                <a:latin typeface="Noto Sans KR"/>
+              </a:rPr>
+              <a:t>웹페이지</a:t>
+            </a:r>
+            <a:r>
+              <a:rPr sz="975" b="0" i="0" u="none" dirty="0">
+                <a:solidFill>
+                  <a:srgbClr val="4A4230"/>
+                </a:solidFill>
+                <a:latin typeface="Noto Sans KR"/>
+              </a:rPr>
+              <a:t> </a:t>
+            </a:r>
+            <a:r>
+              <a:rPr sz="975" b="0" i="0" u="none" dirty="0" err="1">
+                <a:solidFill>
+                  <a:srgbClr val="4A4230"/>
+                </a:solidFill>
+                <a:latin typeface="Noto Sans KR"/>
+              </a:rPr>
+              <a:t>HTML을</a:t>
+            </a:r>
+            <a:r>
+              <a:rPr sz="975" b="0" i="0" u="none" dirty="0">
+                <a:solidFill>
+                  <a:srgbClr val="4A4230"/>
+                </a:solidFill>
+                <a:latin typeface="Noto Sans KR"/>
+              </a:rPr>
+              <a:t>  </a:t>
+            </a:r>
+            <a:r>
+              <a:rPr sz="975" b="0" i="0" u="none" dirty="0" err="1">
+                <a:solidFill>
+                  <a:srgbClr val="4A4230"/>
+                </a:solidFill>
+                <a:latin typeface="Noto Sans KR"/>
+              </a:rPr>
+              <a:t>긁어서</a:t>
+            </a:r>
+            <a:r>
+              <a:rPr sz="975" b="0" i="0" u="none" dirty="0">
+                <a:solidFill>
+                  <a:srgbClr val="4A4230"/>
+                </a:solidFill>
+                <a:latin typeface="Noto Sans KR"/>
+              </a:rPr>
+              <a:t> </a:t>
+            </a:r>
+            <a:r>
+              <a:rPr sz="975" b="0" i="0" u="none" dirty="0" err="1">
+                <a:solidFill>
+                  <a:srgbClr val="4A4230"/>
+                </a:solidFill>
+                <a:latin typeface="Noto Sans KR"/>
+              </a:rPr>
+              <a:t>연동</a:t>
+            </a:r>
+            <a:r>
+              <a:rPr sz="975" b="0" i="0" u="none" dirty="0">
+                <a:solidFill>
+                  <a:srgbClr val="4A4230"/>
+                </a:solidFill>
+                <a:latin typeface="Noto Sans KR"/>
+              </a:rPr>
+              <a:t> </a:t>
+            </a:r>
+            <a:r>
+              <a:rPr sz="975" b="0" i="0" u="none" dirty="0" err="1">
+                <a:solidFill>
+                  <a:srgbClr val="4A4230"/>
+                </a:solidFill>
+                <a:latin typeface="Noto Sans KR"/>
+              </a:rPr>
+              <a:t>오류를</a:t>
+            </a:r>
+            <a:r>
+              <a:rPr sz="975" b="0" i="0" u="none" dirty="0">
+                <a:solidFill>
+                  <a:srgbClr val="4A4230"/>
+                </a:solidFill>
+                <a:latin typeface="Noto Sans KR"/>
+              </a:rPr>
+              <a:t> </a:t>
+            </a:r>
+            <a:r>
+              <a:rPr lang="ko-KR" altLang="en-US" sz="975" dirty="0" err="1">
+                <a:solidFill>
+                  <a:srgbClr val="4A4230"/>
+                </a:solidFill>
+                <a:latin typeface="Noto Sans KR"/>
+              </a:rPr>
+              <a:t>발생시킬수</a:t>
+            </a:r>
+            <a:r>
+              <a:rPr lang="ko-KR" altLang="en-US" sz="975" dirty="0">
+                <a:solidFill>
+                  <a:srgbClr val="4A4230"/>
+                </a:solidFill>
+                <a:latin typeface="Noto Sans KR"/>
+              </a:rPr>
+              <a:t> 있는</a:t>
+            </a:r>
+            <a:r>
+              <a:rPr sz="975" b="0" i="0" u="none" dirty="0">
+                <a:solidFill>
+                  <a:srgbClr val="4A4230"/>
+                </a:solidFill>
+                <a:latin typeface="Noto Sans KR"/>
+              </a:rPr>
+              <a:t> '</a:t>
+            </a:r>
+            <a:r>
+              <a:rPr sz="975" b="0" i="0" u="none" dirty="0" err="1">
+                <a:solidFill>
+                  <a:srgbClr val="4A4230"/>
+                </a:solidFill>
+                <a:latin typeface="Noto Sans KR"/>
+              </a:rPr>
+              <a:t>크롤링'은</a:t>
+            </a:r>
+            <a:r>
+              <a:rPr sz="975" b="0" i="0" u="none" dirty="0">
+                <a:solidFill>
+                  <a:srgbClr val="4A4230"/>
+                </a:solidFill>
+                <a:latin typeface="Noto Sans KR"/>
+              </a:rPr>
+              <a:t> </a:t>
+            </a:r>
+            <a:r>
+              <a:rPr sz="975" b="0" i="0" u="none" dirty="0" err="1">
+                <a:solidFill>
+                  <a:srgbClr val="4A4230"/>
+                </a:solidFill>
+                <a:latin typeface="Noto Sans KR"/>
+              </a:rPr>
+              <a:t>철저히</a:t>
+            </a:r>
+            <a:r>
+              <a:rPr sz="975" b="0" i="0" u="none" dirty="0">
+                <a:solidFill>
+                  <a:srgbClr val="4A4230"/>
+                </a:solidFill>
+                <a:latin typeface="Noto Sans KR"/>
+              </a:rPr>
+              <a:t> </a:t>
+            </a:r>
+            <a:r>
+              <a:rPr sz="975" b="0" i="0" u="none" dirty="0" err="1">
+                <a:solidFill>
+                  <a:srgbClr val="4A4230"/>
+                </a:solidFill>
+                <a:latin typeface="Noto Sans KR"/>
+              </a:rPr>
+              <a:t>배제했습니다</a:t>
+            </a:r>
+            <a:r>
+              <a:rPr sz="975" b="0" i="0" u="none" dirty="0">
+                <a:solidFill>
+                  <a:srgbClr val="4A4230"/>
+                </a:solidFill>
+                <a:latin typeface="Noto Sans KR"/>
+              </a:rPr>
+              <a:t>.</a:t>
             </a:r>
           </a:p>
         </p:txBody>
@@ -14942,43 +17228,7 @@
                 </a:solidFill>
                 <a:latin typeface="Noto Sans KR"/>
               </a:rPr>
-              <a:t> 시 </a:t>
-            </a:r>
-            <a:r>
-              <a:rPr sz="1050" b="0" i="0" u="none" dirty="0" err="1">
-                <a:solidFill>
-                  <a:srgbClr val="2E3B32"/>
-                </a:solidFill>
-                <a:latin typeface="Noto Sans KR"/>
-              </a:rPr>
-              <a:t>평생</a:t>
-            </a:r>
-            <a:r>
-              <a:rPr sz="1050" b="0" i="0" u="none" dirty="0">
-                <a:solidFill>
-                  <a:srgbClr val="2E3B32"/>
-                </a:solidFill>
-                <a:latin typeface="Noto Sans KR"/>
-              </a:rPr>
-              <a:t> </a:t>
-            </a:r>
-            <a:r>
-              <a:rPr sz="1050" b="0" i="0" u="none" dirty="0" err="1">
-                <a:solidFill>
-                  <a:srgbClr val="2E3B32"/>
-                </a:solidFill>
-                <a:latin typeface="Noto Sans KR"/>
-              </a:rPr>
-              <a:t>완벽하고</a:t>
-            </a:r>
-            <a:r>
-              <a:rPr sz="1050" b="0" i="0" u="none" dirty="0">
-                <a:solidFill>
-                  <a:srgbClr val="2E3B32"/>
-                </a:solidFill>
-                <a:latin typeface="Noto Sans KR"/>
-              </a:rPr>
-              <a:t> </a:t>
+              <a:t> 시  </a:t>
             </a:r>
             <a:r>
               <a:rPr sz="1050" b="0" i="0" u="none" dirty="0" err="1">
@@ -18282,14 +20532,146 @@
               </a:lnSpc>
             </a:pPr>
             <a:r>
-              <a:rPr sz="2250" b="0" i="0" u="none">
+              <a:rPr sz="2250" b="0" i="0" u="none" dirty="0" err="1">
                 <a:solidFill>
                   <a:srgbClr val="0C3C20"/>
                 </a:solidFill>
                 <a:latin typeface="Noto Sans KR ExtraBold"/>
               </a:rPr>
-              <a:t>핵심 코드 ②: 영어 명칭 번역 사전 및 공백 무시 검색</a:t>
-            </a:r>
+              <a:t>핵심</a:t>
+            </a:r>
+            <a:r>
+              <a:rPr sz="2250" b="0" i="0" u="none" dirty="0">
+                <a:solidFill>
+                  <a:srgbClr val="0C3C20"/>
+                </a:solidFill>
+                <a:latin typeface="Noto Sans KR ExtraBold"/>
+              </a:rPr>
+              <a:t> </a:t>
+            </a:r>
+            <a:r>
+              <a:rPr sz="2250" b="0" i="0" u="none" dirty="0" err="1">
+                <a:solidFill>
+                  <a:srgbClr val="0C3C20"/>
+                </a:solidFill>
+                <a:latin typeface="Noto Sans KR ExtraBold"/>
+              </a:rPr>
+              <a:t>코드</a:t>
+            </a:r>
+            <a:r>
+              <a:rPr sz="2250" b="0" i="0" u="none" dirty="0">
+                <a:solidFill>
+                  <a:srgbClr val="0C3C20"/>
+                </a:solidFill>
+                <a:latin typeface="Noto Sans KR ExtraBold"/>
+              </a:rPr>
+              <a:t> ②: </a:t>
+            </a:r>
+            <a:r>
+              <a:rPr sz="2250" b="0" i="0" u="none" dirty="0" err="1">
+                <a:solidFill>
+                  <a:srgbClr val="0C3C20"/>
+                </a:solidFill>
+                <a:latin typeface="Noto Sans KR ExtraBold"/>
+              </a:rPr>
+              <a:t>영어</a:t>
+            </a:r>
+            <a:r>
+              <a:rPr sz="2250" b="0" i="0" u="none" dirty="0">
+                <a:solidFill>
+                  <a:srgbClr val="0C3C20"/>
+                </a:solidFill>
+                <a:latin typeface="Noto Sans KR ExtraBold"/>
+              </a:rPr>
+              <a:t> </a:t>
+            </a:r>
+            <a:r>
+              <a:rPr sz="2250" b="0" i="0" u="none" dirty="0" err="1">
+                <a:solidFill>
+                  <a:srgbClr val="0C3C20"/>
+                </a:solidFill>
+                <a:latin typeface="Noto Sans KR ExtraBold"/>
+              </a:rPr>
+              <a:t>명칭</a:t>
+            </a:r>
+            <a:r>
+              <a:rPr sz="2250" b="0" i="0" u="none" dirty="0">
+                <a:solidFill>
+                  <a:srgbClr val="0C3C20"/>
+                </a:solidFill>
+                <a:latin typeface="Noto Sans KR ExtraBold"/>
+              </a:rPr>
+              <a:t> </a:t>
+            </a:r>
+            <a:r>
+              <a:rPr sz="2250" b="0" i="0" u="none" dirty="0" err="1">
+                <a:solidFill>
+                  <a:srgbClr val="0C3C20"/>
+                </a:solidFill>
+                <a:latin typeface="Noto Sans KR ExtraBold"/>
+              </a:rPr>
+              <a:t>번역</a:t>
+            </a:r>
+            <a:r>
+              <a:rPr sz="2250" b="0" i="0" u="none" dirty="0">
+                <a:solidFill>
+                  <a:srgbClr val="0C3C20"/>
+                </a:solidFill>
+                <a:latin typeface="Noto Sans KR ExtraBold"/>
+              </a:rPr>
+              <a:t> 및 </a:t>
+            </a:r>
+            <a:r>
+              <a:rPr sz="2250" b="0" i="0" u="none" dirty="0" err="1">
+                <a:solidFill>
+                  <a:srgbClr val="0C3C20"/>
+                </a:solidFill>
+                <a:latin typeface="Noto Sans KR ExtraBold"/>
+              </a:rPr>
+              <a:t>공백</a:t>
+            </a:r>
+            <a:r>
+              <a:rPr sz="2250" b="0" i="0" u="none" dirty="0">
+                <a:solidFill>
+                  <a:srgbClr val="0C3C20"/>
+                </a:solidFill>
+                <a:latin typeface="Noto Sans KR ExtraBold"/>
+              </a:rPr>
+              <a:t> </a:t>
+            </a:r>
+            <a:r>
+              <a:rPr sz="2250" b="0" i="0" u="none" dirty="0" err="1">
+                <a:solidFill>
+                  <a:srgbClr val="0C3C20"/>
+                </a:solidFill>
+                <a:latin typeface="Noto Sans KR ExtraBold"/>
+              </a:rPr>
+              <a:t>무시</a:t>
+            </a:r>
+            <a:r>
+              <a:rPr sz="2250" b="0" i="0" u="none" dirty="0">
+                <a:solidFill>
+                  <a:srgbClr val="0C3C20"/>
+                </a:solidFill>
+                <a:latin typeface="Noto Sans KR ExtraBold"/>
+              </a:rPr>
+              <a:t> </a:t>
+            </a:r>
+            <a:r>
+              <a:rPr sz="2250" b="0" i="0" u="none" dirty="0" err="1">
+                <a:solidFill>
+                  <a:srgbClr val="0C3C20"/>
+                </a:solidFill>
+                <a:latin typeface="Noto Sans KR ExtraBold"/>
+              </a:rPr>
+              <a:t>검색</a:t>
+            </a:r>
+            <a:endParaRPr sz="2250" b="0" i="0" u="none" dirty="0">
+              <a:solidFill>
+                <a:srgbClr val="0C3C20"/>
+              </a:solidFill>
+              <a:latin typeface="Noto Sans KR ExtraBold"/>
+            </a:endParaRPr>
           </a:p>
         </p:txBody>
       </p:sp>
@@ -18386,7 +20768,7 @@
         <p:spPr>
           <a:xfrm>
             <a:off x="6459438" y="1436340"/>
-            <a:ext cx="4961036" cy="588168"/>
+            <a:ext cx="4961036" cy="367601"/>
           </a:xfrm>
           <a:prstGeom prst="rect">
             <a:avLst/>
@@ -18405,14 +20787,326 @@
               </a:lnSpc>
             </a:pPr>
             <a:r>
-              <a:rPr sz="1012" b="0" i="0" u="none">
+              <a:rPr sz="1012" b="0" i="0" u="none" dirty="0" err="1">
                 <a:solidFill>
                   <a:srgbClr val="55665A"/>
                 </a:solidFill>
                 <a:latin typeface="Noto Sans KR"/>
               </a:rPr>
-              <a:t>공공 API가 제공하는 원형 파일 속 영어 이름 필드(facltNm 등)들을 개발자와 일반인이 쉽게 알아볼 수 있도록 직관적인 한글로 매핑하는 변환 매퍼(FIELD_MAP)를 구현했습니다.</a:t>
-            </a:r>
+              <a:t>공공</a:t>
+            </a:r>
+            <a:r>
+              <a:rPr sz="1012" b="0" i="0" u="none" dirty="0">
+                <a:solidFill>
+                  <a:srgbClr val="55665A"/>
+                </a:solidFill>
+                <a:latin typeface="Noto Sans KR"/>
+              </a:rPr>
+              <a:t> </a:t>
+            </a:r>
+            <a:r>
+              <a:rPr sz="1012" b="0" i="0" u="none" dirty="0" err="1">
+                <a:solidFill>
+                  <a:srgbClr val="55665A"/>
+                </a:solidFill>
+                <a:latin typeface="Noto Sans KR"/>
+              </a:rPr>
+              <a:t>API가</a:t>
+            </a:r>
+            <a:r>
+              <a:rPr sz="1012" b="0" i="0" u="none" dirty="0">
+                <a:solidFill>
+                  <a:srgbClr val="55665A"/>
+                </a:solidFill>
+                <a:latin typeface="Noto Sans KR"/>
+              </a:rPr>
+              <a:t> </a:t>
+            </a:r>
+            <a:r>
+              <a:rPr sz="1012" b="0" i="0" u="none" dirty="0" err="1">
+                <a:solidFill>
+                  <a:srgbClr val="55665A"/>
+                </a:solidFill>
+                <a:latin typeface="Noto Sans KR"/>
+              </a:rPr>
+              <a:t>제공하는</a:t>
+            </a:r>
+            <a:r>
+              <a:rPr sz="1012" b="0" i="0" u="none" dirty="0">
+                <a:solidFill>
+                  <a:srgbClr val="55665A"/>
+                </a:solidFill>
+                <a:latin typeface="Noto Sans KR"/>
+              </a:rPr>
+              <a:t> </a:t>
+            </a:r>
+            <a:r>
+              <a:rPr sz="1012" b="0" i="0" u="none" dirty="0" err="1">
+                <a:solidFill>
+                  <a:srgbClr val="55665A"/>
+                </a:solidFill>
+                <a:latin typeface="Noto Sans KR"/>
+              </a:rPr>
+              <a:t>원형</a:t>
+            </a:r>
+            <a:r>
+              <a:rPr sz="1012" b="0" i="0" u="none" dirty="0">
+                <a:solidFill>
+                  <a:srgbClr val="55665A"/>
+                </a:solidFill>
+                <a:latin typeface="Noto Sans KR"/>
+              </a:rPr>
+              <a:t> </a:t>
+            </a:r>
+            <a:r>
+              <a:rPr sz="1012" b="0" i="0" u="none" dirty="0" err="1">
+                <a:solidFill>
+                  <a:srgbClr val="55665A"/>
+                </a:solidFill>
+                <a:latin typeface="Noto Sans KR"/>
+              </a:rPr>
+              <a:t>파일</a:t>
+            </a:r>
+            <a:r>
+              <a:rPr sz="1012" b="0" i="0" u="none" dirty="0">
+                <a:solidFill>
+                  <a:srgbClr val="55665A"/>
+                </a:solidFill>
+                <a:latin typeface="Noto Sans KR"/>
+              </a:rPr>
+              <a:t> 속 </a:t>
+            </a:r>
+            <a:r>
+              <a:rPr sz="1012" b="0" i="0" u="none" dirty="0" err="1">
+                <a:solidFill>
+                  <a:srgbClr val="55665A"/>
+                </a:solidFill>
+                <a:latin typeface="Noto Sans KR"/>
+              </a:rPr>
+              <a:t>영어</a:t>
+            </a:r>
+            <a:r>
+              <a:rPr sz="1012" b="0" i="0" u="none" dirty="0">
+                <a:solidFill>
+                  <a:srgbClr val="55665A"/>
+                </a:solidFill>
+                <a:latin typeface="Noto Sans KR"/>
+              </a:rPr>
+              <a:t> </a:t>
+            </a:r>
+            <a:r>
+              <a:rPr sz="1012" b="0" i="0" u="none" dirty="0" err="1">
+                <a:solidFill>
+                  <a:srgbClr val="55665A"/>
+                </a:solidFill>
+                <a:latin typeface="Noto Sans KR"/>
+              </a:rPr>
+              <a:t>이름</a:t>
+            </a:r>
+            <a:r>
+              <a:rPr sz="1012" b="0" i="0" u="none" dirty="0">
+                <a:solidFill>
+                  <a:srgbClr val="55665A"/>
+                </a:solidFill>
+                <a:latin typeface="Noto Sans KR"/>
+              </a:rPr>
+              <a:t> </a:t>
+            </a:r>
+            <a:r>
+              <a:rPr sz="1012" b="0" i="0" u="none" dirty="0" err="1">
+                <a:solidFill>
+                  <a:srgbClr val="55665A"/>
+                </a:solidFill>
+                <a:latin typeface="Noto Sans KR"/>
+              </a:rPr>
+              <a:t>필드</a:t>
+            </a:r>
+            <a:r>
+              <a:rPr sz="1012" b="0" i="0" u="none" dirty="0">
+                <a:solidFill>
+                  <a:srgbClr val="55665A"/>
+                </a:solidFill>
+                <a:latin typeface="Noto Sans KR"/>
+              </a:rPr>
+              <a:t>(</a:t>
+            </a:r>
+            <a:r>
+              <a:rPr sz="1012" b="0" i="0" u="none" dirty="0" err="1">
+                <a:solidFill>
+                  <a:srgbClr val="55665A"/>
+                </a:solidFill>
+                <a:latin typeface="Noto Sans KR"/>
+              </a:rPr>
+              <a:t>facltNm</a:t>
+            </a:r>
+            <a:r>
+              <a:rPr sz="1012" b="0" i="0" u="none" dirty="0">
+                <a:solidFill>
+                  <a:srgbClr val="55665A"/>
+                </a:solidFill>
+                <a:latin typeface="Noto Sans KR"/>
+              </a:rPr>
+              <a:t> 등)</a:t>
+            </a:r>
+            <a:r>
+              <a:rPr sz="1012" b="0" i="0" u="none" dirty="0" err="1">
+                <a:solidFill>
+                  <a:srgbClr val="55665A"/>
+                </a:solidFill>
+                <a:latin typeface="Noto Sans KR"/>
+              </a:rPr>
+              <a:t>들을</a:t>
+            </a:r>
+            <a:r>
+              <a:rPr sz="1012" b="0" i="0" u="none" dirty="0">
+                <a:solidFill>
+                  <a:srgbClr val="55665A"/>
+                </a:solidFill>
+                <a:latin typeface="Noto Sans KR"/>
+              </a:rPr>
+              <a:t> </a:t>
+            </a:r>
+            <a:r>
+              <a:rPr sz="1012" b="0" i="0" u="none" dirty="0" err="1">
+                <a:solidFill>
+                  <a:srgbClr val="55665A"/>
+                </a:solidFill>
+                <a:latin typeface="Noto Sans KR"/>
+              </a:rPr>
+              <a:t>개발자와</a:t>
+            </a:r>
+            <a:r>
+              <a:rPr sz="1012" b="0" i="0" u="none" dirty="0">
+                <a:solidFill>
+                  <a:srgbClr val="55665A"/>
+                </a:solidFill>
+                <a:latin typeface="Noto Sans KR"/>
+              </a:rPr>
+              <a:t> </a:t>
+            </a:r>
+            <a:r>
+              <a:rPr sz="1012" b="0" i="0" u="none" dirty="0" err="1">
+                <a:solidFill>
+                  <a:srgbClr val="55665A"/>
+                </a:solidFill>
+                <a:latin typeface="Noto Sans KR"/>
+              </a:rPr>
+              <a:t>일반인이</a:t>
+            </a:r>
+            <a:r>
+              <a:rPr sz="1012" b="0" i="0" u="none" dirty="0">
+                <a:solidFill>
+                  <a:srgbClr val="55665A"/>
+                </a:solidFill>
+                <a:latin typeface="Noto Sans KR"/>
+              </a:rPr>
+              <a:t> </a:t>
+            </a:r>
+            <a:r>
+              <a:rPr sz="1012" b="0" i="0" u="none" dirty="0" err="1">
+                <a:solidFill>
+                  <a:srgbClr val="55665A"/>
+                </a:solidFill>
+                <a:latin typeface="Noto Sans KR"/>
+              </a:rPr>
+              <a:t>쉽게</a:t>
+            </a:r>
+            <a:r>
+              <a:rPr sz="1012" b="0" i="0" u="none" dirty="0">
+                <a:solidFill>
+                  <a:srgbClr val="55665A"/>
+                </a:solidFill>
+                <a:latin typeface="Noto Sans KR"/>
+              </a:rPr>
+              <a:t> </a:t>
+            </a:r>
+            <a:r>
+              <a:rPr sz="1012" b="0" i="0" u="none" dirty="0" err="1">
+                <a:solidFill>
+                  <a:srgbClr val="55665A"/>
+                </a:solidFill>
+                <a:latin typeface="Noto Sans KR"/>
+              </a:rPr>
+              <a:t>알아볼</a:t>
+            </a:r>
+            <a:r>
+              <a:rPr sz="1012" b="0" i="0" u="none" dirty="0">
+                <a:solidFill>
+                  <a:srgbClr val="55665A"/>
+                </a:solidFill>
+                <a:latin typeface="Noto Sans KR"/>
+              </a:rPr>
+              <a:t> 수 </a:t>
+            </a:r>
+            <a:r>
+              <a:rPr sz="1012" b="0" i="0" u="none" dirty="0" err="1">
+                <a:solidFill>
+                  <a:srgbClr val="55665A"/>
+                </a:solidFill>
+                <a:latin typeface="Noto Sans KR"/>
+              </a:rPr>
+              <a:t>있도록</a:t>
+            </a:r>
+            <a:r>
+              <a:rPr sz="1012" b="0" i="0" u="none" dirty="0">
+                <a:solidFill>
+                  <a:srgbClr val="55665A"/>
+                </a:solidFill>
+                <a:latin typeface="Noto Sans KR"/>
+              </a:rPr>
+              <a:t> </a:t>
+            </a:r>
+            <a:r>
+              <a:rPr sz="1012" b="0" i="0" u="none" dirty="0" err="1">
+                <a:solidFill>
+                  <a:srgbClr val="55665A"/>
+                </a:solidFill>
+                <a:latin typeface="Noto Sans KR"/>
+              </a:rPr>
+              <a:t>직관적인</a:t>
+            </a:r>
+            <a:r>
+              <a:rPr sz="1012" b="0" i="0" u="none" dirty="0">
+                <a:solidFill>
+                  <a:srgbClr val="55665A"/>
+                </a:solidFill>
+                <a:latin typeface="Noto Sans KR"/>
+              </a:rPr>
+              <a:t> </a:t>
+            </a:r>
+            <a:r>
+              <a:rPr sz="1012" b="0" i="0" u="none" dirty="0" err="1">
+                <a:solidFill>
+                  <a:srgbClr val="55665A"/>
+                </a:solidFill>
+                <a:latin typeface="Noto Sans KR"/>
+              </a:rPr>
+              <a:t>한글로</a:t>
+            </a:r>
+            <a:r>
+              <a:rPr sz="1012" b="0" i="0" u="none" dirty="0">
+                <a:solidFill>
+                  <a:srgbClr val="55665A"/>
+                </a:solidFill>
+                <a:latin typeface="Noto Sans KR"/>
+              </a:rPr>
+              <a:t> </a:t>
+            </a:r>
+            <a:r>
+              <a:rPr lang="ko-KR" altLang="en-US" sz="1012" dirty="0">
+                <a:solidFill>
+                  <a:srgbClr val="55665A"/>
+                </a:solidFill>
+                <a:latin typeface="Noto Sans KR"/>
+              </a:rPr>
+              <a:t>지정해줬습니다．</a:t>
+            </a:r>
+            <a:endParaRPr sz="1012" b="0" i="0" u="none" dirty="0">
+              <a:solidFill>
+                <a:srgbClr val="55665A"/>
+              </a:solidFill>
+              <a:latin typeface="Noto Sans KR"/>
+            </a:endParaRPr>
           </a:p>
         </p:txBody>
       </p:sp>
@@ -18483,13 +21177,418 @@
               </a:lnSpc>
             </a:pPr>
             <a:r>
-              <a:rPr sz="1012" b="1" i="0" u="none">
-                <a:solidFill>
-                  <a:srgbClr val="4A4230"/>
-                </a:solidFill>
-                <a:latin typeface="Noto Sans KR"/>
-              </a:rPr>
-              <a:t>사용자가 '금호강오토캠핑장'을 '금호강 오토 캠핑장'처럼 무심코 띄어쓰기를 다르게 입력하여 검색이 먹통이 되는 문제를 원천 방어하고자 공백을 미리 양방향 삭제 전처리하고 일치 판별을 내립니다.</a:t>
+              <a:rPr sz="1012" b="1" i="0" u="none" dirty="0" err="1">
+                <a:solidFill>
+                  <a:srgbClr val="4A4230"/>
+                </a:solidFill>
+                <a:latin typeface="Noto Sans KR"/>
+              </a:rPr>
+              <a:t>사용자가</a:t>
+            </a:r>
+            <a:r>
+              <a:rPr sz="1012" b="1" i="0" u="none" dirty="0">
+                <a:solidFill>
+                  <a:srgbClr val="4A4230"/>
+                </a:solidFill>
+                <a:latin typeface="Noto Sans KR"/>
+              </a:rPr>
+              <a:t> '</a:t>
+            </a:r>
+            <a:r>
+              <a:rPr sz="1012" b="1" i="0" u="none" dirty="0" err="1">
+                <a:solidFill>
+                  <a:srgbClr val="4A4230"/>
+                </a:solidFill>
+                <a:latin typeface="Noto Sans KR"/>
+              </a:rPr>
+              <a:t>금호강오토캠핑장'을</a:t>
+            </a:r>
+            <a:r>
+              <a:rPr sz="1012" b="1" i="0" u="none" dirty="0">
+                <a:solidFill>
+                  <a:srgbClr val="4A4230"/>
+                </a:solidFill>
+                <a:latin typeface="Noto Sans KR"/>
+              </a:rPr>
+              <a:t> '</a:t>
+            </a:r>
+            <a:r>
+              <a:rPr sz="1012" b="1" i="0" u="none" dirty="0" err="1">
+                <a:solidFill>
+                  <a:srgbClr val="4A4230"/>
+                </a:solidFill>
+                <a:latin typeface="Noto Sans KR"/>
+              </a:rPr>
+              <a:t>금호강</a:t>
+            </a:r>
+            <a:r>
+              <a:rPr sz="1012" b="1" i="0" u="none" dirty="0">
+                <a:solidFill>
+                  <a:srgbClr val="4A4230"/>
+                </a:solidFill>
+                <a:latin typeface="Noto Sans KR"/>
+              </a:rPr>
+              <a:t> </a:t>
+            </a:r>
+            <a:r>
+              <a:rPr sz="1012" b="1" i="0" u="none" dirty="0" err="1">
+                <a:solidFill>
+                  <a:srgbClr val="4A4230"/>
+                </a:solidFill>
+                <a:latin typeface="Noto Sans KR"/>
+              </a:rPr>
+              <a:t>오토</a:t>
+            </a:r>
+            <a:r>
+              <a:rPr sz="1012" b="1" i="0" u="none" dirty="0">
+                <a:solidFill>
+                  <a:srgbClr val="4A4230"/>
+                </a:solidFill>
+                <a:latin typeface="Noto Sans KR"/>
+              </a:rPr>
+              <a:t> </a:t>
+            </a:r>
+            <a:r>
+              <a:rPr sz="1012" b="1" i="0" u="none" dirty="0" err="1">
+                <a:solidFill>
+                  <a:srgbClr val="4A4230"/>
+                </a:solidFill>
+                <a:latin typeface="Noto Sans KR"/>
+              </a:rPr>
+              <a:t>캠핑장'처럼</a:t>
+            </a:r>
+            <a:r>
+              <a:rPr sz="1012" b="1" i="0" u="none" dirty="0">
+                <a:solidFill>
+                  <a:srgbClr val="4A4230"/>
+                </a:solidFill>
+                <a:latin typeface="Noto Sans KR"/>
+              </a:rPr>
+              <a:t> </a:t>
+            </a:r>
+            <a:r>
+              <a:rPr sz="1012" b="1" i="0" u="none" dirty="0" err="1">
+                <a:solidFill>
+                  <a:srgbClr val="4A4230"/>
+                </a:solidFill>
+                <a:latin typeface="Noto Sans KR"/>
+              </a:rPr>
+              <a:t>무심코</a:t>
+            </a:r>
+            <a:r>
+              <a:rPr sz="1012" b="1" i="0" u="none" dirty="0">
+                <a:solidFill>
+                  <a:srgbClr val="4A4230"/>
+                </a:solidFill>
+                <a:latin typeface="Noto Sans KR"/>
+              </a:rPr>
+              <a:t> </a:t>
+            </a:r>
+            <a:r>
+              <a:rPr sz="1012" b="1" i="0" u="none" dirty="0" err="1">
+                <a:solidFill>
+                  <a:srgbClr val="4A4230"/>
+                </a:solidFill>
+                <a:latin typeface="Noto Sans KR"/>
+              </a:rPr>
+              <a:t>띄어쓰기를</a:t>
+            </a:r>
+            <a:r>
+              <a:rPr sz="1012" b="1" i="0" u="none" dirty="0">
+                <a:solidFill>
+                  <a:srgbClr val="4A4230"/>
+                </a:solidFill>
+                <a:latin typeface="Noto Sans KR"/>
+              </a:rPr>
+              <a:t> </a:t>
+            </a:r>
+            <a:r>
+              <a:rPr sz="1012" b="1" i="0" u="none" dirty="0" err="1">
+                <a:solidFill>
+                  <a:srgbClr val="4A4230"/>
+                </a:solidFill>
+                <a:latin typeface="Noto Sans KR"/>
+              </a:rPr>
+              <a:t>다르게</a:t>
+            </a:r>
+            <a:r>
+              <a:rPr sz="1012" b="1" i="0" u="none" dirty="0">
+                <a:solidFill>
+                  <a:srgbClr val="4A4230"/>
+                </a:solidFill>
+                <a:latin typeface="Noto Sans KR"/>
+              </a:rPr>
+              <a:t> </a:t>
+            </a:r>
+            <a:r>
+              <a:rPr sz="1012" b="1" i="0" u="none" dirty="0" err="1">
+                <a:solidFill>
+                  <a:srgbClr val="4A4230"/>
+                </a:solidFill>
+                <a:latin typeface="Noto Sans KR"/>
+              </a:rPr>
+              <a:t>입력하여</a:t>
+            </a:r>
+            <a:r>
+              <a:rPr sz="1012" b="1" i="0" u="none" dirty="0">
+                <a:solidFill>
+                  <a:srgbClr val="4A4230"/>
+                </a:solidFill>
+                <a:latin typeface="Noto Sans KR"/>
+              </a:rPr>
+              <a:t> </a:t>
+            </a:r>
+            <a:r>
+              <a:rPr sz="1012" b="1" i="0" u="none" dirty="0" err="1">
+                <a:solidFill>
+                  <a:srgbClr val="4A4230"/>
+                </a:solidFill>
+                <a:latin typeface="Noto Sans KR"/>
+              </a:rPr>
+              <a:t>검색이</a:t>
+            </a:r>
+            <a:r>
+              <a:rPr sz="1012" b="1" i="0" u="none" dirty="0">
+                <a:solidFill>
+                  <a:srgbClr val="4A4230"/>
+                </a:solidFill>
+                <a:latin typeface="Noto Sans KR"/>
+              </a:rPr>
+              <a:t> </a:t>
+            </a:r>
+            <a:r>
+              <a:rPr sz="1012" b="1" i="0" u="none" dirty="0" err="1">
+                <a:solidFill>
+                  <a:srgbClr val="4A4230"/>
+                </a:solidFill>
+                <a:latin typeface="Noto Sans KR"/>
+              </a:rPr>
+              <a:t>먹통이</a:t>
+            </a:r>
+            <a:r>
+              <a:rPr sz="1012" b="1" i="0" u="none" dirty="0">
+                <a:solidFill>
+                  <a:srgbClr val="4A4230"/>
+                </a:solidFill>
+                <a:latin typeface="Noto Sans KR"/>
+              </a:rPr>
+              <a:t> </a:t>
+            </a:r>
+            <a:r>
+              <a:rPr sz="1012" b="1" i="0" u="none" dirty="0" err="1">
+                <a:solidFill>
+                  <a:srgbClr val="4A4230"/>
+                </a:solidFill>
+                <a:latin typeface="Noto Sans KR"/>
+              </a:rPr>
+              <a:t>되는</a:t>
+            </a:r>
+            <a:r>
+              <a:rPr sz="1012" b="1" i="0" u="none" dirty="0">
+                <a:solidFill>
+                  <a:srgbClr val="4A4230"/>
+                </a:solidFill>
+                <a:latin typeface="Noto Sans KR"/>
+              </a:rPr>
+              <a:t> </a:t>
+            </a:r>
+            <a:r>
+              <a:rPr sz="1012" b="1" i="0" u="none" dirty="0" err="1">
+                <a:solidFill>
+                  <a:srgbClr val="4A4230"/>
+                </a:solidFill>
+                <a:latin typeface="Noto Sans KR"/>
+              </a:rPr>
+              <a:t>문제를</a:t>
+            </a:r>
+            <a:r>
+              <a:rPr sz="1012" b="1" i="0" u="none" dirty="0">
+                <a:solidFill>
+                  <a:srgbClr val="4A4230"/>
+                </a:solidFill>
+                <a:latin typeface="Noto Sans KR"/>
+              </a:rPr>
+              <a:t> </a:t>
+            </a:r>
+            <a:r>
+              <a:rPr sz="1012" b="1" i="0" u="none" dirty="0" err="1">
+                <a:solidFill>
+                  <a:srgbClr val="4A4230"/>
+                </a:solidFill>
+                <a:latin typeface="Noto Sans KR"/>
+              </a:rPr>
+              <a:t>원천</a:t>
+            </a:r>
+            <a:r>
+              <a:rPr sz="1012" b="1" i="0" u="none" dirty="0">
+                <a:solidFill>
+                  <a:srgbClr val="4A4230"/>
+                </a:solidFill>
+                <a:latin typeface="Noto Sans KR"/>
+              </a:rPr>
+              <a:t> </a:t>
+            </a:r>
+            <a:r>
+              <a:rPr sz="1012" b="1" i="0" u="none" dirty="0" err="1">
+                <a:solidFill>
+                  <a:srgbClr val="4A4230"/>
+                </a:solidFill>
+                <a:latin typeface="Noto Sans KR"/>
+              </a:rPr>
+              <a:t>방어하고자</a:t>
+            </a:r>
+            <a:r>
+              <a:rPr sz="1012" b="1" i="0" u="none" dirty="0">
+                <a:solidFill>
+                  <a:srgbClr val="4A4230"/>
+                </a:solidFill>
+                <a:latin typeface="Noto Sans KR"/>
+              </a:rPr>
+              <a:t> </a:t>
+            </a:r>
+            <a:r>
+              <a:rPr sz="1012" b="1" i="0" u="none" dirty="0" err="1">
+                <a:solidFill>
+                  <a:srgbClr val="4A4230"/>
+                </a:solidFill>
+                <a:latin typeface="Noto Sans KR"/>
+              </a:rPr>
+              <a:t>공백을</a:t>
+            </a:r>
+            <a:r>
+              <a:rPr sz="1012" b="1" i="0" u="none" dirty="0">
+                <a:solidFill>
+                  <a:srgbClr val="4A4230"/>
+                </a:solidFill>
+                <a:latin typeface="Noto Sans KR"/>
+              </a:rPr>
+              <a:t> </a:t>
+            </a:r>
+            <a:r>
+              <a:rPr sz="1012" b="1" i="0" u="none" dirty="0" err="1">
+                <a:solidFill>
+                  <a:srgbClr val="4A4230"/>
+                </a:solidFill>
+                <a:latin typeface="Noto Sans KR"/>
+              </a:rPr>
+              <a:t>미리</a:t>
+            </a:r>
+            <a:r>
+              <a:rPr sz="1012" b="1" i="0" u="none" dirty="0">
+                <a:solidFill>
+                  <a:srgbClr val="4A4230"/>
+                </a:solidFill>
+                <a:latin typeface="Noto Sans KR"/>
+              </a:rPr>
+              <a:t> </a:t>
+            </a:r>
+            <a:r>
+              <a:rPr sz="1012" b="1" i="0" u="none" dirty="0" err="1">
+                <a:solidFill>
+                  <a:srgbClr val="4A4230"/>
+                </a:solidFill>
+                <a:latin typeface="Noto Sans KR"/>
+              </a:rPr>
+              <a:t>양방향</a:t>
+            </a:r>
+            <a:r>
+              <a:rPr sz="1012" b="1" i="0" u="none" dirty="0">
+                <a:solidFill>
+                  <a:srgbClr val="4A4230"/>
+                </a:solidFill>
+                <a:latin typeface="Noto Sans KR"/>
+              </a:rPr>
+              <a:t> </a:t>
+            </a:r>
+            <a:r>
+              <a:rPr sz="1012" b="1" i="0" u="none" dirty="0" err="1">
+                <a:solidFill>
+                  <a:srgbClr val="4A4230"/>
+                </a:solidFill>
+                <a:latin typeface="Noto Sans KR"/>
+              </a:rPr>
+              <a:t>삭제</a:t>
+            </a:r>
+            <a:r>
+              <a:rPr sz="1012" b="1" i="0" u="none" dirty="0">
+                <a:solidFill>
+                  <a:srgbClr val="4A4230"/>
+                </a:solidFill>
+                <a:latin typeface="Noto Sans KR"/>
+              </a:rPr>
+              <a:t> </a:t>
+            </a:r>
+            <a:r>
+              <a:rPr sz="1012" b="1" i="0" u="none" dirty="0" err="1">
+                <a:solidFill>
+                  <a:srgbClr val="4A4230"/>
+                </a:solidFill>
+                <a:latin typeface="Noto Sans KR"/>
+              </a:rPr>
+              <a:t>전처리하고</a:t>
+            </a:r>
+            <a:r>
+              <a:rPr sz="1012" b="1" i="0" u="none" dirty="0">
+                <a:solidFill>
+                  <a:srgbClr val="4A4230"/>
+                </a:solidFill>
+                <a:latin typeface="Noto Sans KR"/>
+              </a:rPr>
+              <a:t> </a:t>
+            </a:r>
+            <a:r>
+              <a:rPr sz="1012" b="1" i="0" u="none" dirty="0" err="1">
+                <a:solidFill>
+                  <a:srgbClr val="4A4230"/>
+                </a:solidFill>
+                <a:latin typeface="Noto Sans KR"/>
+              </a:rPr>
+              <a:t>일치</a:t>
+            </a:r>
+            <a:r>
+              <a:rPr sz="1012" b="1" i="0" u="none" dirty="0">
+                <a:solidFill>
+                  <a:srgbClr val="4A4230"/>
+                </a:solidFill>
+                <a:latin typeface="Noto Sans KR"/>
+              </a:rPr>
+              <a:t> </a:t>
+            </a:r>
+            <a:r>
+              <a:rPr sz="1012" b="1" i="0" u="none" dirty="0" err="1">
+                <a:solidFill>
+                  <a:srgbClr val="4A4230"/>
+                </a:solidFill>
+                <a:latin typeface="Noto Sans KR"/>
+              </a:rPr>
+              <a:t>판별을</a:t>
+            </a:r>
+            <a:r>
+              <a:rPr sz="1012" b="1" i="0" u="none" dirty="0">
+                <a:solidFill>
+                  <a:srgbClr val="4A4230"/>
+                </a:solidFill>
+                <a:latin typeface="Noto Sans KR"/>
+              </a:rPr>
+              <a:t> </a:t>
+            </a:r>
+            <a:r>
+              <a:rPr sz="1012" b="1" i="0" u="none" dirty="0" err="1">
+                <a:solidFill>
+                  <a:srgbClr val="4A4230"/>
+                </a:solidFill>
+                <a:latin typeface="Noto Sans KR"/>
+              </a:rPr>
+              <a:t>내립니다</a:t>
+            </a:r>
+            <a:r>
+              <a:rPr sz="1012" b="1" i="0" u="none" dirty="0">
+                <a:solidFill>
+                  <a:srgbClr val="4A4230"/>
+                </a:solidFill>
+                <a:latin typeface="Noto Sans KR"/>
+              </a:rPr>
+              <a:t>.</a:t>
             </a:r>
           </a:p>
         </p:txBody>
